--- a/presentazione/Digitalions-Direttivo-108LA.pptx
+++ b/presentazione/Digitalions-Direttivo-108LA.pptx
@@ -4146,7 +4146,7 @@
                 <a:ea typeface="Trebuchet MS" pitchFamily="34" charset="-122"/>
                 <a:cs typeface="Trebuchet MS" pitchFamily="34" charset="-120"/>
               </a:rPr>
-              <a:t>Quadri PDF già disponibili oggi</a:t>
+              <a:t>La Dashboard · il quadro d'insieme del Distretto</a:t>
             </a:r>
             <a:endParaRPr lang="en-US" sz="2600" dirty="0"/>
           </a:p>
@@ -4185,7 +4185,7 @@
                 <a:ea typeface="Calibri" pitchFamily="34" charset="-122"/>
                 <a:cs typeface="Calibri" pitchFamily="34" charset="-120"/>
               </a:rPr>
-              <a:t>6 report stampabili in PDF dal pulsante "Stampa / Salva PDF" presente in ogni pagina</a:t>
+              <a:t>Tutto a colpo d'occhio: dal totale Distretto fino al singolo Club, in un'unica pagina</a:t>
             </a:r>
             <a:endParaRPr lang="en-US" sz="1300" dirty="0"/>
           </a:p>
@@ -4199,110 +4199,12 @@
         </p:nvSpPr>
         <p:spPr>
           <a:xfrm>
-            <a:off x="457200" y="1325880"/>
-            <a:ext cx="2651760" cy="365760"/>
-          </a:xfrm>
-          <a:prstGeom prst="rect">
-            <a:avLst/>
-          </a:prstGeom>
-          <a:solidFill>
-            <a:srgbClr val="0055FF"/>
-          </a:solidFill>
-          <a:ln/>
-        </p:spPr>
-      </p:sp>
-      <p:sp>
-        <p:nvSpPr>
-          <p:cNvPr id="5" name="Text 3"/>
-          <p:cNvSpPr/>
-          <p:nvPr/>
-        </p:nvSpPr>
-        <p:spPr>
-          <a:xfrm>
-            <a:off x="594360" y="1325880"/>
-            <a:ext cx="1920240" cy="365760"/>
-          </a:xfrm>
-          <a:prstGeom prst="rect">
-            <a:avLst/>
-          </a:prstGeom>
-          <a:noFill/>
-          <a:ln/>
-        </p:spPr>
-        <p:txBody>
-          <a:bodyPr wrap="square" lIns="0" tIns="0" rIns="0" bIns="0" rtlCol="0" anchor="ctr"/>
-          <a:lstStyle/>
-          <a:p>
-            <a:pPr indent="0" marL="0">
-              <a:buNone/>
-            </a:pPr>
-            <a:r>
-              <a:rPr lang="en-US" sz="1000" b="1" spc="200" kern="0" dirty="0">
-                <a:solidFill>
-                  <a:srgbClr val="FFFFFF"/>
-                </a:solidFill>
-                <a:latin typeface="Calibri" pitchFamily="34" charset="0"/>
-                <a:ea typeface="Calibri" pitchFamily="34" charset="-122"/>
-                <a:cs typeface="Calibri" pitchFamily="34" charset="-120"/>
-              </a:rPr>
-              <a:t>SEZIONE SOCI</a:t>
-            </a:r>
-            <a:endParaRPr lang="en-US" sz="1000" dirty="0"/>
-          </a:p>
-        </p:txBody>
-      </p:sp>
-      <p:sp>
-        <p:nvSpPr>
-          <p:cNvPr id="6" name="Text 4"/>
-          <p:cNvSpPr/>
-          <p:nvPr/>
-        </p:nvSpPr>
-        <p:spPr>
-          <a:xfrm>
-            <a:off x="2697480" y="1325880"/>
-            <a:ext cx="320040" cy="365760"/>
-          </a:xfrm>
-          <a:prstGeom prst="rect">
-            <a:avLst/>
-          </a:prstGeom>
-          <a:noFill/>
-          <a:ln/>
-        </p:spPr>
-        <p:txBody>
-          <a:bodyPr wrap="square" lIns="0" tIns="0" rIns="0" bIns="0" rtlCol="0" anchor="ctr"/>
-          <a:lstStyle/>
-          <a:p>
-            <a:pPr algn="r" indent="0" marL="0">
-              <a:buNone/>
-            </a:pPr>
-            <a:r>
-              <a:rPr lang="en-US" sz="1600" b="1" dirty="0">
-                <a:solidFill>
-                  <a:srgbClr val="FFFFFF"/>
-                </a:solidFill>
-                <a:latin typeface="Trebuchet MS" pitchFamily="34" charset="0"/>
-                <a:ea typeface="Trebuchet MS" pitchFamily="34" charset="-122"/>
-                <a:cs typeface="Trebuchet MS" pitchFamily="34" charset="-120"/>
-              </a:rPr>
-              <a:t>3</a:t>
-            </a:r>
-            <a:endParaRPr lang="en-US" sz="1600" dirty="0"/>
-          </a:p>
-        </p:txBody>
-      </p:sp>
-      <p:sp>
-        <p:nvSpPr>
-          <p:cNvPr id="7" name="Shape 5"/>
-          <p:cNvSpPr/>
-          <p:nvPr/>
-        </p:nvSpPr>
-        <p:spPr>
-          <a:xfrm>
-            <a:off x="457200" y="1783080"/>
-            <a:ext cx="2651760" cy="868680"/>
+            <a:off x="457200" y="1417320"/>
+            <a:ext cx="8229600" cy="594360"/>
           </a:xfrm>
           <a:prstGeom prst="roundRect">
             <a:avLst>
-              <a:gd name="adj" fmla="val 10526"/>
+              <a:gd name="adj" fmla="val 15385"/>
             </a:avLst>
           </a:prstGeom>
           <a:solidFill>
@@ -4325,89 +4227,112 @@
       </p:sp>
       <p:sp>
         <p:nvSpPr>
-          <p:cNvPr id="8" name="Text 6"/>
-          <p:cNvSpPr/>
-          <p:nvPr/>
-        </p:nvSpPr>
-        <p:spPr>
-          <a:xfrm>
-            <a:off x="530352" y="1856232"/>
-            <a:ext cx="384048" cy="384048"/>
-          </a:xfrm>
-          <a:prstGeom prst="rect">
-            <a:avLst/>
-          </a:prstGeom>
-          <a:noFill/>
-          <a:ln/>
-        </p:spPr>
-        <p:txBody>
-          <a:bodyPr wrap="square" lIns="0" tIns="0" rIns="0" bIns="0" rtlCol="0" anchor="ctr"/>
-          <a:lstStyle/>
-          <a:p>
-            <a:pPr indent="0" marL="0">
-              <a:buNone/>
-            </a:pPr>
-            <a:r>
-              <a:rPr lang="en-US" sz="1600" dirty="0">
-                <a:solidFill>
-                  <a:srgbClr val="000000"/>
-                </a:solidFill>
-              </a:rPr>
-              <a:t>📅</a:t>
-            </a:r>
-            <a:endParaRPr lang="en-US" sz="1600" dirty="0"/>
-          </a:p>
-        </p:txBody>
-      </p:sp>
-      <p:sp>
-        <p:nvSpPr>
-          <p:cNvPr id="9" name="Text 7"/>
-          <p:cNvSpPr/>
-          <p:nvPr/>
-        </p:nvSpPr>
-        <p:spPr>
-          <a:xfrm>
-            <a:off x="960120" y="1828800"/>
-            <a:ext cx="2057400" cy="274320"/>
-          </a:xfrm>
-          <a:prstGeom prst="rect">
-            <a:avLst/>
-          </a:prstGeom>
-          <a:noFill/>
-          <a:ln/>
-        </p:spPr>
-        <p:txBody>
-          <a:bodyPr wrap="square" lIns="0" tIns="0" rIns="0" bIns="0" rtlCol="0" anchor="ctr"/>
-          <a:lstStyle/>
-          <a:p>
-            <a:pPr indent="0" marL="0">
-              <a:buNone/>
-            </a:pPr>
-            <a:r>
-              <a:rPr lang="en-US" sz="1050" b="1" dirty="0">
-                <a:solidFill>
-                  <a:srgbClr val="0F172A"/>
+          <p:cNvPr id="5" name="Shape 3"/>
+          <p:cNvSpPr/>
+          <p:nvPr/>
+        </p:nvSpPr>
+        <p:spPr>
+          <a:xfrm>
+            <a:off x="594360" y="1536192"/>
+            <a:ext cx="365760" cy="365760"/>
+          </a:xfrm>
+          <a:prstGeom prst="ellipse">
+            <a:avLst/>
+          </a:prstGeom>
+          <a:solidFill>
+            <a:srgbClr val="0055FF"/>
+          </a:solidFill>
+          <a:ln/>
+        </p:spPr>
+      </p:sp>
+      <p:sp>
+        <p:nvSpPr>
+          <p:cNvPr id="6" name="Text 4"/>
+          <p:cNvSpPr/>
+          <p:nvPr/>
+        </p:nvSpPr>
+        <p:spPr>
+          <a:xfrm>
+            <a:off x="594360" y="1536192"/>
+            <a:ext cx="365760" cy="365760"/>
+          </a:xfrm>
+          <a:prstGeom prst="rect">
+            <a:avLst/>
+          </a:prstGeom>
+          <a:noFill/>
+          <a:ln/>
+        </p:spPr>
+        <p:txBody>
+          <a:bodyPr wrap="square" lIns="0" tIns="0" rIns="0" bIns="0" rtlCol="0" anchor="ctr"/>
+          <a:lstStyle/>
+          <a:p>
+            <a:pPr algn="ctr" indent="0" marL="0">
+              <a:buNone/>
+            </a:pPr>
+            <a:r>
+              <a:rPr lang="en-US" sz="1700" b="1" dirty="0">
+                <a:solidFill>
+                  <a:srgbClr val="FFFFFF"/>
                 </a:solidFill>
                 <a:latin typeface="Trebuchet MS" pitchFamily="34" charset="0"/>
                 <a:ea typeface="Trebuchet MS" pitchFamily="34" charset="-122"/>
                 <a:cs typeface="Trebuchet MS" pitchFamily="34" charset="-120"/>
               </a:rPr>
-              <a:t>Per Fasce di Età</a:t>
-            </a:r>
-            <a:endParaRPr lang="en-US" sz="1050" dirty="0"/>
-          </a:p>
-        </p:txBody>
-      </p:sp>
-      <p:sp>
-        <p:nvSpPr>
-          <p:cNvPr id="10" name="Text 8"/>
-          <p:cNvSpPr/>
-          <p:nvPr/>
-        </p:nvSpPr>
-        <p:spPr>
-          <a:xfrm>
-            <a:off x="594360" y="2130552"/>
-            <a:ext cx="2377440" cy="384048"/>
+              <a:t>1</a:t>
+            </a:r>
+            <a:endParaRPr lang="en-US" sz="1700" dirty="0"/>
+          </a:p>
+        </p:txBody>
+      </p:sp>
+      <p:sp>
+        <p:nvSpPr>
+          <p:cNvPr id="7" name="Text 5"/>
+          <p:cNvSpPr/>
+          <p:nvPr/>
+        </p:nvSpPr>
+        <p:spPr>
+          <a:xfrm>
+            <a:off x="1143000" y="1490472"/>
+            <a:ext cx="7315200" cy="274320"/>
+          </a:xfrm>
+          <a:prstGeom prst="rect">
+            <a:avLst/>
+          </a:prstGeom>
+          <a:noFill/>
+          <a:ln/>
+        </p:spPr>
+        <p:txBody>
+          <a:bodyPr wrap="square" lIns="0" tIns="0" rIns="0" bIns="0" rtlCol="0" anchor="ctr"/>
+          <a:lstStyle/>
+          <a:p>
+            <a:pPr indent="0" marL="0">
+              <a:buNone/>
+            </a:pPr>
+            <a:r>
+              <a:rPr lang="en-US" sz="1250" b="1" dirty="0">
+                <a:solidFill>
+                  <a:srgbClr val="0F172A"/>
+                </a:solidFill>
+                <a:latin typeface="Trebuchet MS" pitchFamily="34" charset="0"/>
+                <a:ea typeface="Trebuchet MS" pitchFamily="34" charset="-122"/>
+                <a:cs typeface="Trebuchet MS" pitchFamily="34" charset="-120"/>
+              </a:rPr>
+              <a:t>Indicatori del Distretto · FY vs PFY</a:t>
+            </a:r>
+            <a:endParaRPr lang="en-US" sz="1250" dirty="0"/>
+          </a:p>
+        </p:txBody>
+      </p:sp>
+      <p:sp>
+        <p:nvSpPr>
+          <p:cNvPr id="8" name="Text 6"/>
+          <p:cNvSpPr/>
+          <p:nvPr/>
+        </p:nvSpPr>
+        <p:spPr>
+          <a:xfrm>
+            <a:off x="1143000" y="1764792"/>
+            <a:ext cx="7315200" cy="256032"/>
           </a:xfrm>
           <a:prstGeom prst="rect">
             <a:avLst/>
@@ -4423,7 +4348,7 @@
               <a:buNone/>
             </a:pPr>
             <a:r>
-              <a:rPr lang="en-US" sz="800" dirty="0">
+              <a:rPr lang="en-US" sz="950" dirty="0">
                 <a:solidFill>
                   <a:srgbClr val="334155"/>
                 </a:solidFill>
@@ -4431,65 +4356,26 @@
                 <a:ea typeface="Calibri" pitchFamily="34" charset="-122"/>
                 <a:cs typeface="Calibri" pitchFamily="34" charset="-120"/>
               </a:rPr>
-              <a:t>Matricola, Titolo, Nome, Cognome, Compleanno, Età. Ordinato per età crescente. Filtro range età.</a:t>
-            </a:r>
-            <a:endParaRPr lang="en-US" sz="800" dirty="0"/>
-          </a:p>
-        </p:txBody>
-      </p:sp>
-      <p:sp>
-        <p:nvSpPr>
-          <p:cNvPr id="11" name="Text 9"/>
-          <p:cNvSpPr/>
-          <p:nvPr/>
-        </p:nvSpPr>
-        <p:spPr>
-          <a:xfrm>
-            <a:off x="594360" y="2496312"/>
-            <a:ext cx="2377440" cy="146304"/>
-          </a:xfrm>
-          <a:prstGeom prst="rect">
-            <a:avLst/>
-          </a:prstGeom>
-          <a:noFill/>
-          <a:ln/>
-        </p:spPr>
-        <p:txBody>
-          <a:bodyPr wrap="square" lIns="0" tIns="0" rIns="0" bIns="0" rtlCol="0" anchor="ctr"/>
-          <a:lstStyle/>
-          <a:p>
-            <a:pPr indent="0" marL="0">
-              <a:buNone/>
-            </a:pPr>
-            <a:r>
-              <a:rPr lang="en-US" sz="700" dirty="0">
-                <a:solidFill>
-                  <a:srgbClr val="0055FF"/>
-                </a:solidFill>
-                <a:latin typeface="Consolas" pitchFamily="34" charset="0"/>
-                <a:ea typeface="Consolas" pitchFamily="34" charset="-122"/>
-                <a:cs typeface="Consolas" pitchFamily="34" charset="-120"/>
-              </a:rPr>
-              <a:t>/soci/quadri/eta</a:t>
-            </a:r>
-            <a:endParaRPr lang="en-US" sz="700" dirty="0"/>
-          </a:p>
-        </p:txBody>
-      </p:sp>
-      <p:sp>
-        <p:nvSpPr>
-          <p:cNvPr id="12" name="Shape 10"/>
-          <p:cNvSpPr/>
-          <p:nvPr/>
-        </p:nvSpPr>
-        <p:spPr>
-          <a:xfrm>
-            <a:off x="457200" y="2743200"/>
-            <a:ext cx="2651760" cy="868680"/>
+              <a:t>Tre pannelli in alto con KPI di sintesi (Club Metrics, Membership Metrics, Service Metrics) calcolati sull'anno sociale in corso e confrontati con il precedente.</a:t>
+            </a:r>
+            <a:endParaRPr lang="en-US" sz="950" dirty="0"/>
+          </a:p>
+        </p:txBody>
+      </p:sp>
+      <p:sp>
+        <p:nvSpPr>
+          <p:cNvPr id="9" name="Shape 7"/>
+          <p:cNvSpPr/>
+          <p:nvPr/>
+        </p:nvSpPr>
+        <p:spPr>
+          <a:xfrm>
+            <a:off x="457200" y="2057400"/>
+            <a:ext cx="8229600" cy="594360"/>
           </a:xfrm>
           <a:prstGeom prst="roundRect">
             <a:avLst>
-              <a:gd name="adj" fmla="val 10526"/>
+              <a:gd name="adj" fmla="val 15385"/>
             </a:avLst>
           </a:prstGeom>
           <a:solidFill>
@@ -4512,89 +4398,112 @@
       </p:sp>
       <p:sp>
         <p:nvSpPr>
-          <p:cNvPr id="13" name="Text 11"/>
-          <p:cNvSpPr/>
-          <p:nvPr/>
-        </p:nvSpPr>
-        <p:spPr>
-          <a:xfrm>
-            <a:off x="530352" y="2816352"/>
-            <a:ext cx="384048" cy="384048"/>
-          </a:xfrm>
-          <a:prstGeom prst="rect">
-            <a:avLst/>
-          </a:prstGeom>
-          <a:noFill/>
-          <a:ln/>
-        </p:spPr>
-        <p:txBody>
-          <a:bodyPr wrap="square" lIns="0" tIns="0" rIns="0" bIns="0" rtlCol="0" anchor="ctr"/>
-          <a:lstStyle/>
-          <a:p>
-            <a:pPr indent="0" marL="0">
-              <a:buNone/>
-            </a:pPr>
-            <a:r>
-              <a:rPr lang="en-US" sz="1600" dirty="0">
-                <a:solidFill>
-                  <a:srgbClr val="000000"/>
-                </a:solidFill>
-              </a:rPr>
-              <a:t>🏅</a:t>
-            </a:r>
-            <a:endParaRPr lang="en-US" sz="1600" dirty="0"/>
-          </a:p>
-        </p:txBody>
-      </p:sp>
-      <p:sp>
-        <p:nvSpPr>
-          <p:cNvPr id="14" name="Text 12"/>
-          <p:cNvSpPr/>
-          <p:nvPr/>
-        </p:nvSpPr>
-        <p:spPr>
-          <a:xfrm>
-            <a:off x="960120" y="2788920"/>
-            <a:ext cx="2057400" cy="274320"/>
-          </a:xfrm>
-          <a:prstGeom prst="rect">
-            <a:avLst/>
-          </a:prstGeom>
-          <a:noFill/>
-          <a:ln/>
-        </p:spPr>
-        <p:txBody>
-          <a:bodyPr wrap="square" lIns="0" tIns="0" rIns="0" bIns="0" rtlCol="0" anchor="ctr"/>
-          <a:lstStyle/>
-          <a:p>
-            <a:pPr indent="0" marL="0">
-              <a:buNone/>
-            </a:pPr>
-            <a:r>
-              <a:rPr lang="en-US" sz="1050" b="1" dirty="0">
-                <a:solidFill>
-                  <a:srgbClr val="0F172A"/>
+          <p:cNvPr id="10" name="Shape 8"/>
+          <p:cNvSpPr/>
+          <p:nvPr/>
+        </p:nvSpPr>
+        <p:spPr>
+          <a:xfrm>
+            <a:off x="594360" y="2176272"/>
+            <a:ext cx="365760" cy="365760"/>
+          </a:xfrm>
+          <a:prstGeom prst="ellipse">
+            <a:avLst/>
+          </a:prstGeom>
+          <a:solidFill>
+            <a:srgbClr val="7C3AED"/>
+          </a:solidFill>
+          <a:ln/>
+        </p:spPr>
+      </p:sp>
+      <p:sp>
+        <p:nvSpPr>
+          <p:cNvPr id="11" name="Text 9"/>
+          <p:cNvSpPr/>
+          <p:nvPr/>
+        </p:nvSpPr>
+        <p:spPr>
+          <a:xfrm>
+            <a:off x="594360" y="2176272"/>
+            <a:ext cx="365760" cy="365760"/>
+          </a:xfrm>
+          <a:prstGeom prst="rect">
+            <a:avLst/>
+          </a:prstGeom>
+          <a:noFill/>
+          <a:ln/>
+        </p:spPr>
+        <p:txBody>
+          <a:bodyPr wrap="square" lIns="0" tIns="0" rIns="0" bIns="0" rtlCol="0" anchor="ctr"/>
+          <a:lstStyle/>
+          <a:p>
+            <a:pPr algn="ctr" indent="0" marL="0">
+              <a:buNone/>
+            </a:pPr>
+            <a:r>
+              <a:rPr lang="en-US" sz="1700" b="1" dirty="0">
+                <a:solidFill>
+                  <a:srgbClr val="FFFFFF"/>
                 </a:solidFill>
                 <a:latin typeface="Trebuchet MS" pitchFamily="34" charset="0"/>
                 <a:ea typeface="Trebuchet MS" pitchFamily="34" charset="-122"/>
                 <a:cs typeface="Trebuchet MS" pitchFamily="34" charset="-120"/>
               </a:rPr>
-              <a:t>Per Anzianità Lionistica</a:t>
-            </a:r>
-            <a:endParaRPr lang="en-US" sz="1050" dirty="0"/>
-          </a:p>
-        </p:txBody>
-      </p:sp>
-      <p:sp>
-        <p:nvSpPr>
-          <p:cNvPr id="15" name="Text 13"/>
-          <p:cNvSpPr/>
-          <p:nvPr/>
-        </p:nvSpPr>
-        <p:spPr>
-          <a:xfrm>
-            <a:off x="594360" y="3090672"/>
-            <a:ext cx="2377440" cy="384048"/>
+              <a:t>2</a:t>
+            </a:r>
+            <a:endParaRPr lang="en-US" sz="1700" dirty="0"/>
+          </a:p>
+        </p:txBody>
+      </p:sp>
+      <p:sp>
+        <p:nvSpPr>
+          <p:cNvPr id="12" name="Text 10"/>
+          <p:cNvSpPr/>
+          <p:nvPr/>
+        </p:nvSpPr>
+        <p:spPr>
+          <a:xfrm>
+            <a:off x="1143000" y="2130552"/>
+            <a:ext cx="7315200" cy="274320"/>
+          </a:xfrm>
+          <a:prstGeom prst="rect">
+            <a:avLst/>
+          </a:prstGeom>
+          <a:noFill/>
+          <a:ln/>
+        </p:spPr>
+        <p:txBody>
+          <a:bodyPr wrap="square" lIns="0" tIns="0" rIns="0" bIns="0" rtlCol="0" anchor="ctr"/>
+          <a:lstStyle/>
+          <a:p>
+            <a:pPr indent="0" marL="0">
+              <a:buNone/>
+            </a:pPr>
+            <a:r>
+              <a:rPr lang="en-US" sz="1250" b="1" dirty="0">
+                <a:solidFill>
+                  <a:srgbClr val="0F172A"/>
+                </a:solidFill>
+                <a:latin typeface="Trebuchet MS" pitchFamily="34" charset="0"/>
+                <a:ea typeface="Trebuchet MS" pitchFamily="34" charset="-122"/>
+                <a:cs typeface="Trebuchet MS" pitchFamily="34" charset="-120"/>
+              </a:rPr>
+              <a:t>Grafici annuali progressivi</a:t>
+            </a:r>
+            <a:endParaRPr lang="en-US" sz="1250" dirty="0"/>
+          </a:p>
+        </p:txBody>
+      </p:sp>
+      <p:sp>
+        <p:nvSpPr>
+          <p:cNvPr id="13" name="Text 11"/>
+          <p:cNvSpPr/>
+          <p:nvPr/>
+        </p:nvSpPr>
+        <p:spPr>
+          <a:xfrm>
+            <a:off x="1143000" y="2404872"/>
+            <a:ext cx="7315200" cy="256032"/>
           </a:xfrm>
           <a:prstGeom prst="rect">
             <a:avLst/>
@@ -4610,7 +4519,7 @@
               <a:buNone/>
             </a:pPr>
             <a:r>
-              <a:rPr lang="en-US" sz="800" dirty="0">
+              <a:rPr lang="en-US" sz="950" dirty="0">
                 <a:solidFill>
                   <a:srgbClr val="334155"/>
                 </a:solidFill>
@@ -4618,65 +4527,26 @@
                 <a:ea typeface="Calibri" pitchFamily="34" charset="-122"/>
                 <a:cs typeface="Calibri" pitchFamily="34" charset="-120"/>
               </a:rPr>
-              <a:t>Nome, Cognome, Data Ingresso, Anni di anzianità. Ordinato dai più anziani.</a:t>
-            </a:r>
-            <a:endParaRPr lang="en-US" sz="800" dirty="0"/>
-          </a:p>
-        </p:txBody>
-      </p:sp>
-      <p:sp>
-        <p:nvSpPr>
-          <p:cNvPr id="16" name="Text 14"/>
-          <p:cNvSpPr/>
-          <p:nvPr/>
-        </p:nvSpPr>
-        <p:spPr>
-          <a:xfrm>
-            <a:off x="594360" y="3456432"/>
-            <a:ext cx="2377440" cy="146304"/>
-          </a:xfrm>
-          <a:prstGeom prst="rect">
-            <a:avLst/>
-          </a:prstGeom>
-          <a:noFill/>
-          <a:ln/>
-        </p:spPr>
-        <p:txBody>
-          <a:bodyPr wrap="square" lIns="0" tIns="0" rIns="0" bIns="0" rtlCol="0" anchor="ctr"/>
-          <a:lstStyle/>
-          <a:p>
-            <a:pPr indent="0" marL="0">
-              <a:buNone/>
-            </a:pPr>
-            <a:r>
-              <a:rPr lang="en-US" sz="700" dirty="0">
-                <a:solidFill>
-                  <a:srgbClr val="0055FF"/>
-                </a:solidFill>
-                <a:latin typeface="Consolas" pitchFamily="34" charset="0"/>
-                <a:ea typeface="Consolas" pitchFamily="34" charset="-122"/>
-                <a:cs typeface="Consolas" pitchFamily="34" charset="-120"/>
-              </a:rPr>
-              <a:t>/soci/quadri/anzianita</a:t>
-            </a:r>
-            <a:endParaRPr lang="en-US" sz="700" dirty="0"/>
-          </a:p>
-        </p:txBody>
-      </p:sp>
-      <p:sp>
-        <p:nvSpPr>
-          <p:cNvPr id="17" name="Shape 15"/>
-          <p:cNvSpPr/>
-          <p:nvPr/>
-        </p:nvSpPr>
-        <p:spPr>
-          <a:xfrm>
-            <a:off x="457200" y="3703320"/>
-            <a:ext cx="2651760" cy="868680"/>
+              <a:t>Andamento mensile del numero soci (Lug→Giu, FY vs PFY) e delle attività di servizio per causa. Tabella riepilogo: numero, % e fondi raccolti per ciascuna causa.</a:t>
+            </a:r>
+            <a:endParaRPr lang="en-US" sz="950" dirty="0"/>
+          </a:p>
+        </p:txBody>
+      </p:sp>
+      <p:sp>
+        <p:nvSpPr>
+          <p:cNvPr id="14" name="Shape 12"/>
+          <p:cNvSpPr/>
+          <p:nvPr/>
+        </p:nvSpPr>
+        <p:spPr>
+          <a:xfrm>
+            <a:off x="457200" y="2697480"/>
+            <a:ext cx="8229600" cy="594360"/>
           </a:xfrm>
           <a:prstGeom prst="roundRect">
             <a:avLst>
-              <a:gd name="adj" fmla="val 10526"/>
+              <a:gd name="adj" fmla="val 15385"/>
             </a:avLst>
           </a:prstGeom>
           <a:solidFill>
@@ -4699,89 +4569,112 @@
       </p:sp>
       <p:sp>
         <p:nvSpPr>
-          <p:cNvPr id="18" name="Text 16"/>
-          <p:cNvSpPr/>
-          <p:nvPr/>
-        </p:nvSpPr>
-        <p:spPr>
-          <a:xfrm>
-            <a:off x="530352" y="3776472"/>
-            <a:ext cx="384048" cy="384048"/>
-          </a:xfrm>
-          <a:prstGeom prst="rect">
-            <a:avLst/>
-          </a:prstGeom>
-          <a:noFill/>
-          <a:ln/>
-        </p:spPr>
-        <p:txBody>
-          <a:bodyPr wrap="square" lIns="0" tIns="0" rIns="0" bIns="0" rtlCol="0" anchor="ctr"/>
-          <a:lstStyle/>
-          <a:p>
-            <a:pPr indent="0" marL="0">
-              <a:buNone/>
-            </a:pPr>
-            <a:r>
-              <a:rPr lang="en-US" sz="1600" dirty="0">
-                <a:solidFill>
-                  <a:srgbClr val="000000"/>
-                </a:solidFill>
-              </a:rPr>
-              <a:t>📋</a:t>
-            </a:r>
-            <a:endParaRPr lang="en-US" sz="1600" dirty="0"/>
-          </a:p>
-        </p:txBody>
-      </p:sp>
-      <p:sp>
-        <p:nvSpPr>
-          <p:cNvPr id="19" name="Text 17"/>
-          <p:cNvSpPr/>
-          <p:nvPr/>
-        </p:nvSpPr>
-        <p:spPr>
-          <a:xfrm>
-            <a:off x="960120" y="3749040"/>
-            <a:ext cx="2057400" cy="274320"/>
-          </a:xfrm>
-          <a:prstGeom prst="rect">
-            <a:avLst/>
-          </a:prstGeom>
-          <a:noFill/>
-          <a:ln/>
-        </p:spPr>
-        <p:txBody>
-          <a:bodyPr wrap="square" lIns="0" tIns="0" rIns="0" bIns="0" rtlCol="0" anchor="ctr"/>
-          <a:lstStyle/>
-          <a:p>
-            <a:pPr indent="0" marL="0">
-              <a:buNone/>
-            </a:pPr>
-            <a:r>
-              <a:rPr lang="en-US" sz="1050" b="1" dirty="0">
-                <a:solidFill>
-                  <a:srgbClr val="0F172A"/>
+          <p:cNvPr id="15" name="Shape 13"/>
+          <p:cNvSpPr/>
+          <p:nvPr/>
+        </p:nvSpPr>
+        <p:spPr>
+          <a:xfrm>
+            <a:off x="594360" y="2816352"/>
+            <a:ext cx="365760" cy="365760"/>
+          </a:xfrm>
+          <a:prstGeom prst="ellipse">
+            <a:avLst/>
+          </a:prstGeom>
+          <a:solidFill>
+            <a:srgbClr val="059669"/>
+          </a:solidFill>
+          <a:ln/>
+        </p:spPr>
+      </p:sp>
+      <p:sp>
+        <p:nvSpPr>
+          <p:cNvPr id="16" name="Text 14"/>
+          <p:cNvSpPr/>
+          <p:nvPr/>
+        </p:nvSpPr>
+        <p:spPr>
+          <a:xfrm>
+            <a:off x="594360" y="2816352"/>
+            <a:ext cx="365760" cy="365760"/>
+          </a:xfrm>
+          <a:prstGeom prst="rect">
+            <a:avLst/>
+          </a:prstGeom>
+          <a:noFill/>
+          <a:ln/>
+        </p:spPr>
+        <p:txBody>
+          <a:bodyPr wrap="square" lIns="0" tIns="0" rIns="0" bIns="0" rtlCol="0" anchor="ctr"/>
+          <a:lstStyle/>
+          <a:p>
+            <a:pPr algn="ctr" indent="0" marL="0">
+              <a:buNone/>
+            </a:pPr>
+            <a:r>
+              <a:rPr lang="en-US" sz="1700" b="1" dirty="0">
+                <a:solidFill>
+                  <a:srgbClr val="FFFFFF"/>
                 </a:solidFill>
                 <a:latin typeface="Trebuchet MS" pitchFamily="34" charset="0"/>
                 <a:ea typeface="Trebuchet MS" pitchFamily="34" charset="-122"/>
                 <a:cs typeface="Trebuchet MS" pitchFamily="34" charset="-120"/>
               </a:rPr>
-              <a:t>Caratteristiche Associative</a:t>
-            </a:r>
-            <a:endParaRPr lang="en-US" sz="1050" dirty="0"/>
-          </a:p>
-        </p:txBody>
-      </p:sp>
-      <p:sp>
-        <p:nvSpPr>
-          <p:cNvPr id="20" name="Text 18"/>
-          <p:cNvSpPr/>
-          <p:nvPr/>
-        </p:nvSpPr>
-        <p:spPr>
-          <a:xfrm>
-            <a:off x="594360" y="4050792"/>
-            <a:ext cx="2377440" cy="384048"/>
+              <a:t>3</a:t>
+            </a:r>
+            <a:endParaRPr lang="en-US" sz="1700" dirty="0"/>
+          </a:p>
+        </p:txBody>
+      </p:sp>
+      <p:sp>
+        <p:nvSpPr>
+          <p:cNvPr id="17" name="Text 15"/>
+          <p:cNvSpPr/>
+          <p:nvPr/>
+        </p:nvSpPr>
+        <p:spPr>
+          <a:xfrm>
+            <a:off x="1143000" y="2770632"/>
+            <a:ext cx="7315200" cy="274320"/>
+          </a:xfrm>
+          <a:prstGeom prst="rect">
+            <a:avLst/>
+          </a:prstGeom>
+          <a:noFill/>
+          <a:ln/>
+        </p:spPr>
+        <p:txBody>
+          <a:bodyPr wrap="square" lIns="0" tIns="0" rIns="0" bIns="0" rtlCol="0" anchor="ctr"/>
+          <a:lstStyle/>
+          <a:p>
+            <a:pPr indent="0" marL="0">
+              <a:buNone/>
+            </a:pPr>
+            <a:r>
+              <a:rPr lang="en-US" sz="1250" b="1" dirty="0">
+                <a:solidFill>
+                  <a:srgbClr val="0F172A"/>
+                </a:solidFill>
+                <a:latin typeface="Trebuchet MS" pitchFamily="34" charset="0"/>
+                <a:ea typeface="Trebuchet MS" pitchFamily="34" charset="-122"/>
+                <a:cs typeface="Trebuchet MS" pitchFamily="34" charset="-120"/>
+              </a:rPr>
+              <a:t>Dashboard Soci per Club  ✨ nuovo</a:t>
+            </a:r>
+            <a:endParaRPr lang="en-US" sz="1250" dirty="0"/>
+          </a:p>
+        </p:txBody>
+      </p:sp>
+      <p:sp>
+        <p:nvSpPr>
+          <p:cNvPr id="18" name="Text 16"/>
+          <p:cNvSpPr/>
+          <p:nvPr/>
+        </p:nvSpPr>
+        <p:spPr>
+          <a:xfrm>
+            <a:off x="1143000" y="3044952"/>
+            <a:ext cx="7315200" cy="256032"/>
           </a:xfrm>
           <a:prstGeom prst="rect">
             <a:avLst/>
@@ -4797,7 +4690,7 @@
               <a:buNone/>
             </a:pPr>
             <a:r>
-              <a:rPr lang="en-US" sz="800" dirty="0">
+              <a:rPr lang="en-US" sz="950" dirty="0">
                 <a:solidFill>
                   <a:srgbClr val="334155"/>
                 </a:solidFill>
@@ -4805,163 +4698,26 @@
                 <a:ea typeface="Calibri" pitchFamily="34" charset="-122"/>
                 <a:cs typeface="Calibri" pitchFamily="34" charset="-120"/>
               </a:rPr>
-              <a:t>Tipo Associazione, Categoria, Programma, Cognome, Nome. Filtri multi.</a:t>
-            </a:r>
-            <a:endParaRPr lang="en-US" sz="800" dirty="0"/>
-          </a:p>
-        </p:txBody>
-      </p:sp>
-      <p:sp>
-        <p:nvSpPr>
-          <p:cNvPr id="21" name="Text 19"/>
-          <p:cNvSpPr/>
-          <p:nvPr/>
-        </p:nvSpPr>
-        <p:spPr>
-          <a:xfrm>
-            <a:off x="594360" y="4416552"/>
-            <a:ext cx="2377440" cy="146304"/>
-          </a:xfrm>
-          <a:prstGeom prst="rect">
-            <a:avLst/>
-          </a:prstGeom>
-          <a:noFill/>
-          <a:ln/>
-        </p:spPr>
-        <p:txBody>
-          <a:bodyPr wrap="square" lIns="0" tIns="0" rIns="0" bIns="0" rtlCol="0" anchor="ctr"/>
-          <a:lstStyle/>
-          <a:p>
-            <a:pPr indent="0" marL="0">
-              <a:buNone/>
-            </a:pPr>
-            <a:r>
-              <a:rPr lang="en-US" sz="700" dirty="0">
-                <a:solidFill>
-                  <a:srgbClr val="0055FF"/>
-                </a:solidFill>
-                <a:latin typeface="Consolas" pitchFamily="34" charset="0"/>
-                <a:ea typeface="Consolas" pitchFamily="34" charset="-122"/>
-                <a:cs typeface="Consolas" pitchFamily="34" charset="-120"/>
-              </a:rPr>
-              <a:t>/soci/quadri/caratteristiche</a:t>
-            </a:r>
-            <a:endParaRPr lang="en-US" sz="700" dirty="0"/>
-          </a:p>
-        </p:txBody>
-      </p:sp>
-      <p:sp>
-        <p:nvSpPr>
-          <p:cNvPr id="22" name="Shape 20"/>
-          <p:cNvSpPr/>
-          <p:nvPr/>
-        </p:nvSpPr>
-        <p:spPr>
-          <a:xfrm>
-            <a:off x="3246120" y="1325880"/>
-            <a:ext cx="2651760" cy="365760"/>
-          </a:xfrm>
-          <a:prstGeom prst="rect">
-            <a:avLst/>
-          </a:prstGeom>
-          <a:solidFill>
-            <a:srgbClr val="F5B606"/>
-          </a:solidFill>
-          <a:ln/>
-        </p:spPr>
-      </p:sp>
-      <p:sp>
-        <p:nvSpPr>
-          <p:cNvPr id="23" name="Text 21"/>
-          <p:cNvSpPr/>
-          <p:nvPr/>
-        </p:nvSpPr>
-        <p:spPr>
-          <a:xfrm>
-            <a:off x="3383280" y="1325880"/>
-            <a:ext cx="1920240" cy="365760"/>
-          </a:xfrm>
-          <a:prstGeom prst="rect">
-            <a:avLst/>
-          </a:prstGeom>
-          <a:noFill/>
-          <a:ln/>
-        </p:spPr>
-        <p:txBody>
-          <a:bodyPr wrap="square" lIns="0" tIns="0" rIns="0" bIns="0" rtlCol="0" anchor="ctr"/>
-          <a:lstStyle/>
-          <a:p>
-            <a:pPr indent="0" marL="0">
-              <a:buNone/>
-            </a:pPr>
-            <a:r>
-              <a:rPr lang="en-US" sz="1000" b="1" spc="200" kern="0" dirty="0">
-                <a:solidFill>
-                  <a:srgbClr val="FFFFFF"/>
-                </a:solidFill>
-                <a:latin typeface="Calibri" pitchFamily="34" charset="0"/>
-                <a:ea typeface="Calibri" pitchFamily="34" charset="-122"/>
-                <a:cs typeface="Calibri" pitchFamily="34" charset="-120"/>
-              </a:rPr>
-              <a:t>SEZIONE OFFICER</a:t>
-            </a:r>
-            <a:endParaRPr lang="en-US" sz="1000" dirty="0"/>
-          </a:p>
-        </p:txBody>
-      </p:sp>
-      <p:sp>
-        <p:nvSpPr>
-          <p:cNvPr id="24" name="Text 22"/>
-          <p:cNvSpPr/>
-          <p:nvPr/>
-        </p:nvSpPr>
-        <p:spPr>
-          <a:xfrm>
-            <a:off x="5486400" y="1325880"/>
-            <a:ext cx="320040" cy="365760"/>
-          </a:xfrm>
-          <a:prstGeom prst="rect">
-            <a:avLst/>
-          </a:prstGeom>
-          <a:noFill/>
-          <a:ln/>
-        </p:spPr>
-        <p:txBody>
-          <a:bodyPr wrap="square" lIns="0" tIns="0" rIns="0" bIns="0" rtlCol="0" anchor="ctr"/>
-          <a:lstStyle/>
-          <a:p>
-            <a:pPr algn="r" indent="0" marL="0">
-              <a:buNone/>
-            </a:pPr>
-            <a:r>
-              <a:rPr lang="en-US" sz="1600" b="1" dirty="0">
-                <a:solidFill>
-                  <a:srgbClr val="FFFFFF"/>
-                </a:solidFill>
-                <a:latin typeface="Trebuchet MS" pitchFamily="34" charset="0"/>
-                <a:ea typeface="Trebuchet MS" pitchFamily="34" charset="-122"/>
-                <a:cs typeface="Trebuchet MS" pitchFamily="34" charset="-120"/>
-              </a:rPr>
-              <a:t>1</a:t>
-            </a:r>
-            <a:endParaRPr lang="en-US" sz="1600" dirty="0"/>
-          </a:p>
-        </p:txBody>
-      </p:sp>
-      <p:sp>
-        <p:nvSpPr>
-          <p:cNvPr id="25" name="Shape 23"/>
-          <p:cNvSpPr/>
-          <p:nvPr/>
-        </p:nvSpPr>
-        <p:spPr>
-          <a:xfrm>
-            <a:off x="3246120" y="1783080"/>
-            <a:ext cx="2651760" cy="2788920"/>
+              <a:t>Selezioni un Club e vedi la sua composizione anagrafica: Fasce d'età (Under 50, 50-60, 60-70, Over 70) e Anzianità lionistica (Under 2, 2-5, 5-10, 10-15, 15-20, Over 20). Con quantità e %.</a:t>
+            </a:r>
+            <a:endParaRPr lang="en-US" sz="950" dirty="0"/>
+          </a:p>
+        </p:txBody>
+      </p:sp>
+      <p:sp>
+        <p:nvSpPr>
+          <p:cNvPr id="19" name="Shape 17"/>
+          <p:cNvSpPr/>
+          <p:nvPr/>
+        </p:nvSpPr>
+        <p:spPr>
+          <a:xfrm>
+            <a:off x="457200" y="3337560"/>
+            <a:ext cx="8229600" cy="594360"/>
           </a:xfrm>
           <a:prstGeom prst="roundRect">
             <a:avLst>
-              <a:gd name="adj" fmla="val 3448"/>
+              <a:gd name="adj" fmla="val 15385"/>
             </a:avLst>
           </a:prstGeom>
           <a:solidFill>
@@ -4984,14 +4740,34 @@
       </p:sp>
       <p:sp>
         <p:nvSpPr>
-          <p:cNvPr id="26" name="Text 24"/>
-          <p:cNvSpPr/>
-          <p:nvPr/>
-        </p:nvSpPr>
-        <p:spPr>
-          <a:xfrm>
-            <a:off x="3383280" y="1965960"/>
-            <a:ext cx="2377440" cy="594360"/>
+          <p:cNvPr id="20" name="Shape 18"/>
+          <p:cNvSpPr/>
+          <p:nvPr/>
+        </p:nvSpPr>
+        <p:spPr>
+          <a:xfrm>
+            <a:off x="594360" y="3456432"/>
+            <a:ext cx="365760" cy="365760"/>
+          </a:xfrm>
+          <a:prstGeom prst="ellipse">
+            <a:avLst/>
+          </a:prstGeom>
+          <a:solidFill>
+            <a:srgbClr val="EA580C"/>
+          </a:solidFill>
+          <a:ln/>
+        </p:spPr>
+      </p:sp>
+      <p:sp>
+        <p:nvSpPr>
+          <p:cNvPr id="21" name="Text 19"/>
+          <p:cNvSpPr/>
+          <p:nvPr/>
+        </p:nvSpPr>
+        <p:spPr>
+          <a:xfrm>
+            <a:off x="594360" y="3456432"/>
+            <a:ext cx="365760" cy="365760"/>
           </a:xfrm>
           <a:prstGeom prst="rect">
             <a:avLst/>
@@ -5007,66 +4783,69 @@
               <a:buNone/>
             </a:pPr>
             <a:r>
-              <a:rPr lang="en-US" sz="3600" dirty="0">
-                <a:solidFill>
-                  <a:srgbClr val="000000"/>
-                </a:solidFill>
-              </a:rPr>
-              <a:t>📑</a:t>
-            </a:r>
-            <a:endParaRPr lang="en-US" sz="3600" dirty="0"/>
-          </a:p>
-        </p:txBody>
-      </p:sp>
-      <p:sp>
-        <p:nvSpPr>
-          <p:cNvPr id="27" name="Text 25"/>
-          <p:cNvSpPr/>
-          <p:nvPr/>
-        </p:nvSpPr>
-        <p:spPr>
-          <a:xfrm>
-            <a:off x="3383280" y="2606040"/>
-            <a:ext cx="2377440" cy="365760"/>
-          </a:xfrm>
-          <a:prstGeom prst="rect">
-            <a:avLst/>
-          </a:prstGeom>
-          <a:noFill/>
-          <a:ln/>
-        </p:spPr>
-        <p:txBody>
-          <a:bodyPr wrap="square" lIns="0" tIns="0" rIns="0" bIns="0" rtlCol="0" anchor="ctr"/>
-          <a:lstStyle/>
-          <a:p>
-            <a:pPr algn="ctr" indent="0" marL="0">
-              <a:buNone/>
-            </a:pPr>
-            <a:r>
-              <a:rPr lang="en-US" sz="1200" b="1" dirty="0">
-                <a:solidFill>
-                  <a:srgbClr val="0F172A"/>
+              <a:rPr lang="en-US" sz="1700" b="1" dirty="0">
+                <a:solidFill>
+                  <a:srgbClr val="FFFFFF"/>
                 </a:solidFill>
                 <a:latin typeface="Trebuchet MS" pitchFamily="34" charset="0"/>
                 <a:ea typeface="Trebuchet MS" pitchFamily="34" charset="-122"/>
                 <a:cs typeface="Trebuchet MS" pitchFamily="34" charset="-120"/>
               </a:rPr>
-              <a:t>Incarichi con Nomine dai Club</a:t>
-            </a:r>
-            <a:endParaRPr lang="en-US" sz="1200" dirty="0"/>
-          </a:p>
-        </p:txBody>
-      </p:sp>
-      <p:sp>
-        <p:nvSpPr>
-          <p:cNvPr id="28" name="Text 26"/>
-          <p:cNvSpPr/>
-          <p:nvPr/>
-        </p:nvSpPr>
-        <p:spPr>
-          <a:xfrm>
-            <a:off x="3429000" y="3017520"/>
-            <a:ext cx="2286000" cy="1234440"/>
+              <a:t>4</a:t>
+            </a:r>
+            <a:endParaRPr lang="en-US" sz="1700" dirty="0"/>
+          </a:p>
+        </p:txBody>
+      </p:sp>
+      <p:sp>
+        <p:nvSpPr>
+          <p:cNvPr id="22" name="Text 20"/>
+          <p:cNvSpPr/>
+          <p:nvPr/>
+        </p:nvSpPr>
+        <p:spPr>
+          <a:xfrm>
+            <a:off x="1143000" y="3410712"/>
+            <a:ext cx="7315200" cy="274320"/>
+          </a:xfrm>
+          <a:prstGeom prst="rect">
+            <a:avLst/>
+          </a:prstGeom>
+          <a:noFill/>
+          <a:ln/>
+        </p:spPr>
+        <p:txBody>
+          <a:bodyPr wrap="square" lIns="0" tIns="0" rIns="0" bIns="0" rtlCol="0" anchor="ctr"/>
+          <a:lstStyle/>
+          <a:p>
+            <a:pPr indent="0" marL="0">
+              <a:buNone/>
+            </a:pPr>
+            <a:r>
+              <a:rPr lang="en-US" sz="1250" b="1" dirty="0">
+                <a:solidFill>
+                  <a:srgbClr val="0F172A"/>
+                </a:solidFill>
+                <a:latin typeface="Trebuchet MS" pitchFamily="34" charset="0"/>
+                <a:ea typeface="Trebuchet MS" pitchFamily="34" charset="-122"/>
+                <a:cs typeface="Trebuchet MS" pitchFamily="34" charset="-120"/>
+              </a:rPr>
+              <a:t>Dashboard Attività per Club  ✨ nuovo</a:t>
+            </a:r>
+            <a:endParaRPr lang="en-US" sz="1250" dirty="0"/>
+          </a:p>
+        </p:txBody>
+      </p:sp>
+      <p:sp>
+        <p:nvSpPr>
+          <p:cNvPr id="23" name="Text 21"/>
+          <p:cNvSpPr/>
+          <p:nvPr/>
+        </p:nvSpPr>
+        <p:spPr>
+          <a:xfrm>
+            <a:off x="1143000" y="3685032"/>
+            <a:ext cx="7315200" cy="256032"/>
           </a:xfrm>
           <a:prstGeom prst="rect">
             <a:avLst/>
@@ -5078,7 +4857,7 @@
           <a:bodyPr wrap="square" lIns="0" tIns="0" rIns="0" bIns="0" rtlCol="0" anchor="t"/>
           <a:lstStyle/>
           <a:p>
-            <a:pPr algn="ctr" indent="0" marL="0">
+            <a:pPr indent="0" marL="0">
               <a:buNone/>
             </a:pPr>
             <a:r>
@@ -5090,7 +4869,7 @@
                 <a:ea typeface="Calibri" pitchFamily="34" charset="-122"/>
                 <a:cs typeface="Calibri" pitchFamily="34" charset="-120"/>
               </a:rPr>
-              <a:t>Titolo Ufficiale, Nome Club, Zona, Circ., Cognome, Nome. Toggle "Raggruppa per titolo" — una tabella per ciascun incarico (es. tutti i Presidenti, tutti i Tesorieri). Filtro "Solo incarichi attivi".</a:t>
+              <a:t>Per il Club selezionato nell'anno sociale: numero attività, persone servite, volontari, ore. Divise in Amministrazione vs Service con % rispetto al totale del Club.</a:t>
             </a:r>
             <a:endParaRPr lang="en-US" sz="950" dirty="0"/>
           </a:p>
@@ -5098,155 +4877,18 @@
       </p:sp>
       <p:sp>
         <p:nvSpPr>
-          <p:cNvPr id="29" name="Text 27"/>
-          <p:cNvSpPr/>
-          <p:nvPr/>
-        </p:nvSpPr>
-        <p:spPr>
-          <a:xfrm>
-            <a:off x="3383280" y="4251960"/>
-            <a:ext cx="2377440" cy="274320"/>
-          </a:xfrm>
-          <a:prstGeom prst="rect">
-            <a:avLst/>
-          </a:prstGeom>
-          <a:noFill/>
-          <a:ln/>
-        </p:spPr>
-        <p:txBody>
-          <a:bodyPr wrap="square" lIns="0" tIns="0" rIns="0" bIns="0" rtlCol="0" anchor="ctr"/>
-          <a:lstStyle/>
-          <a:p>
-            <a:pPr algn="ctr" indent="0" marL="0">
-              <a:buNone/>
-            </a:pPr>
-            <a:r>
-              <a:rPr lang="en-US" sz="850" dirty="0">
-                <a:solidFill>
-                  <a:srgbClr val="F5B606"/>
-                </a:solidFill>
-                <a:latin typeface="Consolas" pitchFamily="34" charset="0"/>
-                <a:ea typeface="Consolas" pitchFamily="34" charset="-122"/>
-                <a:cs typeface="Consolas" pitchFamily="34" charset="-120"/>
-              </a:rPr>
-              <a:t>/officer/quadri/incarichi-club</a:t>
-            </a:r>
-            <a:endParaRPr lang="en-US" sz="850" dirty="0"/>
-          </a:p>
-        </p:txBody>
-      </p:sp>
-      <p:sp>
-        <p:nvSpPr>
-          <p:cNvPr id="30" name="Shape 28"/>
-          <p:cNvSpPr/>
-          <p:nvPr/>
-        </p:nvSpPr>
-        <p:spPr>
-          <a:xfrm>
-            <a:off x="6035040" y="1325880"/>
-            <a:ext cx="2651760" cy="365760"/>
-          </a:xfrm>
-          <a:prstGeom prst="rect">
-            <a:avLst/>
-          </a:prstGeom>
-          <a:solidFill>
-            <a:srgbClr val="7C3AED"/>
-          </a:solidFill>
-          <a:ln/>
-        </p:spPr>
-      </p:sp>
-      <p:sp>
-        <p:nvSpPr>
-          <p:cNvPr id="31" name="Text 29"/>
-          <p:cNvSpPr/>
-          <p:nvPr/>
-        </p:nvSpPr>
-        <p:spPr>
-          <a:xfrm>
-            <a:off x="6172200" y="1325880"/>
-            <a:ext cx="1920240" cy="365760"/>
-          </a:xfrm>
-          <a:prstGeom prst="rect">
-            <a:avLst/>
-          </a:prstGeom>
-          <a:noFill/>
-          <a:ln/>
-        </p:spPr>
-        <p:txBody>
-          <a:bodyPr wrap="square" lIns="0" tIns="0" rIns="0" bIns="0" rtlCol="0" anchor="ctr"/>
-          <a:lstStyle/>
-          <a:p>
-            <a:pPr indent="0" marL="0">
-              <a:buNone/>
-            </a:pPr>
-            <a:r>
-              <a:rPr lang="en-US" sz="1000" b="1" spc="200" kern="0" dirty="0">
-                <a:solidFill>
-                  <a:srgbClr val="FFFFFF"/>
-                </a:solidFill>
-                <a:latin typeface="Calibri" pitchFamily="34" charset="0"/>
-                <a:ea typeface="Calibri" pitchFamily="34" charset="-122"/>
-                <a:cs typeface="Calibri" pitchFamily="34" charset="-120"/>
-              </a:rPr>
-              <a:t>SEZIONE ATTIVITÀ</a:t>
-            </a:r>
-            <a:endParaRPr lang="en-US" sz="1000" dirty="0"/>
-          </a:p>
-        </p:txBody>
-      </p:sp>
-      <p:sp>
-        <p:nvSpPr>
-          <p:cNvPr id="32" name="Text 30"/>
-          <p:cNvSpPr/>
-          <p:nvPr/>
-        </p:nvSpPr>
-        <p:spPr>
-          <a:xfrm>
-            <a:off x="8275320" y="1325880"/>
-            <a:ext cx="320040" cy="365760"/>
-          </a:xfrm>
-          <a:prstGeom prst="rect">
-            <a:avLst/>
-          </a:prstGeom>
-          <a:noFill/>
-          <a:ln/>
-        </p:spPr>
-        <p:txBody>
-          <a:bodyPr wrap="square" lIns="0" tIns="0" rIns="0" bIns="0" rtlCol="0" anchor="ctr"/>
-          <a:lstStyle/>
-          <a:p>
-            <a:pPr algn="r" indent="0" marL="0">
-              <a:buNone/>
-            </a:pPr>
-            <a:r>
-              <a:rPr lang="en-US" sz="1600" b="1" dirty="0">
-                <a:solidFill>
-                  <a:srgbClr val="FFFFFF"/>
-                </a:solidFill>
-                <a:latin typeface="Trebuchet MS" pitchFamily="34" charset="0"/>
-                <a:ea typeface="Trebuchet MS" pitchFamily="34" charset="-122"/>
-                <a:cs typeface="Trebuchet MS" pitchFamily="34" charset="-120"/>
-              </a:rPr>
-              <a:t>2</a:t>
-            </a:r>
-            <a:endParaRPr lang="en-US" sz="1600" dirty="0"/>
-          </a:p>
-        </p:txBody>
-      </p:sp>
-      <p:sp>
-        <p:nvSpPr>
-          <p:cNvPr id="33" name="Shape 31"/>
-          <p:cNvSpPr/>
-          <p:nvPr/>
-        </p:nvSpPr>
-        <p:spPr>
-          <a:xfrm>
-            <a:off x="6035040" y="1783080"/>
-            <a:ext cx="2651760" cy="1325880"/>
+          <p:cNvPr id="24" name="Shape 22"/>
+          <p:cNvSpPr/>
+          <p:nvPr/>
+        </p:nvSpPr>
+        <p:spPr>
+          <a:xfrm>
+            <a:off x="457200" y="3977640"/>
+            <a:ext cx="8229600" cy="594360"/>
           </a:xfrm>
           <a:prstGeom prst="roundRect">
             <a:avLst>
-              <a:gd name="adj" fmla="val 6897"/>
+              <a:gd name="adj" fmla="val 15385"/>
             </a:avLst>
           </a:prstGeom>
           <a:solidFill>
@@ -5269,89 +4911,112 @@
       </p:sp>
       <p:sp>
         <p:nvSpPr>
-          <p:cNvPr id="34" name="Text 32"/>
-          <p:cNvSpPr/>
-          <p:nvPr/>
-        </p:nvSpPr>
-        <p:spPr>
-          <a:xfrm>
-            <a:off x="6126480" y="1856232"/>
-            <a:ext cx="457200" cy="411480"/>
-          </a:xfrm>
-          <a:prstGeom prst="rect">
-            <a:avLst/>
-          </a:prstGeom>
-          <a:noFill/>
-          <a:ln/>
-        </p:spPr>
-        <p:txBody>
-          <a:bodyPr wrap="square" lIns="0" tIns="0" rIns="0" bIns="0" rtlCol="0" anchor="ctr"/>
-          <a:lstStyle/>
-          <a:p>
-            <a:pPr indent="0" marL="0">
-              <a:buNone/>
-            </a:pPr>
-            <a:r>
-              <a:rPr lang="en-US" sz="2000" dirty="0">
-                <a:solidFill>
-                  <a:srgbClr val="000000"/>
-                </a:solidFill>
-              </a:rPr>
-              <a:t>📊</a:t>
-            </a:r>
-            <a:endParaRPr lang="en-US" sz="2000" dirty="0"/>
-          </a:p>
-        </p:txBody>
-      </p:sp>
-      <p:sp>
-        <p:nvSpPr>
-          <p:cNvPr id="35" name="Text 33"/>
-          <p:cNvSpPr/>
-          <p:nvPr/>
-        </p:nvSpPr>
-        <p:spPr>
-          <a:xfrm>
-            <a:off x="6629400" y="1856232"/>
-            <a:ext cx="1965960" cy="384048"/>
-          </a:xfrm>
-          <a:prstGeom prst="rect">
-            <a:avLst/>
-          </a:prstGeom>
-          <a:noFill/>
-          <a:ln/>
-        </p:spPr>
-        <p:txBody>
-          <a:bodyPr wrap="square" lIns="0" tIns="0" rIns="0" bIns="0" rtlCol="0" anchor="ctr"/>
-          <a:lstStyle/>
-          <a:p>
-            <a:pPr indent="0" marL="0">
-              <a:buNone/>
-            </a:pPr>
-            <a:r>
-              <a:rPr lang="en-US" sz="1050" b="1" dirty="0">
-                <a:solidFill>
-                  <a:srgbClr val="0F172A"/>
+          <p:cNvPr id="25" name="Shape 23"/>
+          <p:cNvSpPr/>
+          <p:nvPr/>
+        </p:nvSpPr>
+        <p:spPr>
+          <a:xfrm>
+            <a:off x="594360" y="4096512"/>
+            <a:ext cx="365760" cy="365760"/>
+          </a:xfrm>
+          <a:prstGeom prst="ellipse">
+            <a:avLst/>
+          </a:prstGeom>
+          <a:solidFill>
+            <a:srgbClr val="FFE500"/>
+          </a:solidFill>
+          <a:ln/>
+        </p:spPr>
+      </p:sp>
+      <p:sp>
+        <p:nvSpPr>
+          <p:cNvPr id="26" name="Text 24"/>
+          <p:cNvSpPr/>
+          <p:nvPr/>
+        </p:nvSpPr>
+        <p:spPr>
+          <a:xfrm>
+            <a:off x="594360" y="4096512"/>
+            <a:ext cx="365760" cy="365760"/>
+          </a:xfrm>
+          <a:prstGeom prst="rect">
+            <a:avLst/>
+          </a:prstGeom>
+          <a:noFill/>
+          <a:ln/>
+        </p:spPr>
+        <p:txBody>
+          <a:bodyPr wrap="square" lIns="0" tIns="0" rIns="0" bIns="0" rtlCol="0" anchor="ctr"/>
+          <a:lstStyle/>
+          <a:p>
+            <a:pPr algn="ctr" indent="0" marL="0">
+              <a:buNone/>
+            </a:pPr>
+            <a:r>
+              <a:rPr lang="en-US" sz="1700" b="1" dirty="0">
+                <a:solidFill>
+                  <a:srgbClr val="FFFFFF"/>
                 </a:solidFill>
                 <a:latin typeface="Trebuchet MS" pitchFamily="34" charset="0"/>
                 <a:ea typeface="Trebuchet MS" pitchFamily="34" charset="-122"/>
                 <a:cs typeface="Trebuchet MS" pitchFamily="34" charset="-120"/>
               </a:rPr>
-              <a:t>Tutte le attività · Club / Anno</a:t>
-            </a:r>
-            <a:endParaRPr lang="en-US" sz="1050" dirty="0"/>
-          </a:p>
-        </p:txBody>
-      </p:sp>
-      <p:sp>
-        <p:nvSpPr>
-          <p:cNvPr id="36" name="Text 34"/>
-          <p:cNvSpPr/>
-          <p:nvPr/>
-        </p:nvSpPr>
-        <p:spPr>
-          <a:xfrm>
-            <a:off x="6172200" y="2286000"/>
-            <a:ext cx="2377440" cy="566928"/>
+              <a:t>5</a:t>
+            </a:r>
+            <a:endParaRPr lang="en-US" sz="1700" dirty="0"/>
+          </a:p>
+        </p:txBody>
+      </p:sp>
+      <p:sp>
+        <p:nvSpPr>
+          <p:cNvPr id="27" name="Text 25"/>
+          <p:cNvSpPr/>
+          <p:nvPr/>
+        </p:nvSpPr>
+        <p:spPr>
+          <a:xfrm>
+            <a:off x="1143000" y="4050792"/>
+            <a:ext cx="7315200" cy="274320"/>
+          </a:xfrm>
+          <a:prstGeom prst="rect">
+            <a:avLst/>
+          </a:prstGeom>
+          <a:noFill/>
+          <a:ln/>
+        </p:spPr>
+        <p:txBody>
+          <a:bodyPr wrap="square" lIns="0" tIns="0" rIns="0" bIns="0" rtlCol="0" anchor="ctr"/>
+          <a:lstStyle/>
+          <a:p>
+            <a:pPr indent="0" marL="0">
+              <a:buNone/>
+            </a:pPr>
+            <a:r>
+              <a:rPr lang="en-US" sz="1250" b="1" dirty="0">
+                <a:solidFill>
+                  <a:srgbClr val="0F172A"/>
+                </a:solidFill>
+                <a:latin typeface="Trebuchet MS" pitchFamily="34" charset="0"/>
+                <a:ea typeface="Trebuchet MS" pitchFamily="34" charset="-122"/>
+                <a:cs typeface="Trebuchet MS" pitchFamily="34" charset="-120"/>
+              </a:rPr>
+              <a:t>Distribuzione storica complessiva</a:t>
+            </a:r>
+            <a:endParaRPr lang="en-US" sz="1250" dirty="0"/>
+          </a:p>
+        </p:txBody>
+      </p:sp>
+      <p:sp>
+        <p:nvSpPr>
+          <p:cNvPr id="28" name="Text 26"/>
+          <p:cNvSpPr/>
+          <p:nvPr/>
+        </p:nvSpPr>
+        <p:spPr>
+          <a:xfrm>
+            <a:off x="1143000" y="4325112"/>
+            <a:ext cx="7315200" cy="256032"/>
           </a:xfrm>
           <a:prstGeom prst="rect">
             <a:avLst/>
@@ -5367,7 +5032,7 @@
               <a:buNone/>
             </a:pPr>
             <a:r>
-              <a:rPr lang="en-US" sz="850" dirty="0">
+              <a:rPr lang="en-US" sz="950" dirty="0">
                 <a:solidFill>
                   <a:srgbClr val="334155"/>
                 </a:solidFill>
@@ -5375,65 +5040,312 @@
                 <a:ea typeface="Calibri" pitchFamily="34" charset="-122"/>
                 <a:cs typeface="Calibri" pitchFamily="34" charset="-120"/>
               </a:rPr>
-              <a:t>11 colonne: Data, Stato, Titolo, Causa, Tipo, Persone, Volontari, Ore capped, Donati, Org., Raccolti. Riga TOTALI in fondo. A4 landscape.</a:t>
-            </a:r>
-            <a:endParaRPr lang="en-US" sz="850" dirty="0"/>
-          </a:p>
-        </p:txBody>
-      </p:sp>
-      <p:sp>
-        <p:nvSpPr>
-          <p:cNvPr id="37" name="Text 35"/>
-          <p:cNvSpPr/>
-          <p:nvPr/>
-        </p:nvSpPr>
-        <p:spPr>
-          <a:xfrm>
-            <a:off x="6172200" y="2862072"/>
-            <a:ext cx="2377440" cy="201168"/>
-          </a:xfrm>
-          <a:prstGeom prst="rect">
-            <a:avLst/>
-          </a:prstGeom>
-          <a:noFill/>
-          <a:ln/>
-        </p:spPr>
-        <p:txBody>
-          <a:bodyPr wrap="square" lIns="0" tIns="0" rIns="0" bIns="0" rtlCol="0" anchor="ctr"/>
+              <a:t>Pie chart per Genere e Fascia d'età · Bar chart attività per Causa e Zona · Tabella delle ultime 10 attività comunicate.</a:t>
+            </a:r>
+            <a:endParaRPr lang="en-US" sz="950" dirty="0"/>
+          </a:p>
+        </p:txBody>
+      </p:sp>
+      <p:sp>
+        <p:nvSpPr>
+          <p:cNvPr id="29" name="Text 27"/>
+          <p:cNvSpPr/>
+          <p:nvPr/>
+        </p:nvSpPr>
+        <p:spPr>
+          <a:xfrm>
+            <a:off x="457200" y="4864608"/>
+            <a:ext cx="6400800" cy="201168"/>
+          </a:xfrm>
+          <a:prstGeom prst="rect">
+            <a:avLst/>
+          </a:prstGeom>
+          <a:noFill/>
+          <a:ln/>
+        </p:spPr>
+        <p:txBody>
+          <a:bodyPr wrap="square" rtlCol="0" anchor="ctr"/>
           <a:lstStyle/>
           <a:p>
             <a:pPr indent="0" marL="0">
               <a:buNone/>
             </a:pPr>
             <a:r>
-              <a:rPr lang="en-US" sz="750" dirty="0">
-                <a:solidFill>
-                  <a:srgbClr val="7C3AED"/>
-                </a:solidFill>
-                <a:latin typeface="Consolas" pitchFamily="34" charset="0"/>
-                <a:ea typeface="Consolas" pitchFamily="34" charset="-122"/>
-                <a:cs typeface="Consolas" pitchFamily="34" charset="-120"/>
-              </a:rPr>
-              <a:t>/attivita/quadri/club-anno</a:t>
-            </a:r>
-            <a:endParaRPr lang="en-US" sz="750" dirty="0"/>
-          </a:p>
-        </p:txBody>
-      </p:sp>
-      <p:sp>
-        <p:nvSpPr>
-          <p:cNvPr id="38" name="Shape 36"/>
-          <p:cNvSpPr/>
-          <p:nvPr/>
-        </p:nvSpPr>
-        <p:spPr>
-          <a:xfrm>
-            <a:off x="6035040" y="3200400"/>
-            <a:ext cx="2651760" cy="1325880"/>
+              <a:rPr lang="en-US" sz="900" i="1" dirty="0">
+                <a:solidFill>
+                  <a:srgbClr val="64748B"/>
+                </a:solidFill>
+                <a:latin typeface="Calibri" pitchFamily="34" charset="0"/>
+                <a:ea typeface="Calibri" pitchFamily="34" charset="-122"/>
+                <a:cs typeface="Calibri" pitchFamily="34" charset="-120"/>
+              </a:rPr>
+              <a:t>Digitalions · digitalions108la.it · Distretto Lions 108 LA</a:t>
+            </a:r>
+            <a:endParaRPr lang="en-US" sz="900" dirty="0"/>
+          </a:p>
+        </p:txBody>
+      </p:sp>
+      <p:sp>
+        <p:nvSpPr>
+          <p:cNvPr id="30" name="Text 28"/>
+          <p:cNvSpPr/>
+          <p:nvPr/>
+        </p:nvSpPr>
+        <p:spPr>
+          <a:xfrm>
+            <a:off x="8229600" y="4864608"/>
+            <a:ext cx="777240" cy="201168"/>
+          </a:xfrm>
+          <a:prstGeom prst="rect">
+            <a:avLst/>
+          </a:prstGeom>
+          <a:noFill/>
+          <a:ln/>
+        </p:spPr>
+        <p:txBody>
+          <a:bodyPr wrap="square" rtlCol="0" anchor="ctr"/>
+          <a:lstStyle/>
+          <a:p>
+            <a:pPr algn="r" indent="0" marL="0">
+              <a:buNone/>
+            </a:pPr>
+            <a:r>
+              <a:rPr lang="en-US" sz="900" dirty="0">
+                <a:solidFill>
+                  <a:srgbClr val="64748B"/>
+                </a:solidFill>
+                <a:latin typeface="Calibri" pitchFamily="34" charset="0"/>
+                <a:ea typeface="Calibri" pitchFamily="34" charset="-122"/>
+                <a:cs typeface="Calibri" pitchFamily="34" charset="-120"/>
+              </a:rPr>
+              <a:t>3 / 10</a:t>
+            </a:r>
+            <a:endParaRPr lang="en-US" sz="900" dirty="0"/>
+          </a:p>
+        </p:txBody>
+      </p:sp>
+    </p:spTree>
+  </p:cSld>
+  <p:clrMapOvr>
+    <a:masterClrMapping/>
+  </p:clrMapOvr>
+</p:sld>
+</file>
+
+<file path=ppt/slides/slide4.xml><?xml version="1.0" encoding="utf-8"?>
+<p:sld xmlns:a="http://schemas.openxmlformats.org/drawingml/2006/main" xmlns:r="http://schemas.openxmlformats.org/officeDocument/2006/relationships" xmlns:p="http://schemas.openxmlformats.org/presentationml/2006/main">
+  <p:cSld name="Slide 4">
+    <p:bg>
+      <p:bgPr>
+        <a:solidFill>
+          <a:srgbClr val="F8FAFC"/>
+        </a:solidFill>
+      </p:bgPr>
+    </p:bg>
+    <p:spTree>
+      <p:nvGrpSpPr>
+        <p:cNvPr id="1" name=""/>
+        <p:cNvGrpSpPr/>
+        <p:nvPr/>
+      </p:nvGrpSpPr>
+      <p:grpSpPr>
+        <a:xfrm>
+          <a:off x="0" y="0"/>
+          <a:ext cx="0" cy="0"/>
+          <a:chOff x="0" y="0"/>
+          <a:chExt cx="0" cy="0"/>
+        </a:xfrm>
+      </p:grpSpPr>
+      <p:sp>
+        <p:nvSpPr>
+          <p:cNvPr id="2" name="Text 0"/>
+          <p:cNvSpPr/>
+          <p:nvPr/>
+        </p:nvSpPr>
+        <p:spPr>
+          <a:xfrm>
+            <a:off x="457200" y="320040"/>
+            <a:ext cx="8229600" cy="502920"/>
+          </a:xfrm>
+          <a:prstGeom prst="rect">
+            <a:avLst/>
+          </a:prstGeom>
+          <a:noFill/>
+          <a:ln/>
+        </p:spPr>
+        <p:txBody>
+          <a:bodyPr wrap="square" lIns="0" tIns="0" rIns="0" bIns="0" rtlCol="0" anchor="ctr"/>
+          <a:lstStyle/>
+          <a:p>
+            <a:pPr indent="0" marL="0">
+              <a:buNone/>
+            </a:pPr>
+            <a:r>
+              <a:rPr lang="en-US" sz="2600" b="1" dirty="0">
+                <a:solidFill>
+                  <a:srgbClr val="0F172A"/>
+                </a:solidFill>
+                <a:latin typeface="Trebuchet MS" pitchFamily="34" charset="0"/>
+                <a:ea typeface="Trebuchet MS" pitchFamily="34" charset="-122"/>
+                <a:cs typeface="Trebuchet MS" pitchFamily="34" charset="-120"/>
+              </a:rPr>
+              <a:t>Quadri PDF già disponibili oggi</a:t>
+            </a:r>
+            <a:endParaRPr lang="en-US" sz="2600" dirty="0"/>
+          </a:p>
+        </p:txBody>
+      </p:sp>
+      <p:sp>
+        <p:nvSpPr>
+          <p:cNvPr id="3" name="Text 1"/>
+          <p:cNvSpPr/>
+          <p:nvPr/>
+        </p:nvSpPr>
+        <p:spPr>
+          <a:xfrm>
+            <a:off x="457200" y="841248"/>
+            <a:ext cx="8229600" cy="292608"/>
+          </a:xfrm>
+          <a:prstGeom prst="rect">
+            <a:avLst/>
+          </a:prstGeom>
+          <a:noFill/>
+          <a:ln/>
+        </p:spPr>
+        <p:txBody>
+          <a:bodyPr wrap="square" lIns="0" tIns="0" rIns="0" bIns="0" rtlCol="0" anchor="ctr"/>
+          <a:lstStyle/>
+          <a:p>
+            <a:pPr indent="0" marL="0">
+              <a:buNone/>
+            </a:pPr>
+            <a:r>
+              <a:rPr lang="en-US" sz="1300" i="1" dirty="0">
+                <a:solidFill>
+                  <a:srgbClr val="64748B"/>
+                </a:solidFill>
+                <a:latin typeface="Calibri" pitchFamily="34" charset="0"/>
+                <a:ea typeface="Calibri" pitchFamily="34" charset="-122"/>
+                <a:cs typeface="Calibri" pitchFamily="34" charset="-120"/>
+              </a:rPr>
+              <a:t>6 report stampabili in PDF dal pulsante "Stampa / Salva PDF" presente in ogni pagina</a:t>
+            </a:r>
+            <a:endParaRPr lang="en-US" sz="1300" dirty="0"/>
+          </a:p>
+        </p:txBody>
+      </p:sp>
+      <p:sp>
+        <p:nvSpPr>
+          <p:cNvPr id="4" name="Shape 2"/>
+          <p:cNvSpPr/>
+          <p:nvPr/>
+        </p:nvSpPr>
+        <p:spPr>
+          <a:xfrm>
+            <a:off x="457200" y="1325880"/>
+            <a:ext cx="2651760" cy="365760"/>
+          </a:xfrm>
+          <a:prstGeom prst="rect">
+            <a:avLst/>
+          </a:prstGeom>
+          <a:solidFill>
+            <a:srgbClr val="0055FF"/>
+          </a:solidFill>
+          <a:ln/>
+        </p:spPr>
+      </p:sp>
+      <p:sp>
+        <p:nvSpPr>
+          <p:cNvPr id="5" name="Text 3"/>
+          <p:cNvSpPr/>
+          <p:nvPr/>
+        </p:nvSpPr>
+        <p:spPr>
+          <a:xfrm>
+            <a:off x="594360" y="1325880"/>
+            <a:ext cx="1920240" cy="365760"/>
+          </a:xfrm>
+          <a:prstGeom prst="rect">
+            <a:avLst/>
+          </a:prstGeom>
+          <a:noFill/>
+          <a:ln/>
+        </p:spPr>
+        <p:txBody>
+          <a:bodyPr wrap="square" lIns="0" tIns="0" rIns="0" bIns="0" rtlCol="0" anchor="ctr"/>
+          <a:lstStyle/>
+          <a:p>
+            <a:pPr indent="0" marL="0">
+              <a:buNone/>
+            </a:pPr>
+            <a:r>
+              <a:rPr lang="en-US" sz="1000" b="1" spc="200" kern="0" dirty="0">
+                <a:solidFill>
+                  <a:srgbClr val="FFFFFF"/>
+                </a:solidFill>
+                <a:latin typeface="Calibri" pitchFamily="34" charset="0"/>
+                <a:ea typeface="Calibri" pitchFamily="34" charset="-122"/>
+                <a:cs typeface="Calibri" pitchFamily="34" charset="-120"/>
+              </a:rPr>
+              <a:t>SEZIONE SOCI</a:t>
+            </a:r>
+            <a:endParaRPr lang="en-US" sz="1000" dirty="0"/>
+          </a:p>
+        </p:txBody>
+      </p:sp>
+      <p:sp>
+        <p:nvSpPr>
+          <p:cNvPr id="6" name="Text 4"/>
+          <p:cNvSpPr/>
+          <p:nvPr/>
+        </p:nvSpPr>
+        <p:spPr>
+          <a:xfrm>
+            <a:off x="2697480" y="1325880"/>
+            <a:ext cx="320040" cy="365760"/>
+          </a:xfrm>
+          <a:prstGeom prst="rect">
+            <a:avLst/>
+          </a:prstGeom>
+          <a:noFill/>
+          <a:ln/>
+        </p:spPr>
+        <p:txBody>
+          <a:bodyPr wrap="square" lIns="0" tIns="0" rIns="0" bIns="0" rtlCol="0" anchor="ctr"/>
+          <a:lstStyle/>
+          <a:p>
+            <a:pPr algn="r" indent="0" marL="0">
+              <a:buNone/>
+            </a:pPr>
+            <a:r>
+              <a:rPr lang="en-US" sz="1600" b="1" dirty="0">
+                <a:solidFill>
+                  <a:srgbClr val="FFFFFF"/>
+                </a:solidFill>
+                <a:latin typeface="Trebuchet MS" pitchFamily="34" charset="0"/>
+                <a:ea typeface="Trebuchet MS" pitchFamily="34" charset="-122"/>
+                <a:cs typeface="Trebuchet MS" pitchFamily="34" charset="-120"/>
+              </a:rPr>
+              <a:t>3</a:t>
+            </a:r>
+            <a:endParaRPr lang="en-US" sz="1600" dirty="0"/>
+          </a:p>
+        </p:txBody>
+      </p:sp>
+      <p:sp>
+        <p:nvSpPr>
+          <p:cNvPr id="7" name="Shape 5"/>
+          <p:cNvSpPr/>
+          <p:nvPr/>
+        </p:nvSpPr>
+        <p:spPr>
+          <a:xfrm>
+            <a:off x="457200" y="1783080"/>
+            <a:ext cx="2651760" cy="868680"/>
           </a:xfrm>
           <a:prstGeom prst="roundRect">
             <a:avLst>
-              <a:gd name="adj" fmla="val 6897"/>
+              <a:gd name="adj" fmla="val 10526"/>
             </a:avLst>
           </a:prstGeom>
           <a:solidFill>
@@ -5456,14 +5368,14 @@
       </p:sp>
       <p:sp>
         <p:nvSpPr>
-          <p:cNvPr id="39" name="Text 37"/>
-          <p:cNvSpPr/>
-          <p:nvPr/>
-        </p:nvSpPr>
-        <p:spPr>
-          <a:xfrm>
-            <a:off x="6126480" y="3273552"/>
-            <a:ext cx="457200" cy="411480"/>
+          <p:cNvPr id="8" name="Text 6"/>
+          <p:cNvSpPr/>
+          <p:nvPr/>
+        </p:nvSpPr>
+        <p:spPr>
+          <a:xfrm>
+            <a:off x="530352" y="1856232"/>
+            <a:ext cx="384048" cy="384048"/>
           </a:xfrm>
           <a:prstGeom prst="rect">
             <a:avLst/>
@@ -5479,27 +5391,27 @@
               <a:buNone/>
             </a:pPr>
             <a:r>
-              <a:rPr lang="en-US" sz="2000" dirty="0">
+              <a:rPr lang="en-US" sz="1600" dirty="0">
                 <a:solidFill>
                   <a:srgbClr val="000000"/>
                 </a:solidFill>
               </a:rPr>
-              <a:t>🧾</a:t>
-            </a:r>
-            <a:endParaRPr lang="en-US" sz="2000" dirty="0"/>
-          </a:p>
-        </p:txBody>
-      </p:sp>
-      <p:sp>
-        <p:nvSpPr>
-          <p:cNvPr id="40" name="Text 38"/>
-          <p:cNvSpPr/>
-          <p:nvPr/>
-        </p:nvSpPr>
-        <p:spPr>
-          <a:xfrm>
-            <a:off x="6629400" y="3273552"/>
-            <a:ext cx="1965960" cy="384048"/>
+              <a:t>📅</a:t>
+            </a:r>
+            <a:endParaRPr lang="en-US" sz="1600" dirty="0"/>
+          </a:p>
+        </p:txBody>
+      </p:sp>
+      <p:sp>
+        <p:nvSpPr>
+          <p:cNvPr id="9" name="Text 7"/>
+          <p:cNvSpPr/>
+          <p:nvPr/>
+        </p:nvSpPr>
+        <p:spPr>
+          <a:xfrm>
+            <a:off x="960120" y="1828800"/>
+            <a:ext cx="2057400" cy="274320"/>
           </a:xfrm>
           <a:prstGeom prst="rect">
             <a:avLst/>
@@ -5523,7 +5435,7 @@
                 <a:ea typeface="Trebuchet MS" pitchFamily="34" charset="-122"/>
                 <a:cs typeface="Trebuchet MS" pitchFamily="34" charset="-120"/>
               </a:rPr>
-              <a:t>Amministrazione vs Service</a:t>
+              <a:t>Per Fasce di Età</a:t>
             </a:r>
             <a:endParaRPr lang="en-US" sz="1050" dirty="0"/>
           </a:p>
@@ -5531,14 +5443,14 @@
       </p:sp>
       <p:sp>
         <p:nvSpPr>
-          <p:cNvPr id="41" name="Text 39"/>
-          <p:cNvSpPr/>
-          <p:nvPr/>
-        </p:nvSpPr>
-        <p:spPr>
-          <a:xfrm>
-            <a:off x="6172200" y="3703320"/>
-            <a:ext cx="2377440" cy="566928"/>
+          <p:cNvPr id="10" name="Text 8"/>
+          <p:cNvSpPr/>
+          <p:nvPr/>
+        </p:nvSpPr>
+        <p:spPr>
+          <a:xfrm>
+            <a:off x="594360" y="2130552"/>
+            <a:ext cx="2377440" cy="384048"/>
           </a:xfrm>
           <a:prstGeom prst="rect">
             <a:avLst/>
@@ -5554,7 +5466,7 @@
               <a:buNone/>
             </a:pPr>
             <a:r>
-              <a:rPr lang="en-US" sz="850" dirty="0">
+              <a:rPr lang="en-US" sz="800" dirty="0">
                 <a:solidFill>
                   <a:srgbClr val="334155"/>
                 </a:solidFill>
@@ -5562,22 +5474,22 @@
                 <a:ea typeface="Calibri" pitchFamily="34" charset="-122"/>
                 <a:cs typeface="Calibri" pitchFamily="34" charset="-120"/>
               </a:rPr>
-              <a:t>Stesse colonne ma Persone = Limite Massimo. Split in 2 tabelle (Service / Amministrazione) con subtotali + totale complessivo.</a:t>
-            </a:r>
-            <a:endParaRPr lang="en-US" sz="850" dirty="0"/>
-          </a:p>
-        </p:txBody>
-      </p:sp>
-      <p:sp>
-        <p:nvSpPr>
-          <p:cNvPr id="42" name="Text 40"/>
-          <p:cNvSpPr/>
-          <p:nvPr/>
-        </p:nvSpPr>
-        <p:spPr>
-          <a:xfrm>
-            <a:off x="6172200" y="4279392"/>
-            <a:ext cx="2377440" cy="201168"/>
+              <a:t>Matricola, Titolo, Nome, Cognome, Compleanno, Età. Ordinato per età crescente. Filtro range età.</a:t>
+            </a:r>
+            <a:endParaRPr lang="en-US" sz="800" dirty="0"/>
+          </a:p>
+        </p:txBody>
+      </p:sp>
+      <p:sp>
+        <p:nvSpPr>
+          <p:cNvPr id="11" name="Text 9"/>
+          <p:cNvSpPr/>
+          <p:nvPr/>
+        </p:nvSpPr>
+        <p:spPr>
+          <a:xfrm>
+            <a:off x="594360" y="2496312"/>
+            <a:ext cx="2377440" cy="146304"/>
           </a:xfrm>
           <a:prstGeom prst="rect">
             <a:avLst/>
@@ -5593,132 +5505,1263 @@
               <a:buNone/>
             </a:pPr>
             <a:r>
-              <a:rPr lang="en-US" sz="750" dirty="0">
-                <a:solidFill>
-                  <a:srgbClr val="7C3AED"/>
+              <a:rPr lang="en-US" sz="700" dirty="0">
+                <a:solidFill>
+                  <a:srgbClr val="0055FF"/>
                 </a:solidFill>
                 <a:latin typeface="Consolas" pitchFamily="34" charset="0"/>
                 <a:ea typeface="Consolas" pitchFamily="34" charset="-122"/>
                 <a:cs typeface="Consolas" pitchFamily="34" charset="-120"/>
               </a:rPr>
-              <a:t>/attivita/quadri/club-anno-amm-service</a:t>
-            </a:r>
-            <a:endParaRPr lang="en-US" sz="750" dirty="0"/>
-          </a:p>
-        </p:txBody>
-      </p:sp>
-      <p:sp>
-        <p:nvSpPr>
-          <p:cNvPr id="43" name="Text 41"/>
-          <p:cNvSpPr/>
-          <p:nvPr/>
-        </p:nvSpPr>
-        <p:spPr>
-          <a:xfrm>
-            <a:off x="457200" y="4636008"/>
-            <a:ext cx="8229600" cy="201168"/>
-          </a:xfrm>
-          <a:prstGeom prst="rect">
-            <a:avLst/>
-          </a:prstGeom>
-          <a:noFill/>
-          <a:ln/>
-        </p:spPr>
-        <p:txBody>
-          <a:bodyPr wrap="square" rtlCol="0" anchor="ctr"/>
-          <a:lstStyle/>
-          <a:p>
-            <a:pPr algn="ctr" indent="0" marL="0">
-              <a:buNone/>
-            </a:pPr>
-            <a:r>
-              <a:rPr lang="en-US" sz="900" i="1" dirty="0">
-                <a:solidFill>
-                  <a:srgbClr val="64748B"/>
+              <a:t>/soci/quadri/eta</a:t>
+            </a:r>
+            <a:endParaRPr lang="en-US" sz="700" dirty="0"/>
+          </a:p>
+        </p:txBody>
+      </p:sp>
+      <p:sp>
+        <p:nvSpPr>
+          <p:cNvPr id="12" name="Shape 10"/>
+          <p:cNvSpPr/>
+          <p:nvPr/>
+        </p:nvSpPr>
+        <p:spPr>
+          <a:xfrm>
+            <a:off x="457200" y="2743200"/>
+            <a:ext cx="2651760" cy="868680"/>
+          </a:xfrm>
+          <a:prstGeom prst="roundRect">
+            <a:avLst>
+              <a:gd name="adj" fmla="val 10526"/>
+            </a:avLst>
+          </a:prstGeom>
+          <a:solidFill>
+            <a:srgbClr val="FFFFFF"/>
+          </a:solidFill>
+          <a:ln w="12700">
+            <a:solidFill>
+              <a:srgbClr val="E2E8F0"/>
+            </a:solidFill>
+            <a:prstDash val="solid"/>
+          </a:ln>
+          <a:effectLst>
+            <a:outerShdw sx="100000" sy="100000" kx="0" ky="0" algn="bl" rotWithShape="0" blurRad="101600" dist="25400" dir="5400000">
+              <a:srgbClr val="000000">
+                <a:alpha val="8000"/>
+              </a:srgbClr>
+            </a:outerShdw>
+          </a:effectLst>
+        </p:spPr>
+      </p:sp>
+      <p:sp>
+        <p:nvSpPr>
+          <p:cNvPr id="13" name="Text 11"/>
+          <p:cNvSpPr/>
+          <p:nvPr/>
+        </p:nvSpPr>
+        <p:spPr>
+          <a:xfrm>
+            <a:off x="530352" y="2816352"/>
+            <a:ext cx="384048" cy="384048"/>
+          </a:xfrm>
+          <a:prstGeom prst="rect">
+            <a:avLst/>
+          </a:prstGeom>
+          <a:noFill/>
+          <a:ln/>
+        </p:spPr>
+        <p:txBody>
+          <a:bodyPr wrap="square" lIns="0" tIns="0" rIns="0" bIns="0" rtlCol="0" anchor="ctr"/>
+          <a:lstStyle/>
+          <a:p>
+            <a:pPr indent="0" marL="0">
+              <a:buNone/>
+            </a:pPr>
+            <a:r>
+              <a:rPr lang="en-US" sz="1600" dirty="0">
+                <a:solidFill>
+                  <a:srgbClr val="000000"/>
+                </a:solidFill>
+              </a:rPr>
+              <a:t>🏅</a:t>
+            </a:r>
+            <a:endParaRPr lang="en-US" sz="1600" dirty="0"/>
+          </a:p>
+        </p:txBody>
+      </p:sp>
+      <p:sp>
+        <p:nvSpPr>
+          <p:cNvPr id="14" name="Text 12"/>
+          <p:cNvSpPr/>
+          <p:nvPr/>
+        </p:nvSpPr>
+        <p:spPr>
+          <a:xfrm>
+            <a:off x="960120" y="2788920"/>
+            <a:ext cx="2057400" cy="274320"/>
+          </a:xfrm>
+          <a:prstGeom prst="rect">
+            <a:avLst/>
+          </a:prstGeom>
+          <a:noFill/>
+          <a:ln/>
+        </p:spPr>
+        <p:txBody>
+          <a:bodyPr wrap="square" lIns="0" tIns="0" rIns="0" bIns="0" rtlCol="0" anchor="ctr"/>
+          <a:lstStyle/>
+          <a:p>
+            <a:pPr indent="0" marL="0">
+              <a:buNone/>
+            </a:pPr>
+            <a:r>
+              <a:rPr lang="en-US" sz="1050" b="1" dirty="0">
+                <a:solidFill>
+                  <a:srgbClr val="0F172A"/>
+                </a:solidFill>
+                <a:latin typeface="Trebuchet MS" pitchFamily="34" charset="0"/>
+                <a:ea typeface="Trebuchet MS" pitchFamily="34" charset="-122"/>
+                <a:cs typeface="Trebuchet MS" pitchFamily="34" charset="-120"/>
+              </a:rPr>
+              <a:t>Per Anzianità Lionistica</a:t>
+            </a:r>
+            <a:endParaRPr lang="en-US" sz="1050" dirty="0"/>
+          </a:p>
+        </p:txBody>
+      </p:sp>
+      <p:sp>
+        <p:nvSpPr>
+          <p:cNvPr id="15" name="Text 13"/>
+          <p:cNvSpPr/>
+          <p:nvPr/>
+        </p:nvSpPr>
+        <p:spPr>
+          <a:xfrm>
+            <a:off x="594360" y="3090672"/>
+            <a:ext cx="2377440" cy="384048"/>
+          </a:xfrm>
+          <a:prstGeom prst="rect">
+            <a:avLst/>
+          </a:prstGeom>
+          <a:noFill/>
+          <a:ln/>
+        </p:spPr>
+        <p:txBody>
+          <a:bodyPr wrap="square" lIns="0" tIns="0" rIns="0" bIns="0" rtlCol="0" anchor="t"/>
+          <a:lstStyle/>
+          <a:p>
+            <a:pPr indent="0" marL="0">
+              <a:buNone/>
+            </a:pPr>
+            <a:r>
+              <a:rPr lang="en-US" sz="800" dirty="0">
+                <a:solidFill>
+                  <a:srgbClr val="334155"/>
                 </a:solidFill>
                 <a:latin typeface="Calibri" pitchFamily="34" charset="0"/>
                 <a:ea typeface="Calibri" pitchFamily="34" charset="-122"/>
                 <a:cs typeface="Calibri" pitchFamily="34" charset="-120"/>
               </a:rPr>
-              <a:t>⚙️  Ogni quadro ha filtri propri · stampa A4 (portrait/landscape automatico) · header tabella ripetuto su ogni pagina</a:t>
-            </a:r>
-            <a:endParaRPr lang="en-US" sz="900" dirty="0"/>
-          </a:p>
-        </p:txBody>
-      </p:sp>
-      <p:sp>
-        <p:nvSpPr>
-          <p:cNvPr id="44" name="Text 42"/>
-          <p:cNvSpPr/>
-          <p:nvPr/>
-        </p:nvSpPr>
-        <p:spPr>
-          <a:xfrm>
-            <a:off x="457200" y="4864608"/>
-            <a:ext cx="6400800" cy="201168"/>
-          </a:xfrm>
-          <a:prstGeom prst="rect">
-            <a:avLst/>
-          </a:prstGeom>
-          <a:noFill/>
-          <a:ln/>
-        </p:spPr>
-        <p:txBody>
-          <a:bodyPr wrap="square" rtlCol="0" anchor="ctr"/>
+              <a:t>Nome, Cognome, Data Ingresso, Anni di anzianità. Ordinato dai più anziani.</a:t>
+            </a:r>
+            <a:endParaRPr lang="en-US" sz="800" dirty="0"/>
+          </a:p>
+        </p:txBody>
+      </p:sp>
+      <p:sp>
+        <p:nvSpPr>
+          <p:cNvPr id="16" name="Text 14"/>
+          <p:cNvSpPr/>
+          <p:nvPr/>
+        </p:nvSpPr>
+        <p:spPr>
+          <a:xfrm>
+            <a:off x="594360" y="3456432"/>
+            <a:ext cx="2377440" cy="146304"/>
+          </a:xfrm>
+          <a:prstGeom prst="rect">
+            <a:avLst/>
+          </a:prstGeom>
+          <a:noFill/>
+          <a:ln/>
+        </p:spPr>
+        <p:txBody>
+          <a:bodyPr wrap="square" lIns="0" tIns="0" rIns="0" bIns="0" rtlCol="0" anchor="ctr"/>
           <a:lstStyle/>
           <a:p>
             <a:pPr indent="0" marL="0">
               <a:buNone/>
             </a:pPr>
             <a:r>
-              <a:rPr lang="en-US" sz="900" i="1" dirty="0">
-                <a:solidFill>
-                  <a:srgbClr val="64748B"/>
+              <a:rPr lang="en-US" sz="700" dirty="0">
+                <a:solidFill>
+                  <a:srgbClr val="0055FF"/>
+                </a:solidFill>
+                <a:latin typeface="Consolas" pitchFamily="34" charset="0"/>
+                <a:ea typeface="Consolas" pitchFamily="34" charset="-122"/>
+                <a:cs typeface="Consolas" pitchFamily="34" charset="-120"/>
+              </a:rPr>
+              <a:t>/soci/quadri/anzianita</a:t>
+            </a:r>
+            <a:endParaRPr lang="en-US" sz="700" dirty="0"/>
+          </a:p>
+        </p:txBody>
+      </p:sp>
+      <p:sp>
+        <p:nvSpPr>
+          <p:cNvPr id="17" name="Shape 15"/>
+          <p:cNvSpPr/>
+          <p:nvPr/>
+        </p:nvSpPr>
+        <p:spPr>
+          <a:xfrm>
+            <a:off x="457200" y="3703320"/>
+            <a:ext cx="2651760" cy="868680"/>
+          </a:xfrm>
+          <a:prstGeom prst="roundRect">
+            <a:avLst>
+              <a:gd name="adj" fmla="val 10526"/>
+            </a:avLst>
+          </a:prstGeom>
+          <a:solidFill>
+            <a:srgbClr val="FFFFFF"/>
+          </a:solidFill>
+          <a:ln w="12700">
+            <a:solidFill>
+              <a:srgbClr val="E2E8F0"/>
+            </a:solidFill>
+            <a:prstDash val="solid"/>
+          </a:ln>
+          <a:effectLst>
+            <a:outerShdw sx="100000" sy="100000" kx="0" ky="0" algn="bl" rotWithShape="0" blurRad="101600" dist="25400" dir="5400000">
+              <a:srgbClr val="000000">
+                <a:alpha val="8000"/>
+              </a:srgbClr>
+            </a:outerShdw>
+          </a:effectLst>
+        </p:spPr>
+      </p:sp>
+      <p:sp>
+        <p:nvSpPr>
+          <p:cNvPr id="18" name="Text 16"/>
+          <p:cNvSpPr/>
+          <p:nvPr/>
+        </p:nvSpPr>
+        <p:spPr>
+          <a:xfrm>
+            <a:off x="530352" y="3776472"/>
+            <a:ext cx="384048" cy="384048"/>
+          </a:xfrm>
+          <a:prstGeom prst="rect">
+            <a:avLst/>
+          </a:prstGeom>
+          <a:noFill/>
+          <a:ln/>
+        </p:spPr>
+        <p:txBody>
+          <a:bodyPr wrap="square" lIns="0" tIns="0" rIns="0" bIns="0" rtlCol="0" anchor="ctr"/>
+          <a:lstStyle/>
+          <a:p>
+            <a:pPr indent="0" marL="0">
+              <a:buNone/>
+            </a:pPr>
+            <a:r>
+              <a:rPr lang="en-US" sz="1600" dirty="0">
+                <a:solidFill>
+                  <a:srgbClr val="000000"/>
+                </a:solidFill>
+              </a:rPr>
+              <a:t>📋</a:t>
+            </a:r>
+            <a:endParaRPr lang="en-US" sz="1600" dirty="0"/>
+          </a:p>
+        </p:txBody>
+      </p:sp>
+      <p:sp>
+        <p:nvSpPr>
+          <p:cNvPr id="19" name="Text 17"/>
+          <p:cNvSpPr/>
+          <p:nvPr/>
+        </p:nvSpPr>
+        <p:spPr>
+          <a:xfrm>
+            <a:off x="960120" y="3749040"/>
+            <a:ext cx="2057400" cy="274320"/>
+          </a:xfrm>
+          <a:prstGeom prst="rect">
+            <a:avLst/>
+          </a:prstGeom>
+          <a:noFill/>
+          <a:ln/>
+        </p:spPr>
+        <p:txBody>
+          <a:bodyPr wrap="square" lIns="0" tIns="0" rIns="0" bIns="0" rtlCol="0" anchor="ctr"/>
+          <a:lstStyle/>
+          <a:p>
+            <a:pPr indent="0" marL="0">
+              <a:buNone/>
+            </a:pPr>
+            <a:r>
+              <a:rPr lang="en-US" sz="1050" b="1" dirty="0">
+                <a:solidFill>
+                  <a:srgbClr val="0F172A"/>
+                </a:solidFill>
+                <a:latin typeface="Trebuchet MS" pitchFamily="34" charset="0"/>
+                <a:ea typeface="Trebuchet MS" pitchFamily="34" charset="-122"/>
+                <a:cs typeface="Trebuchet MS" pitchFamily="34" charset="-120"/>
+              </a:rPr>
+              <a:t>Caratteristiche Associative</a:t>
+            </a:r>
+            <a:endParaRPr lang="en-US" sz="1050" dirty="0"/>
+          </a:p>
+        </p:txBody>
+      </p:sp>
+      <p:sp>
+        <p:nvSpPr>
+          <p:cNvPr id="20" name="Text 18"/>
+          <p:cNvSpPr/>
+          <p:nvPr/>
+        </p:nvSpPr>
+        <p:spPr>
+          <a:xfrm>
+            <a:off x="594360" y="4050792"/>
+            <a:ext cx="2377440" cy="384048"/>
+          </a:xfrm>
+          <a:prstGeom prst="rect">
+            <a:avLst/>
+          </a:prstGeom>
+          <a:noFill/>
+          <a:ln/>
+        </p:spPr>
+        <p:txBody>
+          <a:bodyPr wrap="square" lIns="0" tIns="0" rIns="0" bIns="0" rtlCol="0" anchor="t"/>
+          <a:lstStyle/>
+          <a:p>
+            <a:pPr indent="0" marL="0">
+              <a:buNone/>
+            </a:pPr>
+            <a:r>
+              <a:rPr lang="en-US" sz="800" dirty="0">
+                <a:solidFill>
+                  <a:srgbClr val="334155"/>
                 </a:solidFill>
                 <a:latin typeface="Calibri" pitchFamily="34" charset="0"/>
                 <a:ea typeface="Calibri" pitchFamily="34" charset="-122"/>
                 <a:cs typeface="Calibri" pitchFamily="34" charset="-120"/>
               </a:rPr>
-              <a:t>Digitalions · digitalions108la.it · Distretto Lions 108 LA</a:t>
-            </a:r>
-            <a:endParaRPr lang="en-US" sz="900" dirty="0"/>
-          </a:p>
-        </p:txBody>
-      </p:sp>
-      <p:sp>
-        <p:nvSpPr>
-          <p:cNvPr id="45" name="Text 43"/>
-          <p:cNvSpPr/>
-          <p:nvPr/>
-        </p:nvSpPr>
-        <p:spPr>
-          <a:xfrm>
-            <a:off x="8229600" y="4864608"/>
-            <a:ext cx="777240" cy="201168"/>
-          </a:xfrm>
-          <a:prstGeom prst="rect">
-            <a:avLst/>
-          </a:prstGeom>
-          <a:noFill/>
-          <a:ln/>
-        </p:spPr>
-        <p:txBody>
-          <a:bodyPr wrap="square" rtlCol="0" anchor="ctr"/>
-          <a:lstStyle/>
-          <a:p>
-            <a:pPr algn="r" indent="0" marL="0">
-              <a:buNone/>
-            </a:pPr>
-            <a:r>
-              <a:rPr lang="en-US" sz="900" dirty="0">
-                <a:solidFill>
-                  <a:srgbClr val="64748B"/>
+              <a:t>Tipo Associazione, Categoria, Programma, Cognome, Nome. Filtri multi.</a:t>
+            </a:r>
+            <a:endParaRPr lang="en-US" sz="800" dirty="0"/>
+          </a:p>
+        </p:txBody>
+      </p:sp>
+      <p:sp>
+        <p:nvSpPr>
+          <p:cNvPr id="21" name="Text 19"/>
+          <p:cNvSpPr/>
+          <p:nvPr/>
+        </p:nvSpPr>
+        <p:spPr>
+          <a:xfrm>
+            <a:off x="594360" y="4416552"/>
+            <a:ext cx="2377440" cy="146304"/>
+          </a:xfrm>
+          <a:prstGeom prst="rect">
+            <a:avLst/>
+          </a:prstGeom>
+          <a:noFill/>
+          <a:ln/>
+        </p:spPr>
+        <p:txBody>
+          <a:bodyPr wrap="square" lIns="0" tIns="0" rIns="0" bIns="0" rtlCol="0" anchor="ctr"/>
+          <a:lstStyle/>
+          <a:p>
+            <a:pPr indent="0" marL="0">
+              <a:buNone/>
+            </a:pPr>
+            <a:r>
+              <a:rPr lang="en-US" sz="700" dirty="0">
+                <a:solidFill>
+                  <a:srgbClr val="0055FF"/>
+                </a:solidFill>
+                <a:latin typeface="Consolas" pitchFamily="34" charset="0"/>
+                <a:ea typeface="Consolas" pitchFamily="34" charset="-122"/>
+                <a:cs typeface="Consolas" pitchFamily="34" charset="-120"/>
+              </a:rPr>
+              <a:t>/soci/quadri/caratteristiche</a:t>
+            </a:r>
+            <a:endParaRPr lang="en-US" sz="700" dirty="0"/>
+          </a:p>
+        </p:txBody>
+      </p:sp>
+      <p:sp>
+        <p:nvSpPr>
+          <p:cNvPr id="22" name="Shape 20"/>
+          <p:cNvSpPr/>
+          <p:nvPr/>
+        </p:nvSpPr>
+        <p:spPr>
+          <a:xfrm>
+            <a:off x="3246120" y="1325880"/>
+            <a:ext cx="2651760" cy="365760"/>
+          </a:xfrm>
+          <a:prstGeom prst="rect">
+            <a:avLst/>
+          </a:prstGeom>
+          <a:solidFill>
+            <a:srgbClr val="F5B606"/>
+          </a:solidFill>
+          <a:ln/>
+        </p:spPr>
+      </p:sp>
+      <p:sp>
+        <p:nvSpPr>
+          <p:cNvPr id="23" name="Text 21"/>
+          <p:cNvSpPr/>
+          <p:nvPr/>
+        </p:nvSpPr>
+        <p:spPr>
+          <a:xfrm>
+            <a:off x="3383280" y="1325880"/>
+            <a:ext cx="1920240" cy="365760"/>
+          </a:xfrm>
+          <a:prstGeom prst="rect">
+            <a:avLst/>
+          </a:prstGeom>
+          <a:noFill/>
+          <a:ln/>
+        </p:spPr>
+        <p:txBody>
+          <a:bodyPr wrap="square" lIns="0" tIns="0" rIns="0" bIns="0" rtlCol="0" anchor="ctr"/>
+          <a:lstStyle/>
+          <a:p>
+            <a:pPr indent="0" marL="0">
+              <a:buNone/>
+            </a:pPr>
+            <a:r>
+              <a:rPr lang="en-US" sz="1000" b="1" spc="200" kern="0" dirty="0">
+                <a:solidFill>
+                  <a:srgbClr val="FFFFFF"/>
                 </a:solidFill>
                 <a:latin typeface="Calibri" pitchFamily="34" charset="0"/>
                 <a:ea typeface="Calibri" pitchFamily="34" charset="-122"/>
                 <a:cs typeface="Calibri" pitchFamily="34" charset="-120"/>
               </a:rPr>
-              <a:t>3 / 10</a:t>
+              <a:t>SEZIONE OFFICER</a:t>
+            </a:r>
+            <a:endParaRPr lang="en-US" sz="1000" dirty="0"/>
+          </a:p>
+        </p:txBody>
+      </p:sp>
+      <p:sp>
+        <p:nvSpPr>
+          <p:cNvPr id="24" name="Text 22"/>
+          <p:cNvSpPr/>
+          <p:nvPr/>
+        </p:nvSpPr>
+        <p:spPr>
+          <a:xfrm>
+            <a:off x="5486400" y="1325880"/>
+            <a:ext cx="320040" cy="365760"/>
+          </a:xfrm>
+          <a:prstGeom prst="rect">
+            <a:avLst/>
+          </a:prstGeom>
+          <a:noFill/>
+          <a:ln/>
+        </p:spPr>
+        <p:txBody>
+          <a:bodyPr wrap="square" lIns="0" tIns="0" rIns="0" bIns="0" rtlCol="0" anchor="ctr"/>
+          <a:lstStyle/>
+          <a:p>
+            <a:pPr algn="r" indent="0" marL="0">
+              <a:buNone/>
+            </a:pPr>
+            <a:r>
+              <a:rPr lang="en-US" sz="1600" b="1" dirty="0">
+                <a:solidFill>
+                  <a:srgbClr val="FFFFFF"/>
+                </a:solidFill>
+                <a:latin typeface="Trebuchet MS" pitchFamily="34" charset="0"/>
+                <a:ea typeface="Trebuchet MS" pitchFamily="34" charset="-122"/>
+                <a:cs typeface="Trebuchet MS" pitchFamily="34" charset="-120"/>
+              </a:rPr>
+              <a:t>1</a:t>
+            </a:r>
+            <a:endParaRPr lang="en-US" sz="1600" dirty="0"/>
+          </a:p>
+        </p:txBody>
+      </p:sp>
+      <p:sp>
+        <p:nvSpPr>
+          <p:cNvPr id="25" name="Shape 23"/>
+          <p:cNvSpPr/>
+          <p:nvPr/>
+        </p:nvSpPr>
+        <p:spPr>
+          <a:xfrm>
+            <a:off x="3246120" y="1783080"/>
+            <a:ext cx="2651760" cy="2788920"/>
+          </a:xfrm>
+          <a:prstGeom prst="roundRect">
+            <a:avLst>
+              <a:gd name="adj" fmla="val 3448"/>
+            </a:avLst>
+          </a:prstGeom>
+          <a:solidFill>
+            <a:srgbClr val="FFFFFF"/>
+          </a:solidFill>
+          <a:ln w="12700">
+            <a:solidFill>
+              <a:srgbClr val="E2E8F0"/>
+            </a:solidFill>
+            <a:prstDash val="solid"/>
+          </a:ln>
+          <a:effectLst>
+            <a:outerShdw sx="100000" sy="100000" kx="0" ky="0" algn="bl" rotWithShape="0" blurRad="101600" dist="25400" dir="5400000">
+              <a:srgbClr val="000000">
+                <a:alpha val="8000"/>
+              </a:srgbClr>
+            </a:outerShdw>
+          </a:effectLst>
+        </p:spPr>
+      </p:sp>
+      <p:sp>
+        <p:nvSpPr>
+          <p:cNvPr id="26" name="Text 24"/>
+          <p:cNvSpPr/>
+          <p:nvPr/>
+        </p:nvSpPr>
+        <p:spPr>
+          <a:xfrm>
+            <a:off x="3383280" y="1965960"/>
+            <a:ext cx="2377440" cy="594360"/>
+          </a:xfrm>
+          <a:prstGeom prst="rect">
+            <a:avLst/>
+          </a:prstGeom>
+          <a:noFill/>
+          <a:ln/>
+        </p:spPr>
+        <p:txBody>
+          <a:bodyPr wrap="square" lIns="0" tIns="0" rIns="0" bIns="0" rtlCol="0" anchor="ctr"/>
+          <a:lstStyle/>
+          <a:p>
+            <a:pPr algn="ctr" indent="0" marL="0">
+              <a:buNone/>
+            </a:pPr>
+            <a:r>
+              <a:rPr lang="en-US" sz="3600" dirty="0">
+                <a:solidFill>
+                  <a:srgbClr val="000000"/>
+                </a:solidFill>
+              </a:rPr>
+              <a:t>📑</a:t>
+            </a:r>
+            <a:endParaRPr lang="en-US" sz="3600" dirty="0"/>
+          </a:p>
+        </p:txBody>
+      </p:sp>
+      <p:sp>
+        <p:nvSpPr>
+          <p:cNvPr id="27" name="Text 25"/>
+          <p:cNvSpPr/>
+          <p:nvPr/>
+        </p:nvSpPr>
+        <p:spPr>
+          <a:xfrm>
+            <a:off x="3383280" y="2606040"/>
+            <a:ext cx="2377440" cy="365760"/>
+          </a:xfrm>
+          <a:prstGeom prst="rect">
+            <a:avLst/>
+          </a:prstGeom>
+          <a:noFill/>
+          <a:ln/>
+        </p:spPr>
+        <p:txBody>
+          <a:bodyPr wrap="square" lIns="0" tIns="0" rIns="0" bIns="0" rtlCol="0" anchor="ctr"/>
+          <a:lstStyle/>
+          <a:p>
+            <a:pPr algn="ctr" indent="0" marL="0">
+              <a:buNone/>
+            </a:pPr>
+            <a:r>
+              <a:rPr lang="en-US" sz="1200" b="1" dirty="0">
+                <a:solidFill>
+                  <a:srgbClr val="0F172A"/>
+                </a:solidFill>
+                <a:latin typeface="Trebuchet MS" pitchFamily="34" charset="0"/>
+                <a:ea typeface="Trebuchet MS" pitchFamily="34" charset="-122"/>
+                <a:cs typeface="Trebuchet MS" pitchFamily="34" charset="-120"/>
+              </a:rPr>
+              <a:t>Incarichi con Nomine dai Club</a:t>
+            </a:r>
+            <a:endParaRPr lang="en-US" sz="1200" dirty="0"/>
+          </a:p>
+        </p:txBody>
+      </p:sp>
+      <p:sp>
+        <p:nvSpPr>
+          <p:cNvPr id="28" name="Text 26"/>
+          <p:cNvSpPr/>
+          <p:nvPr/>
+        </p:nvSpPr>
+        <p:spPr>
+          <a:xfrm>
+            <a:off x="3429000" y="3017520"/>
+            <a:ext cx="2286000" cy="1234440"/>
+          </a:xfrm>
+          <a:prstGeom prst="rect">
+            <a:avLst/>
+          </a:prstGeom>
+          <a:noFill/>
+          <a:ln/>
+        </p:spPr>
+        <p:txBody>
+          <a:bodyPr wrap="square" lIns="0" tIns="0" rIns="0" bIns="0" rtlCol="0" anchor="t"/>
+          <a:lstStyle/>
+          <a:p>
+            <a:pPr algn="ctr" indent="0" marL="0">
+              <a:buNone/>
+            </a:pPr>
+            <a:r>
+              <a:rPr lang="en-US" sz="950" dirty="0">
+                <a:solidFill>
+                  <a:srgbClr val="334155"/>
+                </a:solidFill>
+                <a:latin typeface="Calibri" pitchFamily="34" charset="0"/>
+                <a:ea typeface="Calibri" pitchFamily="34" charset="-122"/>
+                <a:cs typeface="Calibri" pitchFamily="34" charset="-120"/>
+              </a:rPr>
+              <a:t>Titolo Ufficiale, Nome Club, Zona, Circ., Cognome, Nome. Toggle "Raggruppa per titolo" — una tabella per ciascun incarico (es. tutti i Presidenti, tutti i Tesorieri). Filtro "Solo incarichi attivi".</a:t>
+            </a:r>
+            <a:endParaRPr lang="en-US" sz="950" dirty="0"/>
+          </a:p>
+        </p:txBody>
+      </p:sp>
+      <p:sp>
+        <p:nvSpPr>
+          <p:cNvPr id="29" name="Text 27"/>
+          <p:cNvSpPr/>
+          <p:nvPr/>
+        </p:nvSpPr>
+        <p:spPr>
+          <a:xfrm>
+            <a:off x="3383280" y="4251960"/>
+            <a:ext cx="2377440" cy="274320"/>
+          </a:xfrm>
+          <a:prstGeom prst="rect">
+            <a:avLst/>
+          </a:prstGeom>
+          <a:noFill/>
+          <a:ln/>
+        </p:spPr>
+        <p:txBody>
+          <a:bodyPr wrap="square" lIns="0" tIns="0" rIns="0" bIns="0" rtlCol="0" anchor="ctr"/>
+          <a:lstStyle/>
+          <a:p>
+            <a:pPr algn="ctr" indent="0" marL="0">
+              <a:buNone/>
+            </a:pPr>
+            <a:r>
+              <a:rPr lang="en-US" sz="850" dirty="0">
+                <a:solidFill>
+                  <a:srgbClr val="F5B606"/>
+                </a:solidFill>
+                <a:latin typeface="Consolas" pitchFamily="34" charset="0"/>
+                <a:ea typeface="Consolas" pitchFamily="34" charset="-122"/>
+                <a:cs typeface="Consolas" pitchFamily="34" charset="-120"/>
+              </a:rPr>
+              <a:t>/officer/quadri/incarichi-club</a:t>
+            </a:r>
+            <a:endParaRPr lang="en-US" sz="850" dirty="0"/>
+          </a:p>
+        </p:txBody>
+      </p:sp>
+      <p:sp>
+        <p:nvSpPr>
+          <p:cNvPr id="30" name="Shape 28"/>
+          <p:cNvSpPr/>
+          <p:nvPr/>
+        </p:nvSpPr>
+        <p:spPr>
+          <a:xfrm>
+            <a:off x="6035040" y="1325880"/>
+            <a:ext cx="2651760" cy="365760"/>
+          </a:xfrm>
+          <a:prstGeom prst="rect">
+            <a:avLst/>
+          </a:prstGeom>
+          <a:solidFill>
+            <a:srgbClr val="7C3AED"/>
+          </a:solidFill>
+          <a:ln/>
+        </p:spPr>
+      </p:sp>
+      <p:sp>
+        <p:nvSpPr>
+          <p:cNvPr id="31" name="Text 29"/>
+          <p:cNvSpPr/>
+          <p:nvPr/>
+        </p:nvSpPr>
+        <p:spPr>
+          <a:xfrm>
+            <a:off x="6172200" y="1325880"/>
+            <a:ext cx="1920240" cy="365760"/>
+          </a:xfrm>
+          <a:prstGeom prst="rect">
+            <a:avLst/>
+          </a:prstGeom>
+          <a:noFill/>
+          <a:ln/>
+        </p:spPr>
+        <p:txBody>
+          <a:bodyPr wrap="square" lIns="0" tIns="0" rIns="0" bIns="0" rtlCol="0" anchor="ctr"/>
+          <a:lstStyle/>
+          <a:p>
+            <a:pPr indent="0" marL="0">
+              <a:buNone/>
+            </a:pPr>
+            <a:r>
+              <a:rPr lang="en-US" sz="1000" b="1" spc="200" kern="0" dirty="0">
+                <a:solidFill>
+                  <a:srgbClr val="FFFFFF"/>
+                </a:solidFill>
+                <a:latin typeface="Calibri" pitchFamily="34" charset="0"/>
+                <a:ea typeface="Calibri" pitchFamily="34" charset="-122"/>
+                <a:cs typeface="Calibri" pitchFamily="34" charset="-120"/>
+              </a:rPr>
+              <a:t>SEZIONE ATTIVITÀ</a:t>
+            </a:r>
+            <a:endParaRPr lang="en-US" sz="1000" dirty="0"/>
+          </a:p>
+        </p:txBody>
+      </p:sp>
+      <p:sp>
+        <p:nvSpPr>
+          <p:cNvPr id="32" name="Text 30"/>
+          <p:cNvSpPr/>
+          <p:nvPr/>
+        </p:nvSpPr>
+        <p:spPr>
+          <a:xfrm>
+            <a:off x="8275320" y="1325880"/>
+            <a:ext cx="320040" cy="365760"/>
+          </a:xfrm>
+          <a:prstGeom prst="rect">
+            <a:avLst/>
+          </a:prstGeom>
+          <a:noFill/>
+          <a:ln/>
+        </p:spPr>
+        <p:txBody>
+          <a:bodyPr wrap="square" lIns="0" tIns="0" rIns="0" bIns="0" rtlCol="0" anchor="ctr"/>
+          <a:lstStyle/>
+          <a:p>
+            <a:pPr algn="r" indent="0" marL="0">
+              <a:buNone/>
+            </a:pPr>
+            <a:r>
+              <a:rPr lang="en-US" sz="1600" b="1" dirty="0">
+                <a:solidFill>
+                  <a:srgbClr val="FFFFFF"/>
+                </a:solidFill>
+                <a:latin typeface="Trebuchet MS" pitchFamily="34" charset="0"/>
+                <a:ea typeface="Trebuchet MS" pitchFamily="34" charset="-122"/>
+                <a:cs typeface="Trebuchet MS" pitchFamily="34" charset="-120"/>
+              </a:rPr>
+              <a:t>2</a:t>
+            </a:r>
+            <a:endParaRPr lang="en-US" sz="1600" dirty="0"/>
+          </a:p>
+        </p:txBody>
+      </p:sp>
+      <p:sp>
+        <p:nvSpPr>
+          <p:cNvPr id="33" name="Shape 31"/>
+          <p:cNvSpPr/>
+          <p:nvPr/>
+        </p:nvSpPr>
+        <p:spPr>
+          <a:xfrm>
+            <a:off x="6035040" y="1783080"/>
+            <a:ext cx="2651760" cy="1325880"/>
+          </a:xfrm>
+          <a:prstGeom prst="roundRect">
+            <a:avLst>
+              <a:gd name="adj" fmla="val 6897"/>
+            </a:avLst>
+          </a:prstGeom>
+          <a:solidFill>
+            <a:srgbClr val="FFFFFF"/>
+          </a:solidFill>
+          <a:ln w="12700">
+            <a:solidFill>
+              <a:srgbClr val="E2E8F0"/>
+            </a:solidFill>
+            <a:prstDash val="solid"/>
+          </a:ln>
+          <a:effectLst>
+            <a:outerShdw sx="100000" sy="100000" kx="0" ky="0" algn="bl" rotWithShape="0" blurRad="101600" dist="25400" dir="5400000">
+              <a:srgbClr val="000000">
+                <a:alpha val="8000"/>
+              </a:srgbClr>
+            </a:outerShdw>
+          </a:effectLst>
+        </p:spPr>
+      </p:sp>
+      <p:sp>
+        <p:nvSpPr>
+          <p:cNvPr id="34" name="Text 32"/>
+          <p:cNvSpPr/>
+          <p:nvPr/>
+        </p:nvSpPr>
+        <p:spPr>
+          <a:xfrm>
+            <a:off x="6126480" y="1856232"/>
+            <a:ext cx="457200" cy="411480"/>
+          </a:xfrm>
+          <a:prstGeom prst="rect">
+            <a:avLst/>
+          </a:prstGeom>
+          <a:noFill/>
+          <a:ln/>
+        </p:spPr>
+        <p:txBody>
+          <a:bodyPr wrap="square" lIns="0" tIns="0" rIns="0" bIns="0" rtlCol="0" anchor="ctr"/>
+          <a:lstStyle/>
+          <a:p>
+            <a:pPr indent="0" marL="0">
+              <a:buNone/>
+            </a:pPr>
+            <a:r>
+              <a:rPr lang="en-US" sz="2000" dirty="0">
+                <a:solidFill>
+                  <a:srgbClr val="000000"/>
+                </a:solidFill>
+              </a:rPr>
+              <a:t>📊</a:t>
+            </a:r>
+            <a:endParaRPr lang="en-US" sz="2000" dirty="0"/>
+          </a:p>
+        </p:txBody>
+      </p:sp>
+      <p:sp>
+        <p:nvSpPr>
+          <p:cNvPr id="35" name="Text 33"/>
+          <p:cNvSpPr/>
+          <p:nvPr/>
+        </p:nvSpPr>
+        <p:spPr>
+          <a:xfrm>
+            <a:off x="6629400" y="1856232"/>
+            <a:ext cx="1965960" cy="384048"/>
+          </a:xfrm>
+          <a:prstGeom prst="rect">
+            <a:avLst/>
+          </a:prstGeom>
+          <a:noFill/>
+          <a:ln/>
+        </p:spPr>
+        <p:txBody>
+          <a:bodyPr wrap="square" lIns="0" tIns="0" rIns="0" bIns="0" rtlCol="0" anchor="ctr"/>
+          <a:lstStyle/>
+          <a:p>
+            <a:pPr indent="0" marL="0">
+              <a:buNone/>
+            </a:pPr>
+            <a:r>
+              <a:rPr lang="en-US" sz="1050" b="1" dirty="0">
+                <a:solidFill>
+                  <a:srgbClr val="0F172A"/>
+                </a:solidFill>
+                <a:latin typeface="Trebuchet MS" pitchFamily="34" charset="0"/>
+                <a:ea typeface="Trebuchet MS" pitchFamily="34" charset="-122"/>
+                <a:cs typeface="Trebuchet MS" pitchFamily="34" charset="-120"/>
+              </a:rPr>
+              <a:t>Tutte le attività · Club / Anno</a:t>
+            </a:r>
+            <a:endParaRPr lang="en-US" sz="1050" dirty="0"/>
+          </a:p>
+        </p:txBody>
+      </p:sp>
+      <p:sp>
+        <p:nvSpPr>
+          <p:cNvPr id="36" name="Text 34"/>
+          <p:cNvSpPr/>
+          <p:nvPr/>
+        </p:nvSpPr>
+        <p:spPr>
+          <a:xfrm>
+            <a:off x="6172200" y="2286000"/>
+            <a:ext cx="2377440" cy="566928"/>
+          </a:xfrm>
+          <a:prstGeom prst="rect">
+            <a:avLst/>
+          </a:prstGeom>
+          <a:noFill/>
+          <a:ln/>
+        </p:spPr>
+        <p:txBody>
+          <a:bodyPr wrap="square" lIns="0" tIns="0" rIns="0" bIns="0" rtlCol="0" anchor="t"/>
+          <a:lstStyle/>
+          <a:p>
+            <a:pPr indent="0" marL="0">
+              <a:buNone/>
+            </a:pPr>
+            <a:r>
+              <a:rPr lang="en-US" sz="850" dirty="0">
+                <a:solidFill>
+                  <a:srgbClr val="334155"/>
+                </a:solidFill>
+                <a:latin typeface="Calibri" pitchFamily="34" charset="0"/>
+                <a:ea typeface="Calibri" pitchFamily="34" charset="-122"/>
+                <a:cs typeface="Calibri" pitchFamily="34" charset="-120"/>
+              </a:rPr>
+              <a:t>11 colonne: Data, Stato, Titolo, Causa, Tipo, Persone, Volontari, Ore capped, Donati, Org., Raccolti. Riga TOTALI in fondo. A4 landscape.</a:t>
+            </a:r>
+            <a:endParaRPr lang="en-US" sz="850" dirty="0"/>
+          </a:p>
+        </p:txBody>
+      </p:sp>
+      <p:sp>
+        <p:nvSpPr>
+          <p:cNvPr id="37" name="Text 35"/>
+          <p:cNvSpPr/>
+          <p:nvPr/>
+        </p:nvSpPr>
+        <p:spPr>
+          <a:xfrm>
+            <a:off x="6172200" y="2862072"/>
+            <a:ext cx="2377440" cy="201168"/>
+          </a:xfrm>
+          <a:prstGeom prst="rect">
+            <a:avLst/>
+          </a:prstGeom>
+          <a:noFill/>
+          <a:ln/>
+        </p:spPr>
+        <p:txBody>
+          <a:bodyPr wrap="square" lIns="0" tIns="0" rIns="0" bIns="0" rtlCol="0" anchor="ctr"/>
+          <a:lstStyle/>
+          <a:p>
+            <a:pPr indent="0" marL="0">
+              <a:buNone/>
+            </a:pPr>
+            <a:r>
+              <a:rPr lang="en-US" sz="750" dirty="0">
+                <a:solidFill>
+                  <a:srgbClr val="7C3AED"/>
+                </a:solidFill>
+                <a:latin typeface="Consolas" pitchFamily="34" charset="0"/>
+                <a:ea typeface="Consolas" pitchFamily="34" charset="-122"/>
+                <a:cs typeface="Consolas" pitchFamily="34" charset="-120"/>
+              </a:rPr>
+              <a:t>/attivita/quadri/club-anno</a:t>
+            </a:r>
+            <a:endParaRPr lang="en-US" sz="750" dirty="0"/>
+          </a:p>
+        </p:txBody>
+      </p:sp>
+      <p:sp>
+        <p:nvSpPr>
+          <p:cNvPr id="38" name="Shape 36"/>
+          <p:cNvSpPr/>
+          <p:nvPr/>
+        </p:nvSpPr>
+        <p:spPr>
+          <a:xfrm>
+            <a:off x="6035040" y="3200400"/>
+            <a:ext cx="2651760" cy="1325880"/>
+          </a:xfrm>
+          <a:prstGeom prst="roundRect">
+            <a:avLst>
+              <a:gd name="adj" fmla="val 6897"/>
+            </a:avLst>
+          </a:prstGeom>
+          <a:solidFill>
+            <a:srgbClr val="FFFFFF"/>
+          </a:solidFill>
+          <a:ln w="12700">
+            <a:solidFill>
+              <a:srgbClr val="E2E8F0"/>
+            </a:solidFill>
+            <a:prstDash val="solid"/>
+          </a:ln>
+          <a:effectLst>
+            <a:outerShdw sx="100000" sy="100000" kx="0" ky="0" algn="bl" rotWithShape="0" blurRad="101600" dist="25400" dir="5400000">
+              <a:srgbClr val="000000">
+                <a:alpha val="8000"/>
+              </a:srgbClr>
+            </a:outerShdw>
+          </a:effectLst>
+        </p:spPr>
+      </p:sp>
+      <p:sp>
+        <p:nvSpPr>
+          <p:cNvPr id="39" name="Text 37"/>
+          <p:cNvSpPr/>
+          <p:nvPr/>
+        </p:nvSpPr>
+        <p:spPr>
+          <a:xfrm>
+            <a:off x="6126480" y="3273552"/>
+            <a:ext cx="457200" cy="411480"/>
+          </a:xfrm>
+          <a:prstGeom prst="rect">
+            <a:avLst/>
+          </a:prstGeom>
+          <a:noFill/>
+          <a:ln/>
+        </p:spPr>
+        <p:txBody>
+          <a:bodyPr wrap="square" lIns="0" tIns="0" rIns="0" bIns="0" rtlCol="0" anchor="ctr"/>
+          <a:lstStyle/>
+          <a:p>
+            <a:pPr indent="0" marL="0">
+              <a:buNone/>
+            </a:pPr>
+            <a:r>
+              <a:rPr lang="en-US" sz="2000" dirty="0">
+                <a:solidFill>
+                  <a:srgbClr val="000000"/>
+                </a:solidFill>
+              </a:rPr>
+              <a:t>🧾</a:t>
+            </a:r>
+            <a:endParaRPr lang="en-US" sz="2000" dirty="0"/>
+          </a:p>
+        </p:txBody>
+      </p:sp>
+      <p:sp>
+        <p:nvSpPr>
+          <p:cNvPr id="40" name="Text 38"/>
+          <p:cNvSpPr/>
+          <p:nvPr/>
+        </p:nvSpPr>
+        <p:spPr>
+          <a:xfrm>
+            <a:off x="6629400" y="3273552"/>
+            <a:ext cx="1965960" cy="384048"/>
+          </a:xfrm>
+          <a:prstGeom prst="rect">
+            <a:avLst/>
+          </a:prstGeom>
+          <a:noFill/>
+          <a:ln/>
+        </p:spPr>
+        <p:txBody>
+          <a:bodyPr wrap="square" lIns="0" tIns="0" rIns="0" bIns="0" rtlCol="0" anchor="ctr"/>
+          <a:lstStyle/>
+          <a:p>
+            <a:pPr indent="0" marL="0">
+              <a:buNone/>
+            </a:pPr>
+            <a:r>
+              <a:rPr lang="en-US" sz="1050" b="1" dirty="0">
+                <a:solidFill>
+                  <a:srgbClr val="0F172A"/>
+                </a:solidFill>
+                <a:latin typeface="Trebuchet MS" pitchFamily="34" charset="0"/>
+                <a:ea typeface="Trebuchet MS" pitchFamily="34" charset="-122"/>
+                <a:cs typeface="Trebuchet MS" pitchFamily="34" charset="-120"/>
+              </a:rPr>
+              <a:t>Amministrazione vs Service</a:t>
+            </a:r>
+            <a:endParaRPr lang="en-US" sz="1050" dirty="0"/>
+          </a:p>
+        </p:txBody>
+      </p:sp>
+      <p:sp>
+        <p:nvSpPr>
+          <p:cNvPr id="41" name="Text 39"/>
+          <p:cNvSpPr/>
+          <p:nvPr/>
+        </p:nvSpPr>
+        <p:spPr>
+          <a:xfrm>
+            <a:off x="6172200" y="3703320"/>
+            <a:ext cx="2377440" cy="566928"/>
+          </a:xfrm>
+          <a:prstGeom prst="rect">
+            <a:avLst/>
+          </a:prstGeom>
+          <a:noFill/>
+          <a:ln/>
+        </p:spPr>
+        <p:txBody>
+          <a:bodyPr wrap="square" lIns="0" tIns="0" rIns="0" bIns="0" rtlCol="0" anchor="t"/>
+          <a:lstStyle/>
+          <a:p>
+            <a:pPr indent="0" marL="0">
+              <a:buNone/>
+            </a:pPr>
+            <a:r>
+              <a:rPr lang="en-US" sz="850" dirty="0">
+                <a:solidFill>
+                  <a:srgbClr val="334155"/>
+                </a:solidFill>
+                <a:latin typeface="Calibri" pitchFamily="34" charset="0"/>
+                <a:ea typeface="Calibri" pitchFamily="34" charset="-122"/>
+                <a:cs typeface="Calibri" pitchFamily="34" charset="-120"/>
+              </a:rPr>
+              <a:t>Stesse colonne ma Persone = Limite Massimo. Split in 2 tabelle (Service / Amministrazione) con subtotali + totale complessivo.</a:t>
+            </a:r>
+            <a:endParaRPr lang="en-US" sz="850" dirty="0"/>
+          </a:p>
+        </p:txBody>
+      </p:sp>
+      <p:sp>
+        <p:nvSpPr>
+          <p:cNvPr id="42" name="Text 40"/>
+          <p:cNvSpPr/>
+          <p:nvPr/>
+        </p:nvSpPr>
+        <p:spPr>
+          <a:xfrm>
+            <a:off x="6172200" y="4279392"/>
+            <a:ext cx="2377440" cy="201168"/>
+          </a:xfrm>
+          <a:prstGeom prst="rect">
+            <a:avLst/>
+          </a:prstGeom>
+          <a:noFill/>
+          <a:ln/>
+        </p:spPr>
+        <p:txBody>
+          <a:bodyPr wrap="square" lIns="0" tIns="0" rIns="0" bIns="0" rtlCol="0" anchor="ctr"/>
+          <a:lstStyle/>
+          <a:p>
+            <a:pPr indent="0" marL="0">
+              <a:buNone/>
+            </a:pPr>
+            <a:r>
+              <a:rPr lang="en-US" sz="750" dirty="0">
+                <a:solidFill>
+                  <a:srgbClr val="7C3AED"/>
+                </a:solidFill>
+                <a:latin typeface="Consolas" pitchFamily="34" charset="0"/>
+                <a:ea typeface="Consolas" pitchFamily="34" charset="-122"/>
+                <a:cs typeface="Consolas" pitchFamily="34" charset="-120"/>
+              </a:rPr>
+              <a:t>/attivita/quadri/club-anno-amm-service</a:t>
+            </a:r>
+            <a:endParaRPr lang="en-US" sz="750" dirty="0"/>
+          </a:p>
+        </p:txBody>
+      </p:sp>
+      <p:sp>
+        <p:nvSpPr>
+          <p:cNvPr id="43" name="Text 41"/>
+          <p:cNvSpPr/>
+          <p:nvPr/>
+        </p:nvSpPr>
+        <p:spPr>
+          <a:xfrm>
+            <a:off x="457200" y="4636008"/>
+            <a:ext cx="8229600" cy="201168"/>
+          </a:xfrm>
+          <a:prstGeom prst="rect">
+            <a:avLst/>
+          </a:prstGeom>
+          <a:noFill/>
+          <a:ln/>
+        </p:spPr>
+        <p:txBody>
+          <a:bodyPr wrap="square" rtlCol="0" anchor="ctr"/>
+          <a:lstStyle/>
+          <a:p>
+            <a:pPr algn="ctr" indent="0" marL="0">
+              <a:buNone/>
+            </a:pPr>
+            <a:r>
+              <a:rPr lang="en-US" sz="900" i="1" dirty="0">
+                <a:solidFill>
+                  <a:srgbClr val="64748B"/>
+                </a:solidFill>
+                <a:latin typeface="Calibri" pitchFamily="34" charset="0"/>
+                <a:ea typeface="Calibri" pitchFamily="34" charset="-122"/>
+                <a:cs typeface="Calibri" pitchFamily="34" charset="-120"/>
+              </a:rPr>
+              <a:t>⚙️  Ogni quadro ha filtri propri · stampa A4 (portrait/landscape automatico) · header tabella ripetuto su ogni pagina</a:t>
+            </a:r>
+            <a:endParaRPr lang="en-US" sz="900" dirty="0"/>
+          </a:p>
+        </p:txBody>
+      </p:sp>
+      <p:sp>
+        <p:nvSpPr>
+          <p:cNvPr id="44" name="Text 42"/>
+          <p:cNvSpPr/>
+          <p:nvPr/>
+        </p:nvSpPr>
+        <p:spPr>
+          <a:xfrm>
+            <a:off x="457200" y="4864608"/>
+            <a:ext cx="6400800" cy="201168"/>
+          </a:xfrm>
+          <a:prstGeom prst="rect">
+            <a:avLst/>
+          </a:prstGeom>
+          <a:noFill/>
+          <a:ln/>
+        </p:spPr>
+        <p:txBody>
+          <a:bodyPr wrap="square" rtlCol="0" anchor="ctr"/>
+          <a:lstStyle/>
+          <a:p>
+            <a:pPr indent="0" marL="0">
+              <a:buNone/>
+            </a:pPr>
+            <a:r>
+              <a:rPr lang="en-US" sz="900" i="1" dirty="0">
+                <a:solidFill>
+                  <a:srgbClr val="64748B"/>
+                </a:solidFill>
+                <a:latin typeface="Calibri" pitchFamily="34" charset="0"/>
+                <a:ea typeface="Calibri" pitchFamily="34" charset="-122"/>
+                <a:cs typeface="Calibri" pitchFamily="34" charset="-120"/>
+              </a:rPr>
+              <a:t>Digitalions · digitalions108la.it · Distretto Lions 108 LA</a:t>
+            </a:r>
+            <a:endParaRPr lang="en-US" sz="900" dirty="0"/>
+          </a:p>
+        </p:txBody>
+      </p:sp>
+      <p:sp>
+        <p:nvSpPr>
+          <p:cNvPr id="45" name="Text 43"/>
+          <p:cNvSpPr/>
+          <p:nvPr/>
+        </p:nvSpPr>
+        <p:spPr>
+          <a:xfrm>
+            <a:off x="8229600" y="4864608"/>
+            <a:ext cx="777240" cy="201168"/>
+          </a:xfrm>
+          <a:prstGeom prst="rect">
+            <a:avLst/>
+          </a:prstGeom>
+          <a:noFill/>
+          <a:ln/>
+        </p:spPr>
+        <p:txBody>
+          <a:bodyPr wrap="square" rtlCol="0" anchor="ctr"/>
+          <a:lstStyle/>
+          <a:p>
+            <a:pPr algn="r" indent="0" marL="0">
+              <a:buNone/>
+            </a:pPr>
+            <a:r>
+              <a:rPr lang="en-US" sz="900" dirty="0">
+                <a:solidFill>
+                  <a:srgbClr val="64748B"/>
+                </a:solidFill>
+                <a:latin typeface="Calibri" pitchFamily="34" charset="0"/>
+                <a:ea typeface="Calibri" pitchFamily="34" charset="-122"/>
+                <a:cs typeface="Calibri" pitchFamily="34" charset="-120"/>
+              </a:rPr>
+              <a:t>4 / 10</a:t>
             </a:r>
             <a:endParaRPr lang="en-US" sz="900" dirty="0"/>
           </a:p>
@@ -5732,9 +6775,9 @@
 </p:sld>
 </file>
 
-<file path=ppt/slides/slide4.xml><?xml version="1.0" encoding="utf-8"?>
+<file path=ppt/slides/slide5.xml><?xml version="1.0" encoding="utf-8"?>
 <p:sld xmlns:a="http://schemas.openxmlformats.org/drawingml/2006/main" xmlns:r="http://schemas.openxmlformats.org/officeDocument/2006/relationships" xmlns:p="http://schemas.openxmlformats.org/presentationml/2006/main">
-  <p:cSld name="Slide 4">
+  <p:cSld name="Slide 5">
     <p:bg>
       <p:bgPr>
         <a:solidFill>
@@ -6521,1049 +7564,6 @@
       <p:sp>
         <p:nvSpPr>
           <p:cNvPr id="24" name="Text 22"/>
-          <p:cNvSpPr/>
-          <p:nvPr/>
-        </p:nvSpPr>
-        <p:spPr>
-          <a:xfrm>
-            <a:off x="8229600" y="4864608"/>
-            <a:ext cx="777240" cy="201168"/>
-          </a:xfrm>
-          <a:prstGeom prst="rect">
-            <a:avLst/>
-          </a:prstGeom>
-          <a:noFill/>
-          <a:ln/>
-        </p:spPr>
-        <p:txBody>
-          <a:bodyPr wrap="square" rtlCol="0" anchor="ctr"/>
-          <a:lstStyle/>
-          <a:p>
-            <a:pPr algn="r" indent="0" marL="0">
-              <a:buNone/>
-            </a:pPr>
-            <a:r>
-              <a:rPr lang="en-US" sz="900" dirty="0">
-                <a:solidFill>
-                  <a:srgbClr val="64748B"/>
-                </a:solidFill>
-                <a:latin typeface="Calibri" pitchFamily="34" charset="0"/>
-                <a:ea typeface="Calibri" pitchFamily="34" charset="-122"/>
-                <a:cs typeface="Calibri" pitchFamily="34" charset="-120"/>
-              </a:rPr>
-              <a:t>4 / 10</a:t>
-            </a:r>
-            <a:endParaRPr lang="en-US" sz="900" dirty="0"/>
-          </a:p>
-        </p:txBody>
-      </p:sp>
-    </p:spTree>
-  </p:cSld>
-  <p:clrMapOvr>
-    <a:masterClrMapping/>
-  </p:clrMapOvr>
-</p:sld>
-</file>
-
-<file path=ppt/slides/slide5.xml><?xml version="1.0" encoding="utf-8"?>
-<p:sld xmlns:a="http://schemas.openxmlformats.org/drawingml/2006/main" xmlns:r="http://schemas.openxmlformats.org/officeDocument/2006/relationships" xmlns:p="http://schemas.openxmlformats.org/presentationml/2006/main">
-  <p:cSld name="Slide 5">
-    <p:bg>
-      <p:bgPr>
-        <a:solidFill>
-          <a:srgbClr val="F8FAFC"/>
-        </a:solidFill>
-      </p:bgPr>
-    </p:bg>
-    <p:spTree>
-      <p:nvGrpSpPr>
-        <p:cNvPr id="1" name=""/>
-        <p:cNvGrpSpPr/>
-        <p:nvPr/>
-      </p:nvGrpSpPr>
-      <p:grpSpPr>
-        <a:xfrm>
-          <a:off x="0" y="0"/>
-          <a:ext cx="0" cy="0"/>
-          <a:chOff x="0" y="0"/>
-          <a:chExt cx="0" cy="0"/>
-        </a:xfrm>
-      </p:grpSpPr>
-      <p:sp>
-        <p:nvSpPr>
-          <p:cNvPr id="2" name="Text 0"/>
-          <p:cNvSpPr/>
-          <p:nvPr/>
-        </p:nvSpPr>
-        <p:spPr>
-          <a:xfrm>
-            <a:off x="457200" y="320040"/>
-            <a:ext cx="8229600" cy="502920"/>
-          </a:xfrm>
-          <a:prstGeom prst="rect">
-            <a:avLst/>
-          </a:prstGeom>
-          <a:noFill/>
-          <a:ln/>
-        </p:spPr>
-        <p:txBody>
-          <a:bodyPr wrap="square" lIns="0" tIns="0" rIns="0" bIns="0" rtlCol="0" anchor="ctr"/>
-          <a:lstStyle/>
-          <a:p>
-            <a:pPr indent="0" marL="0">
-              <a:buNone/>
-            </a:pPr>
-            <a:r>
-              <a:rPr lang="en-US" sz="2600" b="1" dirty="0">
-                <a:solidFill>
-                  <a:srgbClr val="0055FF"/>
-                </a:solidFill>
-                <a:latin typeface="Trebuchet MS" pitchFamily="34" charset="0"/>
-                <a:ea typeface="Trebuchet MS" pitchFamily="34" charset="-122"/>
-                <a:cs typeface="Trebuchet MS" pitchFamily="34" charset="-120"/>
-              </a:rPr>
-              <a:t>1 · Feature da sviluppare</a:t>
-            </a:r>
-            <a:endParaRPr lang="en-US" sz="2600" dirty="0"/>
-          </a:p>
-        </p:txBody>
-      </p:sp>
-      <p:sp>
-        <p:nvSpPr>
-          <p:cNvPr id="3" name="Text 1"/>
-          <p:cNvSpPr/>
-          <p:nvPr/>
-        </p:nvSpPr>
-        <p:spPr>
-          <a:xfrm>
-            <a:off x="457200" y="841248"/>
-            <a:ext cx="8229600" cy="292608"/>
-          </a:xfrm>
-          <a:prstGeom prst="rect">
-            <a:avLst/>
-          </a:prstGeom>
-          <a:noFill/>
-          <a:ln/>
-        </p:spPr>
-        <p:txBody>
-          <a:bodyPr wrap="square" lIns="0" tIns="0" rIns="0" bIns="0" rtlCol="0" anchor="ctr"/>
-          <a:lstStyle/>
-          <a:p>
-            <a:pPr indent="0" marL="0">
-              <a:buNone/>
-            </a:pPr>
-            <a:r>
-              <a:rPr lang="en-US" sz="1300" i="1" dirty="0">
-                <a:solidFill>
-                  <a:srgbClr val="64748B"/>
-                </a:solidFill>
-                <a:latin typeface="Calibri" pitchFamily="34" charset="0"/>
-                <a:ea typeface="Calibri" pitchFamily="34" charset="-122"/>
-                <a:cs typeface="Calibri" pitchFamily="34" charset="-120"/>
-              </a:rPr>
-              <a:t>Priorizzate per impatto. Ciascuna è autonoma e rilasciabile in modo incrementale.</a:t>
-            </a:r>
-            <a:endParaRPr lang="en-US" sz="1300" dirty="0"/>
-          </a:p>
-        </p:txBody>
-      </p:sp>
-      <p:sp>
-        <p:nvSpPr>
-          <p:cNvPr id="4" name="Shape 2"/>
-          <p:cNvSpPr/>
-          <p:nvPr/>
-        </p:nvSpPr>
-        <p:spPr>
-          <a:xfrm>
-            <a:off x="457200" y="1417320"/>
-            <a:ext cx="8229600" cy="566928"/>
-          </a:xfrm>
-          <a:prstGeom prst="roundRect">
-            <a:avLst>
-              <a:gd name="adj" fmla="val 16129"/>
-            </a:avLst>
-          </a:prstGeom>
-          <a:solidFill>
-            <a:srgbClr val="FFFFFF"/>
-          </a:solidFill>
-          <a:ln w="12700">
-            <a:solidFill>
-              <a:srgbClr val="E2E8F0"/>
-            </a:solidFill>
-            <a:prstDash val="solid"/>
-          </a:ln>
-          <a:effectLst>
-            <a:outerShdw sx="100000" sy="100000" kx="0" ky="0" algn="bl" rotWithShape="0" blurRad="101600" dist="25400" dir="5400000">
-              <a:srgbClr val="000000">
-                <a:alpha val="8000"/>
-              </a:srgbClr>
-            </a:outerShdw>
-          </a:effectLst>
-        </p:spPr>
-      </p:sp>
-      <p:sp>
-        <p:nvSpPr>
-          <p:cNvPr id="5" name="Shape 3"/>
-          <p:cNvSpPr/>
-          <p:nvPr/>
-        </p:nvSpPr>
-        <p:spPr>
-          <a:xfrm>
-            <a:off x="457200" y="1417320"/>
-            <a:ext cx="777240" cy="566928"/>
-          </a:xfrm>
-          <a:prstGeom prst="rect">
-            <a:avLst/>
-          </a:prstGeom>
-          <a:solidFill>
-            <a:srgbClr val="DC2626"/>
-          </a:solidFill>
-          <a:ln/>
-        </p:spPr>
-      </p:sp>
-      <p:sp>
-        <p:nvSpPr>
-          <p:cNvPr id="6" name="Text 4"/>
-          <p:cNvSpPr/>
-          <p:nvPr/>
-        </p:nvSpPr>
-        <p:spPr>
-          <a:xfrm>
-            <a:off x="457200" y="1417320"/>
-            <a:ext cx="777240" cy="566928"/>
-          </a:xfrm>
-          <a:prstGeom prst="rect">
-            <a:avLst/>
-          </a:prstGeom>
-          <a:noFill/>
-          <a:ln/>
-        </p:spPr>
-        <p:txBody>
-          <a:bodyPr wrap="square" lIns="0" tIns="0" rIns="0" bIns="0" rtlCol="0" anchor="ctr"/>
-          <a:lstStyle/>
-          <a:p>
-            <a:pPr algn="ctr" indent="0" marL="0">
-              <a:buNone/>
-            </a:pPr>
-            <a:r>
-              <a:rPr lang="en-US" sz="1000" b="1" dirty="0">
-                <a:solidFill>
-                  <a:srgbClr val="FFFFFF"/>
-                </a:solidFill>
-                <a:latin typeface="Calibri" pitchFamily="34" charset="0"/>
-                <a:ea typeface="Calibri" pitchFamily="34" charset="-122"/>
-                <a:cs typeface="Calibri" pitchFamily="34" charset="-120"/>
-              </a:rPr>
-              <a:t>ALTA</a:t>
-            </a:r>
-            <a:endParaRPr lang="en-US" sz="1000" dirty="0"/>
-          </a:p>
-        </p:txBody>
-      </p:sp>
-      <p:sp>
-        <p:nvSpPr>
-          <p:cNvPr id="7" name="Text 5"/>
-          <p:cNvSpPr/>
-          <p:nvPr/>
-        </p:nvSpPr>
-        <p:spPr>
-          <a:xfrm>
-            <a:off x="1417320" y="1453896"/>
-            <a:ext cx="7223760" cy="274320"/>
-          </a:xfrm>
-          <a:prstGeom prst="rect">
-            <a:avLst/>
-          </a:prstGeom>
-          <a:noFill/>
-          <a:ln/>
-        </p:spPr>
-        <p:txBody>
-          <a:bodyPr wrap="square" lIns="0" tIns="0" rIns="0" bIns="0" rtlCol="0" anchor="ctr"/>
-          <a:lstStyle/>
-          <a:p>
-            <a:pPr indent="0" marL="0">
-              <a:buNone/>
-            </a:pPr>
-            <a:r>
-              <a:rPr lang="en-US" sz="1200" b="1" dirty="0">
-                <a:solidFill>
-                  <a:srgbClr val="0F172A"/>
-                </a:solidFill>
-                <a:latin typeface="Trebuchet MS" pitchFamily="34" charset="0"/>
-                <a:ea typeface="Trebuchet MS" pitchFamily="34" charset="-122"/>
-                <a:cs typeface="Trebuchet MS" pitchFamily="34" charset="-120"/>
-              </a:rPr>
-              <a:t>Login con ruoli</a:t>
-            </a:r>
-            <a:endParaRPr lang="en-US" sz="1200" dirty="0"/>
-          </a:p>
-        </p:txBody>
-      </p:sp>
-      <p:sp>
-        <p:nvSpPr>
-          <p:cNvPr id="8" name="Text 6"/>
-          <p:cNvSpPr/>
-          <p:nvPr/>
-        </p:nvSpPr>
-        <p:spPr>
-          <a:xfrm>
-            <a:off x="1417320" y="1709928"/>
-            <a:ext cx="7223760" cy="274320"/>
-          </a:xfrm>
-          <a:prstGeom prst="rect">
-            <a:avLst/>
-          </a:prstGeom>
-          <a:noFill/>
-          <a:ln/>
-        </p:spPr>
-        <p:txBody>
-          <a:bodyPr wrap="square" lIns="0" tIns="0" rIns="0" bIns="0" rtlCol="0" anchor="t"/>
-          <a:lstStyle/>
-          <a:p>
-            <a:pPr indent="0" marL="0">
-              <a:buNone/>
-            </a:pPr>
-            <a:r>
-              <a:rPr lang="en-US" sz="950" dirty="0">
-                <a:solidFill>
-                  <a:srgbClr val="334155"/>
-                </a:solidFill>
-                <a:latin typeface="Calibri" pitchFamily="34" charset="0"/>
-                <a:ea typeface="Calibri" pitchFamily="34" charset="-122"/>
-                <a:cs typeface="Calibri" pitchFamily="34" charset="-120"/>
-              </a:rPr>
-              <a:t>Tre livelli di accesso: Socio (vede sé stesso), Officer di Club (modifica il proprio club), Distretto (vede tutto). Sblocca anche la privacy: dati personali nascosti ai non autorizzati.</a:t>
-            </a:r>
-            <a:endParaRPr lang="en-US" sz="950" dirty="0"/>
-          </a:p>
-        </p:txBody>
-      </p:sp>
-      <p:sp>
-        <p:nvSpPr>
-          <p:cNvPr id="9" name="Shape 7"/>
-          <p:cNvSpPr/>
-          <p:nvPr/>
-        </p:nvSpPr>
-        <p:spPr>
-          <a:xfrm>
-            <a:off x="457200" y="2048256"/>
-            <a:ext cx="8229600" cy="566928"/>
-          </a:xfrm>
-          <a:prstGeom prst="roundRect">
-            <a:avLst>
-              <a:gd name="adj" fmla="val 16129"/>
-            </a:avLst>
-          </a:prstGeom>
-          <a:solidFill>
-            <a:srgbClr val="FFFFFF"/>
-          </a:solidFill>
-          <a:ln w="12700">
-            <a:solidFill>
-              <a:srgbClr val="E2E8F0"/>
-            </a:solidFill>
-            <a:prstDash val="solid"/>
-          </a:ln>
-          <a:effectLst>
-            <a:outerShdw sx="100000" sy="100000" kx="0" ky="0" algn="bl" rotWithShape="0" blurRad="101600" dist="25400" dir="5400000">
-              <a:srgbClr val="000000">
-                <a:alpha val="8000"/>
-              </a:srgbClr>
-            </a:outerShdw>
-          </a:effectLst>
-        </p:spPr>
-      </p:sp>
-      <p:sp>
-        <p:nvSpPr>
-          <p:cNvPr id="10" name="Shape 8"/>
-          <p:cNvSpPr/>
-          <p:nvPr/>
-        </p:nvSpPr>
-        <p:spPr>
-          <a:xfrm>
-            <a:off x="457200" y="2048256"/>
-            <a:ext cx="777240" cy="566928"/>
-          </a:xfrm>
-          <a:prstGeom prst="rect">
-            <a:avLst/>
-          </a:prstGeom>
-          <a:solidFill>
-            <a:srgbClr val="DC2626"/>
-          </a:solidFill>
-          <a:ln/>
-        </p:spPr>
-      </p:sp>
-      <p:sp>
-        <p:nvSpPr>
-          <p:cNvPr id="11" name="Text 9"/>
-          <p:cNvSpPr/>
-          <p:nvPr/>
-        </p:nvSpPr>
-        <p:spPr>
-          <a:xfrm>
-            <a:off x="457200" y="2048256"/>
-            <a:ext cx="777240" cy="566928"/>
-          </a:xfrm>
-          <a:prstGeom prst="rect">
-            <a:avLst/>
-          </a:prstGeom>
-          <a:noFill/>
-          <a:ln/>
-        </p:spPr>
-        <p:txBody>
-          <a:bodyPr wrap="square" lIns="0" tIns="0" rIns="0" bIns="0" rtlCol="0" anchor="ctr"/>
-          <a:lstStyle/>
-          <a:p>
-            <a:pPr algn="ctr" indent="0" marL="0">
-              <a:buNone/>
-            </a:pPr>
-            <a:r>
-              <a:rPr lang="en-US" sz="1000" b="1" dirty="0">
-                <a:solidFill>
-                  <a:srgbClr val="FFFFFF"/>
-                </a:solidFill>
-                <a:latin typeface="Calibri" pitchFamily="34" charset="0"/>
-                <a:ea typeface="Calibri" pitchFamily="34" charset="-122"/>
-                <a:cs typeface="Calibri" pitchFamily="34" charset="-120"/>
-              </a:rPr>
-              <a:t>ALTA</a:t>
-            </a:r>
-            <a:endParaRPr lang="en-US" sz="1000" dirty="0"/>
-          </a:p>
-        </p:txBody>
-      </p:sp>
-      <p:sp>
-        <p:nvSpPr>
-          <p:cNvPr id="12" name="Text 10"/>
-          <p:cNvSpPr/>
-          <p:nvPr/>
-        </p:nvSpPr>
-        <p:spPr>
-          <a:xfrm>
-            <a:off x="1417320" y="2084832"/>
-            <a:ext cx="7223760" cy="274320"/>
-          </a:xfrm>
-          <a:prstGeom prst="rect">
-            <a:avLst/>
-          </a:prstGeom>
-          <a:noFill/>
-          <a:ln/>
-        </p:spPr>
-        <p:txBody>
-          <a:bodyPr wrap="square" lIns="0" tIns="0" rIns="0" bIns="0" rtlCol="0" anchor="ctr"/>
-          <a:lstStyle/>
-          <a:p>
-            <a:pPr indent="0" marL="0">
-              <a:buNone/>
-            </a:pPr>
-            <a:r>
-              <a:rPr lang="en-US" sz="1200" b="1" dirty="0">
-                <a:solidFill>
-                  <a:srgbClr val="0F172A"/>
-                </a:solidFill>
-                <a:latin typeface="Trebuchet MS" pitchFamily="34" charset="0"/>
-                <a:ea typeface="Trebuchet MS" pitchFamily="34" charset="-122"/>
-                <a:cs typeface="Trebuchet MS" pitchFamily="34" charset="-120"/>
-              </a:rPr>
-              <a:t>Import semi-automatico dei CSV Lions</a:t>
-            </a:r>
-            <a:endParaRPr lang="en-US" sz="1200" dirty="0"/>
-          </a:p>
-        </p:txBody>
-      </p:sp>
-      <p:sp>
-        <p:nvSpPr>
-          <p:cNvPr id="13" name="Text 11"/>
-          <p:cNvSpPr/>
-          <p:nvPr/>
-        </p:nvSpPr>
-        <p:spPr>
-          <a:xfrm>
-            <a:off x="1417320" y="2340864"/>
-            <a:ext cx="7223760" cy="274320"/>
-          </a:xfrm>
-          <a:prstGeom prst="rect">
-            <a:avLst/>
-          </a:prstGeom>
-          <a:noFill/>
-          <a:ln/>
-        </p:spPr>
-        <p:txBody>
-          <a:bodyPr wrap="square" lIns="0" tIns="0" rIns="0" bIns="0" rtlCol="0" anchor="t"/>
-          <a:lstStyle/>
-          <a:p>
-            <a:pPr indent="0" marL="0">
-              <a:buNone/>
-            </a:pPr>
-            <a:r>
-              <a:rPr lang="en-US" sz="950" dirty="0">
-                <a:solidFill>
-                  <a:srgbClr val="334155"/>
-                </a:solidFill>
-                <a:latin typeface="Calibri" pitchFamily="34" charset="0"/>
-                <a:ea typeface="Calibri" pitchFamily="34" charset="-122"/>
-                <a:cs typeface="Calibri" pitchFamily="34" charset="-120"/>
-              </a:rPr>
-              <a:t>Pulsante "Carica file" nell'app: il sistema applica lo script di conversione, mostra anteprima delle modifiche, conferma e applica. Niente più passaggio manuale via sviluppatore.</a:t>
-            </a:r>
-            <a:endParaRPr lang="en-US" sz="950" dirty="0"/>
-          </a:p>
-        </p:txBody>
-      </p:sp>
-      <p:sp>
-        <p:nvSpPr>
-          <p:cNvPr id="14" name="Shape 12"/>
-          <p:cNvSpPr/>
-          <p:nvPr/>
-        </p:nvSpPr>
-        <p:spPr>
-          <a:xfrm>
-            <a:off x="457200" y="2679192"/>
-            <a:ext cx="8229600" cy="566928"/>
-          </a:xfrm>
-          <a:prstGeom prst="roundRect">
-            <a:avLst>
-              <a:gd name="adj" fmla="val 16129"/>
-            </a:avLst>
-          </a:prstGeom>
-          <a:solidFill>
-            <a:srgbClr val="FFFFFF"/>
-          </a:solidFill>
-          <a:ln w="12700">
-            <a:solidFill>
-              <a:srgbClr val="E2E8F0"/>
-            </a:solidFill>
-            <a:prstDash val="solid"/>
-          </a:ln>
-          <a:effectLst>
-            <a:outerShdw sx="100000" sy="100000" kx="0" ky="0" algn="bl" rotWithShape="0" blurRad="101600" dist="25400" dir="5400000">
-              <a:srgbClr val="000000">
-                <a:alpha val="8000"/>
-              </a:srgbClr>
-            </a:outerShdw>
-          </a:effectLst>
-        </p:spPr>
-      </p:sp>
-      <p:sp>
-        <p:nvSpPr>
-          <p:cNvPr id="15" name="Shape 13"/>
-          <p:cNvSpPr/>
-          <p:nvPr/>
-        </p:nvSpPr>
-        <p:spPr>
-          <a:xfrm>
-            <a:off x="457200" y="2679192"/>
-            <a:ext cx="777240" cy="566928"/>
-          </a:xfrm>
-          <a:prstGeom prst="rect">
-            <a:avLst/>
-          </a:prstGeom>
-          <a:solidFill>
-            <a:srgbClr val="EA580C"/>
-          </a:solidFill>
-          <a:ln/>
-        </p:spPr>
-      </p:sp>
-      <p:sp>
-        <p:nvSpPr>
-          <p:cNvPr id="16" name="Text 14"/>
-          <p:cNvSpPr/>
-          <p:nvPr/>
-        </p:nvSpPr>
-        <p:spPr>
-          <a:xfrm>
-            <a:off x="457200" y="2679192"/>
-            <a:ext cx="777240" cy="566928"/>
-          </a:xfrm>
-          <a:prstGeom prst="rect">
-            <a:avLst/>
-          </a:prstGeom>
-          <a:noFill/>
-          <a:ln/>
-        </p:spPr>
-        <p:txBody>
-          <a:bodyPr wrap="square" lIns="0" tIns="0" rIns="0" bIns="0" rtlCol="0" anchor="ctr"/>
-          <a:lstStyle/>
-          <a:p>
-            <a:pPr algn="ctr" indent="0" marL="0">
-              <a:buNone/>
-            </a:pPr>
-            <a:r>
-              <a:rPr lang="en-US" sz="1000" b="1" dirty="0">
-                <a:solidFill>
-                  <a:srgbClr val="FFFFFF"/>
-                </a:solidFill>
-                <a:latin typeface="Calibri" pitchFamily="34" charset="0"/>
-                <a:ea typeface="Calibri" pitchFamily="34" charset="-122"/>
-                <a:cs typeface="Calibri" pitchFamily="34" charset="-120"/>
-              </a:rPr>
-              <a:t>MEDIA</a:t>
-            </a:r>
-            <a:endParaRPr lang="en-US" sz="1000" dirty="0"/>
-          </a:p>
-        </p:txBody>
-      </p:sp>
-      <p:sp>
-        <p:nvSpPr>
-          <p:cNvPr id="17" name="Text 15"/>
-          <p:cNvSpPr/>
-          <p:nvPr/>
-        </p:nvSpPr>
-        <p:spPr>
-          <a:xfrm>
-            <a:off x="1417320" y="2715768"/>
-            <a:ext cx="7223760" cy="274320"/>
-          </a:xfrm>
-          <a:prstGeom prst="rect">
-            <a:avLst/>
-          </a:prstGeom>
-          <a:noFill/>
-          <a:ln/>
-        </p:spPr>
-        <p:txBody>
-          <a:bodyPr wrap="square" lIns="0" tIns="0" rIns="0" bIns="0" rtlCol="0" anchor="ctr"/>
-          <a:lstStyle/>
-          <a:p>
-            <a:pPr indent="0" marL="0">
-              <a:buNone/>
-            </a:pPr>
-            <a:r>
-              <a:rPr lang="en-US" sz="1200" b="1" dirty="0">
-                <a:solidFill>
-                  <a:srgbClr val="0F172A"/>
-                </a:solidFill>
-                <a:latin typeface="Trebuchet MS" pitchFamily="34" charset="0"/>
-                <a:ea typeface="Trebuchet MS" pitchFamily="34" charset="-122"/>
-                <a:cs typeface="Trebuchet MS" pitchFamily="34" charset="-120"/>
-              </a:rPr>
-              <a:t>Inserimento attività online (form web)</a:t>
-            </a:r>
-            <a:endParaRPr lang="en-US" sz="1200" dirty="0"/>
-          </a:p>
-        </p:txBody>
-      </p:sp>
-      <p:sp>
-        <p:nvSpPr>
-          <p:cNvPr id="18" name="Text 16"/>
-          <p:cNvSpPr/>
-          <p:nvPr/>
-        </p:nvSpPr>
-        <p:spPr>
-          <a:xfrm>
-            <a:off x="1417320" y="2971800"/>
-            <a:ext cx="7223760" cy="274320"/>
-          </a:xfrm>
-          <a:prstGeom prst="rect">
-            <a:avLst/>
-          </a:prstGeom>
-          <a:noFill/>
-          <a:ln/>
-        </p:spPr>
-        <p:txBody>
-          <a:bodyPr wrap="square" lIns="0" tIns="0" rIns="0" bIns="0" rtlCol="0" anchor="t"/>
-          <a:lstStyle/>
-          <a:p>
-            <a:pPr indent="0" marL="0">
-              <a:buNone/>
-            </a:pPr>
-            <a:r>
-              <a:rPr lang="en-US" sz="950" dirty="0">
-                <a:solidFill>
-                  <a:srgbClr val="334155"/>
-                </a:solidFill>
-                <a:latin typeface="Calibri" pitchFamily="34" charset="0"/>
-                <a:ea typeface="Calibri" pitchFamily="34" charset="-122"/>
-                <a:cs typeface="Calibri" pitchFamily="34" charset="-120"/>
-              </a:rPr>
-              <a:t>Inserire una nuova attività di servizio direttamente dall'app, senza dover ripassare da MyLion ad ogni evento.</a:t>
-            </a:r>
-            <a:endParaRPr lang="en-US" sz="950" dirty="0"/>
-          </a:p>
-        </p:txBody>
-      </p:sp>
-      <p:sp>
-        <p:nvSpPr>
-          <p:cNvPr id="19" name="Shape 17"/>
-          <p:cNvSpPr/>
-          <p:nvPr/>
-        </p:nvSpPr>
-        <p:spPr>
-          <a:xfrm>
-            <a:off x="457200" y="3310128"/>
-            <a:ext cx="8229600" cy="566928"/>
-          </a:xfrm>
-          <a:prstGeom prst="roundRect">
-            <a:avLst>
-              <a:gd name="adj" fmla="val 16129"/>
-            </a:avLst>
-          </a:prstGeom>
-          <a:solidFill>
-            <a:srgbClr val="FFFFFF"/>
-          </a:solidFill>
-          <a:ln w="12700">
-            <a:solidFill>
-              <a:srgbClr val="E2E8F0"/>
-            </a:solidFill>
-            <a:prstDash val="solid"/>
-          </a:ln>
-          <a:effectLst>
-            <a:outerShdw sx="100000" sy="100000" kx="0" ky="0" algn="bl" rotWithShape="0" blurRad="101600" dist="25400" dir="5400000">
-              <a:srgbClr val="000000">
-                <a:alpha val="8000"/>
-              </a:srgbClr>
-            </a:outerShdw>
-          </a:effectLst>
-        </p:spPr>
-      </p:sp>
-      <p:sp>
-        <p:nvSpPr>
-          <p:cNvPr id="20" name="Shape 18"/>
-          <p:cNvSpPr/>
-          <p:nvPr/>
-        </p:nvSpPr>
-        <p:spPr>
-          <a:xfrm>
-            <a:off x="457200" y="3310128"/>
-            <a:ext cx="777240" cy="566928"/>
-          </a:xfrm>
-          <a:prstGeom prst="rect">
-            <a:avLst/>
-          </a:prstGeom>
-          <a:solidFill>
-            <a:srgbClr val="EA580C"/>
-          </a:solidFill>
-          <a:ln/>
-        </p:spPr>
-      </p:sp>
-      <p:sp>
-        <p:nvSpPr>
-          <p:cNvPr id="21" name="Text 19"/>
-          <p:cNvSpPr/>
-          <p:nvPr/>
-        </p:nvSpPr>
-        <p:spPr>
-          <a:xfrm>
-            <a:off x="457200" y="3310128"/>
-            <a:ext cx="777240" cy="566928"/>
-          </a:xfrm>
-          <a:prstGeom prst="rect">
-            <a:avLst/>
-          </a:prstGeom>
-          <a:noFill/>
-          <a:ln/>
-        </p:spPr>
-        <p:txBody>
-          <a:bodyPr wrap="square" lIns="0" tIns="0" rIns="0" bIns="0" rtlCol="0" anchor="ctr"/>
-          <a:lstStyle/>
-          <a:p>
-            <a:pPr algn="ctr" indent="0" marL="0">
-              <a:buNone/>
-            </a:pPr>
-            <a:r>
-              <a:rPr lang="en-US" sz="1000" b="1" dirty="0">
-                <a:solidFill>
-                  <a:srgbClr val="FFFFFF"/>
-                </a:solidFill>
-                <a:latin typeface="Calibri" pitchFamily="34" charset="0"/>
-                <a:ea typeface="Calibri" pitchFamily="34" charset="-122"/>
-                <a:cs typeface="Calibri" pitchFamily="34" charset="-120"/>
-              </a:rPr>
-              <a:t>MEDIA</a:t>
-            </a:r>
-            <a:endParaRPr lang="en-US" sz="1000" dirty="0"/>
-          </a:p>
-        </p:txBody>
-      </p:sp>
-      <p:sp>
-        <p:nvSpPr>
-          <p:cNvPr id="22" name="Text 20"/>
-          <p:cNvSpPr/>
-          <p:nvPr/>
-        </p:nvSpPr>
-        <p:spPr>
-          <a:xfrm>
-            <a:off x="1417320" y="3346704"/>
-            <a:ext cx="7223760" cy="274320"/>
-          </a:xfrm>
-          <a:prstGeom prst="rect">
-            <a:avLst/>
-          </a:prstGeom>
-          <a:noFill/>
-          <a:ln/>
-        </p:spPr>
-        <p:txBody>
-          <a:bodyPr wrap="square" lIns="0" tIns="0" rIns="0" bIns="0" rtlCol="0" anchor="ctr"/>
-          <a:lstStyle/>
-          <a:p>
-            <a:pPr indent="0" marL="0">
-              <a:buNone/>
-            </a:pPr>
-            <a:r>
-              <a:rPr lang="en-US" sz="1200" b="1" dirty="0">
-                <a:solidFill>
-                  <a:srgbClr val="0F172A"/>
-                </a:solidFill>
-                <a:latin typeface="Trebuchet MS" pitchFamily="34" charset="0"/>
-                <a:ea typeface="Trebuchet MS" pitchFamily="34" charset="-122"/>
-                <a:cs typeface="Trebuchet MS" pitchFamily="34" charset="-120"/>
-              </a:rPr>
-              <a:t>Notifiche email automatiche</a:t>
-            </a:r>
-            <a:endParaRPr lang="en-US" sz="1200" dirty="0"/>
-          </a:p>
-        </p:txBody>
-      </p:sp>
-      <p:sp>
-        <p:nvSpPr>
-          <p:cNvPr id="23" name="Text 21"/>
-          <p:cNvSpPr/>
-          <p:nvPr/>
-        </p:nvSpPr>
-        <p:spPr>
-          <a:xfrm>
-            <a:off x="1417320" y="3602736"/>
-            <a:ext cx="7223760" cy="274320"/>
-          </a:xfrm>
-          <a:prstGeom prst="rect">
-            <a:avLst/>
-          </a:prstGeom>
-          <a:noFill/>
-          <a:ln/>
-        </p:spPr>
-        <p:txBody>
-          <a:bodyPr wrap="square" lIns="0" tIns="0" rIns="0" bIns="0" rtlCol="0" anchor="t"/>
-          <a:lstStyle/>
-          <a:p>
-            <a:pPr indent="0" marL="0">
-              <a:buNone/>
-            </a:pPr>
-            <a:r>
-              <a:rPr lang="en-US" sz="950" dirty="0">
-                <a:solidFill>
-                  <a:srgbClr val="334155"/>
-                </a:solidFill>
-                <a:latin typeface="Calibri" pitchFamily="34" charset="0"/>
-                <a:ea typeface="Calibri" pitchFamily="34" charset="-122"/>
-                <a:cs typeface="Calibri" pitchFamily="34" charset="-120"/>
-              </a:rPr>
-              <a:t>Promemoria rendicontazione · club che non comunicano da 90 giorni · anniversari soci · scadenze incarichi.</a:t>
-            </a:r>
-            <a:endParaRPr lang="en-US" sz="950" dirty="0"/>
-          </a:p>
-        </p:txBody>
-      </p:sp>
-      <p:sp>
-        <p:nvSpPr>
-          <p:cNvPr id="24" name="Shape 22"/>
-          <p:cNvSpPr/>
-          <p:nvPr/>
-        </p:nvSpPr>
-        <p:spPr>
-          <a:xfrm>
-            <a:off x="457200" y="3941064"/>
-            <a:ext cx="8229600" cy="566928"/>
-          </a:xfrm>
-          <a:prstGeom prst="roundRect">
-            <a:avLst>
-              <a:gd name="adj" fmla="val 16129"/>
-            </a:avLst>
-          </a:prstGeom>
-          <a:solidFill>
-            <a:srgbClr val="FFFFFF"/>
-          </a:solidFill>
-          <a:ln w="12700">
-            <a:solidFill>
-              <a:srgbClr val="E2E8F0"/>
-            </a:solidFill>
-            <a:prstDash val="solid"/>
-          </a:ln>
-          <a:effectLst>
-            <a:outerShdw sx="100000" sy="100000" kx="0" ky="0" algn="bl" rotWithShape="0" blurRad="101600" dist="25400" dir="5400000">
-              <a:srgbClr val="000000">
-                <a:alpha val="8000"/>
-              </a:srgbClr>
-            </a:outerShdw>
-          </a:effectLst>
-        </p:spPr>
-      </p:sp>
-      <p:sp>
-        <p:nvSpPr>
-          <p:cNvPr id="25" name="Shape 23"/>
-          <p:cNvSpPr/>
-          <p:nvPr/>
-        </p:nvSpPr>
-        <p:spPr>
-          <a:xfrm>
-            <a:off x="457200" y="3941064"/>
-            <a:ext cx="777240" cy="566928"/>
-          </a:xfrm>
-          <a:prstGeom prst="rect">
-            <a:avLst/>
-          </a:prstGeom>
-          <a:solidFill>
-            <a:srgbClr val="059669"/>
-          </a:solidFill>
-          <a:ln/>
-        </p:spPr>
-      </p:sp>
-      <p:sp>
-        <p:nvSpPr>
-          <p:cNvPr id="26" name="Text 24"/>
-          <p:cNvSpPr/>
-          <p:nvPr/>
-        </p:nvSpPr>
-        <p:spPr>
-          <a:xfrm>
-            <a:off x="457200" y="3941064"/>
-            <a:ext cx="777240" cy="566928"/>
-          </a:xfrm>
-          <a:prstGeom prst="rect">
-            <a:avLst/>
-          </a:prstGeom>
-          <a:noFill/>
-          <a:ln/>
-        </p:spPr>
-        <p:txBody>
-          <a:bodyPr wrap="square" lIns="0" tIns="0" rIns="0" bIns="0" rtlCol="0" anchor="ctr"/>
-          <a:lstStyle/>
-          <a:p>
-            <a:pPr algn="ctr" indent="0" marL="0">
-              <a:buNone/>
-            </a:pPr>
-            <a:r>
-              <a:rPr lang="en-US" sz="1000" b="1" dirty="0">
-                <a:solidFill>
-                  <a:srgbClr val="FFFFFF"/>
-                </a:solidFill>
-                <a:latin typeface="Calibri" pitchFamily="34" charset="0"/>
-                <a:ea typeface="Calibri" pitchFamily="34" charset="-122"/>
-                <a:cs typeface="Calibri" pitchFamily="34" charset="-120"/>
-              </a:rPr>
-              <a:t>BASSA</a:t>
-            </a:r>
-            <a:endParaRPr lang="en-US" sz="1000" dirty="0"/>
-          </a:p>
-        </p:txBody>
-      </p:sp>
-      <p:sp>
-        <p:nvSpPr>
-          <p:cNvPr id="27" name="Text 25"/>
-          <p:cNvSpPr/>
-          <p:nvPr/>
-        </p:nvSpPr>
-        <p:spPr>
-          <a:xfrm>
-            <a:off x="1417320" y="3977640"/>
-            <a:ext cx="7223760" cy="274320"/>
-          </a:xfrm>
-          <a:prstGeom prst="rect">
-            <a:avLst/>
-          </a:prstGeom>
-          <a:noFill/>
-          <a:ln/>
-        </p:spPr>
-        <p:txBody>
-          <a:bodyPr wrap="square" lIns="0" tIns="0" rIns="0" bIns="0" rtlCol="0" anchor="ctr"/>
-          <a:lstStyle/>
-          <a:p>
-            <a:pPr indent="0" marL="0">
-              <a:buNone/>
-            </a:pPr>
-            <a:r>
-              <a:rPr lang="en-US" sz="1200" b="1" dirty="0">
-                <a:solidFill>
-                  <a:srgbClr val="0F172A"/>
-                </a:solidFill>
-                <a:latin typeface="Trebuchet MS" pitchFamily="34" charset="0"/>
-                <a:ea typeface="Trebuchet MS" pitchFamily="34" charset="-122"/>
-                <a:cs typeface="Trebuchet MS" pitchFamily="34" charset="-120"/>
-              </a:rPr>
-              <a:t>Export Excel (.xlsx) dalle tabelle</a:t>
-            </a:r>
-            <a:endParaRPr lang="en-US" sz="1200" dirty="0"/>
-          </a:p>
-        </p:txBody>
-      </p:sp>
-      <p:sp>
-        <p:nvSpPr>
-          <p:cNvPr id="28" name="Text 26"/>
-          <p:cNvSpPr/>
-          <p:nvPr/>
-        </p:nvSpPr>
-        <p:spPr>
-          <a:xfrm>
-            <a:off x="1417320" y="4233672"/>
-            <a:ext cx="7223760" cy="274320"/>
-          </a:xfrm>
-          <a:prstGeom prst="rect">
-            <a:avLst/>
-          </a:prstGeom>
-          <a:noFill/>
-          <a:ln/>
-        </p:spPr>
-        <p:txBody>
-          <a:bodyPr wrap="square" lIns="0" tIns="0" rIns="0" bIns="0" rtlCol="0" anchor="t"/>
-          <a:lstStyle/>
-          <a:p>
-            <a:pPr indent="0" marL="0">
-              <a:buNone/>
-            </a:pPr>
-            <a:r>
-              <a:rPr lang="en-US" sz="950" dirty="0">
-                <a:solidFill>
-                  <a:srgbClr val="334155"/>
-                </a:solidFill>
-                <a:latin typeface="Calibri" pitchFamily="34" charset="0"/>
-                <a:ea typeface="Calibri" pitchFamily="34" charset="-122"/>
-                <a:cs typeface="Calibri" pitchFamily="34" charset="-120"/>
-              </a:rPr>
-              <a:t>Pulsante "Esporta" su ogni tabella per chi vuole continuare ad elaborare dati offline.</a:t>
-            </a:r>
-            <a:endParaRPr lang="en-US" sz="950" dirty="0"/>
-          </a:p>
-        </p:txBody>
-      </p:sp>
-      <p:sp>
-        <p:nvSpPr>
-          <p:cNvPr id="29" name="Text 27"/>
-          <p:cNvSpPr/>
-          <p:nvPr/>
-        </p:nvSpPr>
-        <p:spPr>
-          <a:xfrm>
-            <a:off x="457200" y="4864608"/>
-            <a:ext cx="6400800" cy="201168"/>
-          </a:xfrm>
-          <a:prstGeom prst="rect">
-            <a:avLst/>
-          </a:prstGeom>
-          <a:noFill/>
-          <a:ln/>
-        </p:spPr>
-        <p:txBody>
-          <a:bodyPr wrap="square" rtlCol="0" anchor="ctr"/>
-          <a:lstStyle/>
-          <a:p>
-            <a:pPr indent="0" marL="0">
-              <a:buNone/>
-            </a:pPr>
-            <a:r>
-              <a:rPr lang="en-US" sz="900" i="1" dirty="0">
-                <a:solidFill>
-                  <a:srgbClr val="64748B"/>
-                </a:solidFill>
-                <a:latin typeface="Calibri" pitchFamily="34" charset="0"/>
-                <a:ea typeface="Calibri" pitchFamily="34" charset="-122"/>
-                <a:cs typeface="Calibri" pitchFamily="34" charset="-120"/>
-              </a:rPr>
-              <a:t>Digitalions · digitalions108la.it · Distretto Lions 108 LA</a:t>
-            </a:r>
-            <a:endParaRPr lang="en-US" sz="900" dirty="0"/>
-          </a:p>
-        </p:txBody>
-      </p:sp>
-      <p:sp>
-        <p:nvSpPr>
-          <p:cNvPr id="30" name="Text 28"/>
           <p:cNvSpPr/>
           <p:nvPr/>
         </p:nvSpPr>
@@ -7659,13 +7659,13 @@
             <a:r>
               <a:rPr lang="en-US" sz="2600" b="1" dirty="0">
                 <a:solidFill>
-                  <a:srgbClr val="F5B606"/>
+                  <a:srgbClr val="0055FF"/>
                 </a:solidFill>
                 <a:latin typeface="Trebuchet MS" pitchFamily="34" charset="0"/>
                 <a:ea typeface="Trebuchet MS" pitchFamily="34" charset="-122"/>
                 <a:cs typeface="Trebuchet MS" pitchFamily="34" charset="-120"/>
               </a:rPr>
-              <a:t>2 · Dati che servono da LCI / Multidistretto</a:t>
+              <a:t>1 · Feature da sviluppare</a:t>
             </a:r>
             <a:endParaRPr lang="en-US" sz="2600" dirty="0"/>
           </a:p>
@@ -7704,7 +7704,7 @@
                 <a:ea typeface="Calibri" pitchFamily="34" charset="-122"/>
                 <a:cs typeface="Calibri" pitchFamily="34" charset="-120"/>
               </a:rPr>
-              <a:t>Il CSV soci che riceviamo oggi non ha le "date di uscita". Risultato: vediamo chi c'è, non chi se ne è andato.</a:t>
+              <a:t>Priorizzate per impatto. Ciascuna è autonoma e rilasciabile in modo incrementale.</a:t>
             </a:r>
             <a:endParaRPr lang="en-US" sz="1300" dirty="0"/>
           </a:p>
@@ -7719,314 +7719,11 @@
         <p:spPr>
           <a:xfrm>
             <a:off x="457200" y="1417320"/>
-            <a:ext cx="4023360" cy="777240"/>
+            <a:ext cx="8229600" cy="566928"/>
           </a:xfrm>
           <a:prstGeom prst="roundRect">
             <a:avLst>
-              <a:gd name="adj" fmla="val 11765"/>
-            </a:avLst>
-          </a:prstGeom>
-          <a:solidFill>
-            <a:srgbClr val="FFFFFF"/>
-          </a:solidFill>
-          <a:ln w="12700">
-            <a:solidFill>
-              <a:srgbClr val="059669"/>
-            </a:solidFill>
-            <a:prstDash val="solid"/>
-          </a:ln>
-          <a:effectLst>
-            <a:outerShdw sx="100000" sy="100000" kx="0" ky="0" algn="bl" rotWithShape="0" blurRad="101600" dist="25400" dir="5400000">
-              <a:srgbClr val="000000">
-                <a:alpha val="8000"/>
-              </a:srgbClr>
-            </a:outerShdw>
-          </a:effectLst>
-        </p:spPr>
-      </p:sp>
-      <p:sp>
-        <p:nvSpPr>
-          <p:cNvPr id="5" name="Shape 3"/>
-          <p:cNvSpPr/>
-          <p:nvPr/>
-        </p:nvSpPr>
-        <p:spPr>
-          <a:xfrm>
-            <a:off x="457200" y="1417320"/>
-            <a:ext cx="109728" cy="777240"/>
-          </a:xfrm>
-          <a:prstGeom prst="rect">
-            <a:avLst/>
-          </a:prstGeom>
-          <a:solidFill>
-            <a:srgbClr val="059669"/>
-          </a:solidFill>
-          <a:ln/>
-        </p:spPr>
-      </p:sp>
-      <p:sp>
-        <p:nvSpPr>
-          <p:cNvPr id="6" name="Text 4"/>
-          <p:cNvSpPr/>
-          <p:nvPr/>
-        </p:nvSpPr>
-        <p:spPr>
-          <a:xfrm>
-            <a:off x="685800" y="1463040"/>
-            <a:ext cx="3657600" cy="228600"/>
-          </a:xfrm>
-          <a:prstGeom prst="rect">
-            <a:avLst/>
-          </a:prstGeom>
-          <a:noFill/>
-          <a:ln/>
-        </p:spPr>
-        <p:txBody>
-          <a:bodyPr wrap="square" lIns="0" tIns="0" rIns="0" bIns="0" rtlCol="0" anchor="ctr"/>
-          <a:lstStyle/>
-          <a:p>
-            <a:pPr indent="0" marL="0">
-              <a:buNone/>
-            </a:pPr>
-            <a:r>
-              <a:rPr lang="en-US" sz="900" b="1" spc="150" kern="0" dirty="0">
-                <a:solidFill>
-                  <a:srgbClr val="059669"/>
-                </a:solidFill>
-                <a:latin typeface="Calibri" pitchFamily="34" charset="0"/>
-                <a:ea typeface="Calibri" pitchFamily="34" charset="-122"/>
-                <a:cs typeface="Calibri" pitchFamily="34" charset="-120"/>
-              </a:rPr>
-              <a:t>✓  COSA ABBIAMO</a:t>
-            </a:r>
-            <a:endParaRPr lang="en-US" sz="900" dirty="0"/>
-          </a:p>
-        </p:txBody>
-      </p:sp>
-      <p:sp>
-        <p:nvSpPr>
-          <p:cNvPr id="7" name="Text 5"/>
-          <p:cNvSpPr/>
-          <p:nvPr/>
-        </p:nvSpPr>
-        <p:spPr>
-          <a:xfrm>
-            <a:off x="685800" y="1691640"/>
-            <a:ext cx="3657600" cy="502920"/>
-          </a:xfrm>
-          <a:prstGeom prst="rect">
-            <a:avLst/>
-          </a:prstGeom>
-          <a:noFill/>
-          <a:ln/>
-        </p:spPr>
-        <p:txBody>
-          <a:bodyPr wrap="square" lIns="0" tIns="0" rIns="0" bIns="0" rtlCol="0" anchor="t"/>
-          <a:lstStyle/>
-          <a:p>
-            <a:pPr indent="0" marL="0">
-              <a:buNone/>
-            </a:pPr>
-            <a:r>
-              <a:rPr lang="en-US" sz="1000" dirty="0">
-                <a:solidFill>
-                  <a:srgbClr val="334155"/>
-                </a:solidFill>
-                <a:latin typeface="Calibri" pitchFamily="34" charset="0"/>
-                <a:ea typeface="Calibri" pitchFamily="34" charset="-122"/>
-                <a:cs typeface="Calibri" pitchFamily="34" charset="-120"/>
-              </a:rPr>
-              <a:t>Soci attualmente attivi (2.966) · data ingresso di ciascuno · 138 nuovi soci nell'anno calcolato</a:t>
-            </a:r>
-            <a:endParaRPr lang="en-US" sz="1000" dirty="0"/>
-          </a:p>
-        </p:txBody>
-      </p:sp>
-      <p:sp>
-        <p:nvSpPr>
-          <p:cNvPr id="8" name="Shape 6"/>
-          <p:cNvSpPr/>
-          <p:nvPr/>
-        </p:nvSpPr>
-        <p:spPr>
-          <a:xfrm>
-            <a:off x="4663440" y="1417320"/>
-            <a:ext cx="4023360" cy="777240"/>
-          </a:xfrm>
-          <a:prstGeom prst="roundRect">
-            <a:avLst>
-              <a:gd name="adj" fmla="val 11765"/>
-            </a:avLst>
-          </a:prstGeom>
-          <a:solidFill>
-            <a:srgbClr val="FFFFFF"/>
-          </a:solidFill>
-          <a:ln w="12700">
-            <a:solidFill>
-              <a:srgbClr val="DC2626"/>
-            </a:solidFill>
-            <a:prstDash val="solid"/>
-          </a:ln>
-          <a:effectLst>
-            <a:outerShdw sx="100000" sy="100000" kx="0" ky="0" algn="bl" rotWithShape="0" blurRad="101600" dist="25400" dir="5400000">
-              <a:srgbClr val="000000">
-                <a:alpha val="8000"/>
-              </a:srgbClr>
-            </a:outerShdw>
-          </a:effectLst>
-        </p:spPr>
-      </p:sp>
-      <p:sp>
-        <p:nvSpPr>
-          <p:cNvPr id="9" name="Shape 7"/>
-          <p:cNvSpPr/>
-          <p:nvPr/>
-        </p:nvSpPr>
-        <p:spPr>
-          <a:xfrm>
-            <a:off x="4663440" y="1417320"/>
-            <a:ext cx="109728" cy="777240"/>
-          </a:xfrm>
-          <a:prstGeom prst="rect">
-            <a:avLst/>
-          </a:prstGeom>
-          <a:solidFill>
-            <a:srgbClr val="DC2626"/>
-          </a:solidFill>
-          <a:ln/>
-        </p:spPr>
-      </p:sp>
-      <p:sp>
-        <p:nvSpPr>
-          <p:cNvPr id="10" name="Text 8"/>
-          <p:cNvSpPr/>
-          <p:nvPr/>
-        </p:nvSpPr>
-        <p:spPr>
-          <a:xfrm>
-            <a:off x="4892040" y="1463040"/>
-            <a:ext cx="3657600" cy="228600"/>
-          </a:xfrm>
-          <a:prstGeom prst="rect">
-            <a:avLst/>
-          </a:prstGeom>
-          <a:noFill/>
-          <a:ln/>
-        </p:spPr>
-        <p:txBody>
-          <a:bodyPr wrap="square" lIns="0" tIns="0" rIns="0" bIns="0" rtlCol="0" anchor="ctr"/>
-          <a:lstStyle/>
-          <a:p>
-            <a:pPr indent="0" marL="0">
-              <a:buNone/>
-            </a:pPr>
-            <a:r>
-              <a:rPr lang="en-US" sz="900" b="1" spc="150" kern="0" dirty="0">
-                <a:solidFill>
-                  <a:srgbClr val="DC2626"/>
-                </a:solidFill>
-                <a:latin typeface="Calibri" pitchFamily="34" charset="0"/>
-                <a:ea typeface="Calibri" pitchFamily="34" charset="-122"/>
-                <a:cs typeface="Calibri" pitchFamily="34" charset="-120"/>
-              </a:rPr>
-              <a:t>✗  COSA MANCA</a:t>
-            </a:r>
-            <a:endParaRPr lang="en-US" sz="900" dirty="0"/>
-          </a:p>
-        </p:txBody>
-      </p:sp>
-      <p:sp>
-        <p:nvSpPr>
-          <p:cNvPr id="11" name="Text 9"/>
-          <p:cNvSpPr/>
-          <p:nvPr/>
-        </p:nvSpPr>
-        <p:spPr>
-          <a:xfrm>
-            <a:off x="4892040" y="1691640"/>
-            <a:ext cx="3657600" cy="502920"/>
-          </a:xfrm>
-          <a:prstGeom prst="rect">
-            <a:avLst/>
-          </a:prstGeom>
-          <a:noFill/>
-          <a:ln/>
-        </p:spPr>
-        <p:txBody>
-          <a:bodyPr wrap="square" lIns="0" tIns="0" rIns="0" bIns="0" rtlCol="0" anchor="t"/>
-          <a:lstStyle/>
-          <a:p>
-            <a:pPr indent="0" marL="0">
-              <a:buNone/>
-            </a:pPr>
-            <a:r>
-              <a:rPr lang="en-US" sz="1000" dirty="0">
-                <a:solidFill>
-                  <a:srgbClr val="334155"/>
-                </a:solidFill>
-                <a:latin typeface="Calibri" pitchFamily="34" charset="0"/>
-                <a:ea typeface="Calibri" pitchFamily="34" charset="-122"/>
-                <a:cs typeface="Calibri" pitchFamily="34" charset="-120"/>
-              </a:rPr>
-              <a:t>Date di uscita dei soci · stato storico dei club (nuovi, chiusi, riorganizzati, sospesi)</a:t>
-            </a:r>
-            <a:endParaRPr lang="en-US" sz="1000" dirty="0"/>
-          </a:p>
-        </p:txBody>
-      </p:sp>
-      <p:sp>
-        <p:nvSpPr>
-          <p:cNvPr id="12" name="Text 10"/>
-          <p:cNvSpPr/>
-          <p:nvPr/>
-        </p:nvSpPr>
-        <p:spPr>
-          <a:xfrm>
-            <a:off x="457200" y="2331720"/>
-            <a:ext cx="8229600" cy="274320"/>
-          </a:xfrm>
-          <a:prstGeom prst="rect">
-            <a:avLst/>
-          </a:prstGeom>
-          <a:noFill/>
-          <a:ln/>
-        </p:spPr>
-        <p:txBody>
-          <a:bodyPr wrap="square" lIns="0" tIns="0" rIns="0" bIns="0" rtlCol="0" anchor="ctr"/>
-          <a:lstStyle/>
-          <a:p>
-            <a:pPr indent="0" marL="0">
-              <a:buNone/>
-            </a:pPr>
-            <a:r>
-              <a:rPr lang="en-US" sz="1300" b="1" dirty="0">
-                <a:solidFill>
-                  <a:srgbClr val="0F172A"/>
-                </a:solidFill>
-                <a:latin typeface="Trebuchet MS" pitchFamily="34" charset="0"/>
-                <a:ea typeface="Trebuchet MS" pitchFamily="34" charset="-122"/>
-                <a:cs typeface="Trebuchet MS" pitchFamily="34" charset="-120"/>
-              </a:rPr>
-              <a:t>Due richieste a LCI / Multidistretto · in ordine di priorità</a:t>
-            </a:r>
-            <a:endParaRPr lang="en-US" sz="1300" dirty="0"/>
-          </a:p>
-        </p:txBody>
-      </p:sp>
-      <p:sp>
-        <p:nvSpPr>
-          <p:cNvPr id="13" name="Shape 11"/>
-          <p:cNvSpPr/>
-          <p:nvPr/>
-        </p:nvSpPr>
-        <p:spPr>
-          <a:xfrm>
-            <a:off x="457200" y="2697480"/>
-            <a:ext cx="8229600" cy="914400"/>
-          </a:xfrm>
-          <a:prstGeom prst="roundRect">
-            <a:avLst>
-              <a:gd name="adj" fmla="val 10000"/>
+              <a:gd name="adj" fmla="val 16129"/>
             </a:avLst>
           </a:prstGeom>
           <a:solidFill>
@@ -8049,34 +7746,34 @@
       </p:sp>
       <p:sp>
         <p:nvSpPr>
-          <p:cNvPr id="14" name="Shape 12"/>
-          <p:cNvSpPr/>
-          <p:nvPr/>
-        </p:nvSpPr>
-        <p:spPr>
-          <a:xfrm>
-            <a:off x="594360" y="2971800"/>
-            <a:ext cx="365760" cy="365760"/>
-          </a:xfrm>
-          <a:prstGeom prst="ellipse">
+          <p:cNvPr id="5" name="Shape 3"/>
+          <p:cNvSpPr/>
+          <p:nvPr/>
+        </p:nvSpPr>
+        <p:spPr>
+          <a:xfrm>
+            <a:off x="457200" y="1417320"/>
+            <a:ext cx="777240" cy="566928"/>
+          </a:xfrm>
+          <a:prstGeom prst="rect">
             <a:avLst/>
           </a:prstGeom>
           <a:solidFill>
-            <a:srgbClr val="7C3AED"/>
+            <a:srgbClr val="DC2626"/>
           </a:solidFill>
           <a:ln/>
         </p:spPr>
       </p:sp>
       <p:sp>
         <p:nvSpPr>
-          <p:cNvPr id="15" name="Text 13"/>
-          <p:cNvSpPr/>
-          <p:nvPr/>
-        </p:nvSpPr>
-        <p:spPr>
-          <a:xfrm>
-            <a:off x="594360" y="2971800"/>
-            <a:ext cx="365760" cy="365760"/>
+          <p:cNvPr id="6" name="Text 4"/>
+          <p:cNvSpPr/>
+          <p:nvPr/>
+        </p:nvSpPr>
+        <p:spPr>
+          <a:xfrm>
+            <a:off x="457200" y="1417320"/>
+            <a:ext cx="777240" cy="566928"/>
           </a:xfrm>
           <a:prstGeom prst="rect">
             <a:avLst/>
@@ -8092,249 +7789,93 @@
               <a:buNone/>
             </a:pPr>
             <a:r>
-              <a:rPr lang="en-US" sz="1800" b="1" dirty="0">
+              <a:rPr lang="en-US" sz="1000" b="1" dirty="0">
                 <a:solidFill>
                   <a:srgbClr val="FFFFFF"/>
+                </a:solidFill>
+                <a:latin typeface="Calibri" pitchFamily="34" charset="0"/>
+                <a:ea typeface="Calibri" pitchFamily="34" charset="-122"/>
+                <a:cs typeface="Calibri" pitchFamily="34" charset="-120"/>
+              </a:rPr>
+              <a:t>ALTA</a:t>
+            </a:r>
+            <a:endParaRPr lang="en-US" sz="1000" dirty="0"/>
+          </a:p>
+        </p:txBody>
+      </p:sp>
+      <p:sp>
+        <p:nvSpPr>
+          <p:cNvPr id="7" name="Text 5"/>
+          <p:cNvSpPr/>
+          <p:nvPr/>
+        </p:nvSpPr>
+        <p:spPr>
+          <a:xfrm>
+            <a:off x="1417320" y="1453896"/>
+            <a:ext cx="7223760" cy="274320"/>
+          </a:xfrm>
+          <a:prstGeom prst="rect">
+            <a:avLst/>
+          </a:prstGeom>
+          <a:noFill/>
+          <a:ln/>
+        </p:spPr>
+        <p:txBody>
+          <a:bodyPr wrap="square" lIns="0" tIns="0" rIns="0" bIns="0" rtlCol="0" anchor="ctr"/>
+          <a:lstStyle/>
+          <a:p>
+            <a:pPr indent="0" marL="0">
+              <a:buNone/>
+            </a:pPr>
+            <a:r>
+              <a:rPr lang="en-US" sz="1200" b="1" dirty="0">
+                <a:solidFill>
+                  <a:srgbClr val="0F172A"/>
                 </a:solidFill>
                 <a:latin typeface="Trebuchet MS" pitchFamily="34" charset="0"/>
                 <a:ea typeface="Trebuchet MS" pitchFamily="34" charset="-122"/>
                 <a:cs typeface="Trebuchet MS" pitchFamily="34" charset="-120"/>
               </a:rPr>
-              <a:t>1</a:t>
-            </a:r>
-            <a:endParaRPr lang="en-US" sz="1800" dirty="0"/>
-          </a:p>
-        </p:txBody>
-      </p:sp>
-      <p:sp>
-        <p:nvSpPr>
-          <p:cNvPr id="16" name="Text 14"/>
-          <p:cNvSpPr/>
-          <p:nvPr/>
-        </p:nvSpPr>
-        <p:spPr>
-          <a:xfrm>
-            <a:off x="1143000" y="2788920"/>
-            <a:ext cx="4572000" cy="274320"/>
-          </a:xfrm>
-          <a:prstGeom prst="rect">
-            <a:avLst/>
-          </a:prstGeom>
-          <a:noFill/>
-          <a:ln/>
-        </p:spPr>
-        <p:txBody>
-          <a:bodyPr wrap="square" lIns="0" tIns="0" rIns="0" bIns="0" rtlCol="0" anchor="ctr"/>
+              <a:t>Login con ruoli</a:t>
+            </a:r>
+            <a:endParaRPr lang="en-US" sz="1200" dirty="0"/>
+          </a:p>
+        </p:txBody>
+      </p:sp>
+      <p:sp>
+        <p:nvSpPr>
+          <p:cNvPr id="8" name="Text 6"/>
+          <p:cNvSpPr/>
+          <p:nvPr/>
+        </p:nvSpPr>
+        <p:spPr>
+          <a:xfrm>
+            <a:off x="1417320" y="1709928"/>
+            <a:ext cx="7223760" cy="274320"/>
+          </a:xfrm>
+          <a:prstGeom prst="rect">
+            <a:avLst/>
+          </a:prstGeom>
+          <a:noFill/>
+          <a:ln/>
+        </p:spPr>
+        <p:txBody>
+          <a:bodyPr wrap="square" lIns="0" tIns="0" rIns="0" bIns="0" rtlCol="0" anchor="t"/>
           <a:lstStyle/>
           <a:p>
             <a:pPr indent="0" marL="0">
               <a:buNone/>
             </a:pPr>
             <a:r>
-              <a:rPr lang="en-US" sz="1200" b="1" dirty="0">
-                <a:solidFill>
-                  <a:srgbClr val="0F172A"/>
-                </a:solidFill>
-                <a:latin typeface="Trebuchet MS" pitchFamily="34" charset="0"/>
-                <a:ea typeface="Trebuchet MS" pitchFamily="34" charset="-122"/>
-                <a:cs typeface="Trebuchet MS" pitchFamily="34" charset="-120"/>
-              </a:rPr>
-              <a:t>Elenco dei soci usciti nell'anno</a:t>
-            </a:r>
-            <a:endParaRPr lang="en-US" sz="1200" dirty="0"/>
-          </a:p>
-        </p:txBody>
-      </p:sp>
-      <p:sp>
-        <p:nvSpPr>
-          <p:cNvPr id="17" name="Text 15"/>
-          <p:cNvSpPr/>
-          <p:nvPr/>
-        </p:nvSpPr>
-        <p:spPr>
-          <a:xfrm>
-            <a:off x="5760720" y="2788920"/>
-            <a:ext cx="2743200" cy="274320"/>
-          </a:xfrm>
-          <a:prstGeom prst="rect">
-            <a:avLst/>
-          </a:prstGeom>
-          <a:noFill/>
-          <a:ln/>
-        </p:spPr>
-        <p:txBody>
-          <a:bodyPr wrap="square" lIns="0" tIns="0" rIns="0" bIns="0" rtlCol="0" anchor="ctr"/>
-          <a:lstStyle/>
-          <a:p>
-            <a:pPr algn="r" indent="0" marL="0">
-              <a:buNone/>
-            </a:pPr>
-            <a:r>
-              <a:rPr lang="en-US" sz="1000" b="1" i="1" dirty="0">
-                <a:solidFill>
-                  <a:srgbClr val="7C3AED"/>
-                </a:solidFill>
-                <a:latin typeface="Consolas" pitchFamily="34" charset="0"/>
-                <a:ea typeface="Consolas" pitchFamily="34" charset="-122"/>
-                <a:cs typeface="Consolas" pitchFamily="34" charset="-120"/>
-              </a:rPr>
-              <a:t>members_exits.csv</a:t>
-            </a:r>
-            <a:endParaRPr lang="en-US" sz="1000" dirty="0"/>
-          </a:p>
-        </p:txBody>
-      </p:sp>
-      <p:sp>
-        <p:nvSpPr>
-          <p:cNvPr id="18" name="Text 16"/>
-          <p:cNvSpPr/>
-          <p:nvPr/>
-        </p:nvSpPr>
-        <p:spPr>
-          <a:xfrm>
-            <a:off x="1143000" y="3090672"/>
-            <a:ext cx="1097280" cy="228600"/>
-          </a:xfrm>
-          <a:prstGeom prst="rect">
-            <a:avLst/>
-          </a:prstGeom>
-          <a:noFill/>
-          <a:ln/>
-        </p:spPr>
-        <p:txBody>
-          <a:bodyPr wrap="square" lIns="0" tIns="0" rIns="0" bIns="0" rtlCol="0" anchor="ctr"/>
-          <a:lstStyle/>
-          <a:p>
-            <a:pPr indent="0" marL="0">
-              <a:buNone/>
-            </a:pPr>
-            <a:r>
-              <a:rPr lang="en-US" sz="900" b="1" dirty="0">
-                <a:solidFill>
-                  <a:srgbClr val="64748B"/>
+              <a:rPr lang="en-US" sz="950" dirty="0">
+                <a:solidFill>
+                  <a:srgbClr val="334155"/>
                 </a:solidFill>
                 <a:latin typeface="Calibri" pitchFamily="34" charset="0"/>
                 <a:ea typeface="Calibri" pitchFamily="34" charset="-122"/>
                 <a:cs typeface="Calibri" pitchFamily="34" charset="-120"/>
               </a:rPr>
-              <a:t>Esempio riga: </a:t>
-            </a:r>
-            <a:endParaRPr lang="en-US" sz="900" dirty="0"/>
-          </a:p>
-        </p:txBody>
-      </p:sp>
-      <p:sp>
-        <p:nvSpPr>
-          <p:cNvPr id="19" name="Text 17"/>
-          <p:cNvSpPr/>
-          <p:nvPr/>
-        </p:nvSpPr>
-        <p:spPr>
-          <a:xfrm>
-            <a:off x="2194560" y="3090672"/>
-            <a:ext cx="6309360" cy="228600"/>
-          </a:xfrm>
-          <a:prstGeom prst="rect">
-            <a:avLst/>
-          </a:prstGeom>
-          <a:noFill/>
-          <a:ln/>
-        </p:spPr>
-        <p:txBody>
-          <a:bodyPr wrap="square" lIns="0" tIns="0" rIns="0" bIns="0" rtlCol="0" anchor="ctr"/>
-          <a:lstStyle/>
-          <a:p>
-            <a:pPr indent="0" marL="0">
-              <a:buNone/>
-            </a:pPr>
-            <a:r>
-              <a:rPr lang="en-US" sz="900" i="1" dirty="0">
-                <a:solidFill>
-                  <a:srgbClr val="334155"/>
-                </a:solidFill>
-                <a:latin typeface="Consolas" pitchFamily="34" charset="0"/>
-                <a:ea typeface="Consolas" pitchFamily="34" charset="-122"/>
-                <a:cs typeface="Consolas" pitchFamily="34" charset="-120"/>
-              </a:rPr>
-              <a:t>Mario Rossi · matr. 401929 · uscito 12/03/2026 · motivo: Dimissioni</a:t>
-            </a:r>
-            <a:endParaRPr lang="en-US" sz="900" dirty="0"/>
-          </a:p>
-        </p:txBody>
-      </p:sp>
-      <p:sp>
-        <p:nvSpPr>
-          <p:cNvPr id="20" name="Text 18"/>
-          <p:cNvSpPr/>
-          <p:nvPr/>
-        </p:nvSpPr>
-        <p:spPr>
-          <a:xfrm>
-            <a:off x="1143000" y="3319272"/>
-            <a:ext cx="731520" cy="228600"/>
-          </a:xfrm>
-          <a:prstGeom prst="rect">
-            <a:avLst/>
-          </a:prstGeom>
-          <a:noFill/>
-          <a:ln/>
-        </p:spPr>
-        <p:txBody>
-          <a:bodyPr wrap="square" lIns="0" tIns="0" rIns="0" bIns="0" rtlCol="0" anchor="ctr"/>
-          <a:lstStyle/>
-          <a:p>
-            <a:pPr indent="0" marL="0">
-              <a:buNone/>
-            </a:pPr>
-            <a:r>
-              <a:rPr lang="en-US" sz="900" b="1" dirty="0">
-                <a:solidFill>
-                  <a:srgbClr val="64748B"/>
-                </a:solidFill>
-                <a:latin typeface="Calibri" pitchFamily="34" charset="0"/>
-                <a:ea typeface="Calibri" pitchFamily="34" charset="-122"/>
-                <a:cs typeface="Calibri" pitchFamily="34" charset="-120"/>
-              </a:rPr>
-              <a:t>Sblocca: </a:t>
-            </a:r>
-            <a:endParaRPr lang="en-US" sz="900" dirty="0"/>
-          </a:p>
-        </p:txBody>
-      </p:sp>
-      <p:sp>
-        <p:nvSpPr>
-          <p:cNvPr id="21" name="Text 19"/>
-          <p:cNvSpPr/>
-          <p:nvPr/>
-        </p:nvSpPr>
-        <p:spPr>
-          <a:xfrm>
-            <a:off x="1874520" y="3319272"/>
-            <a:ext cx="6675120" cy="228600"/>
-          </a:xfrm>
-          <a:prstGeom prst="rect">
-            <a:avLst/>
-          </a:prstGeom>
-          <a:noFill/>
-          <a:ln/>
-        </p:spPr>
-        <p:txBody>
-          <a:bodyPr wrap="square" lIns="0" tIns="0" rIns="0" bIns="0" rtlCol="0" anchor="ctr"/>
-          <a:lstStyle/>
-          <a:p>
-            <a:pPr indent="0" marL="0">
-              <a:buNone/>
-            </a:pPr>
-            <a:r>
-              <a:rPr lang="en-US" sz="950" b="1" dirty="0">
-                <a:solidFill>
-                  <a:srgbClr val="7C3AED"/>
-                </a:solidFill>
-                <a:latin typeface="Calibri" pitchFamily="34" charset="0"/>
-                <a:ea typeface="Calibri" pitchFamily="34" charset="-122"/>
-                <a:cs typeface="Calibri" pitchFamily="34" charset="-120"/>
-              </a:rPr>
-              <a:t>Soci usciti · Crescita netta · Crescita % (cioè il bilancio annuale soci)</a:t>
+              <a:t>Tre livelli di accesso: Socio (vede sé stesso), Officer di Club (modifica il proprio club), Distretto (vede tutto). Sblocca anche la privacy: dati personali nascosti ai non autorizzati.</a:t>
             </a:r>
             <a:endParaRPr lang="en-US" sz="950" dirty="0"/>
           </a:p>
@@ -8342,18 +7883,18 @@
       </p:sp>
       <p:sp>
         <p:nvSpPr>
-          <p:cNvPr id="22" name="Shape 20"/>
-          <p:cNvSpPr/>
-          <p:nvPr/>
-        </p:nvSpPr>
-        <p:spPr>
-          <a:xfrm>
-            <a:off x="457200" y="3657600"/>
-            <a:ext cx="8229600" cy="914400"/>
+          <p:cNvPr id="9" name="Shape 7"/>
+          <p:cNvSpPr/>
+          <p:nvPr/>
+        </p:nvSpPr>
+        <p:spPr>
+          <a:xfrm>
+            <a:off x="457200" y="2048256"/>
+            <a:ext cx="8229600" cy="566928"/>
           </a:xfrm>
           <a:prstGeom prst="roundRect">
             <a:avLst>
-              <a:gd name="adj" fmla="val 10000"/>
+              <a:gd name="adj" fmla="val 16129"/>
             </a:avLst>
           </a:prstGeom>
           <a:solidFill>
@@ -8376,34 +7917,34 @@
       </p:sp>
       <p:sp>
         <p:nvSpPr>
-          <p:cNvPr id="23" name="Shape 21"/>
-          <p:cNvSpPr/>
-          <p:nvPr/>
-        </p:nvSpPr>
-        <p:spPr>
-          <a:xfrm>
-            <a:off x="594360" y="3931920"/>
-            <a:ext cx="365760" cy="365760"/>
-          </a:xfrm>
-          <a:prstGeom prst="ellipse">
+          <p:cNvPr id="10" name="Shape 8"/>
+          <p:cNvSpPr/>
+          <p:nvPr/>
+        </p:nvSpPr>
+        <p:spPr>
+          <a:xfrm>
+            <a:off x="457200" y="2048256"/>
+            <a:ext cx="777240" cy="566928"/>
+          </a:xfrm>
+          <a:prstGeom prst="rect">
             <a:avLst/>
           </a:prstGeom>
           <a:solidFill>
-            <a:srgbClr val="0055FF"/>
+            <a:srgbClr val="DC2626"/>
           </a:solidFill>
           <a:ln/>
         </p:spPr>
       </p:sp>
       <p:sp>
         <p:nvSpPr>
-          <p:cNvPr id="24" name="Text 22"/>
-          <p:cNvSpPr/>
-          <p:nvPr/>
-        </p:nvSpPr>
-        <p:spPr>
-          <a:xfrm>
-            <a:off x="594360" y="3931920"/>
-            <a:ext cx="365760" cy="365760"/>
+          <p:cNvPr id="11" name="Text 9"/>
+          <p:cNvSpPr/>
+          <p:nvPr/>
+        </p:nvSpPr>
+        <p:spPr>
+          <a:xfrm>
+            <a:off x="457200" y="2048256"/>
+            <a:ext cx="777240" cy="566928"/>
           </a:xfrm>
           <a:prstGeom prst="rect">
             <a:avLst/>
@@ -8419,249 +7960,93 @@
               <a:buNone/>
             </a:pPr>
             <a:r>
-              <a:rPr lang="en-US" sz="1800" b="1" dirty="0">
+              <a:rPr lang="en-US" sz="1000" b="1" dirty="0">
                 <a:solidFill>
                   <a:srgbClr val="FFFFFF"/>
+                </a:solidFill>
+                <a:latin typeface="Calibri" pitchFamily="34" charset="0"/>
+                <a:ea typeface="Calibri" pitchFamily="34" charset="-122"/>
+                <a:cs typeface="Calibri" pitchFamily="34" charset="-120"/>
+              </a:rPr>
+              <a:t>ALTA</a:t>
+            </a:r>
+            <a:endParaRPr lang="en-US" sz="1000" dirty="0"/>
+          </a:p>
+        </p:txBody>
+      </p:sp>
+      <p:sp>
+        <p:nvSpPr>
+          <p:cNvPr id="12" name="Text 10"/>
+          <p:cNvSpPr/>
+          <p:nvPr/>
+        </p:nvSpPr>
+        <p:spPr>
+          <a:xfrm>
+            <a:off x="1417320" y="2084832"/>
+            <a:ext cx="7223760" cy="274320"/>
+          </a:xfrm>
+          <a:prstGeom prst="rect">
+            <a:avLst/>
+          </a:prstGeom>
+          <a:noFill/>
+          <a:ln/>
+        </p:spPr>
+        <p:txBody>
+          <a:bodyPr wrap="square" lIns="0" tIns="0" rIns="0" bIns="0" rtlCol="0" anchor="ctr"/>
+          <a:lstStyle/>
+          <a:p>
+            <a:pPr indent="0" marL="0">
+              <a:buNone/>
+            </a:pPr>
+            <a:r>
+              <a:rPr lang="en-US" sz="1200" b="1" dirty="0">
+                <a:solidFill>
+                  <a:srgbClr val="0F172A"/>
                 </a:solidFill>
                 <a:latin typeface="Trebuchet MS" pitchFamily="34" charset="0"/>
                 <a:ea typeface="Trebuchet MS" pitchFamily="34" charset="-122"/>
                 <a:cs typeface="Trebuchet MS" pitchFamily="34" charset="-120"/>
               </a:rPr>
-              <a:t>2</a:t>
-            </a:r>
-            <a:endParaRPr lang="en-US" sz="1800" dirty="0"/>
-          </a:p>
-        </p:txBody>
-      </p:sp>
-      <p:sp>
-        <p:nvSpPr>
-          <p:cNvPr id="25" name="Text 23"/>
-          <p:cNvSpPr/>
-          <p:nvPr/>
-        </p:nvSpPr>
-        <p:spPr>
-          <a:xfrm>
-            <a:off x="1143000" y="3749040"/>
-            <a:ext cx="4572000" cy="274320"/>
-          </a:xfrm>
-          <a:prstGeom prst="rect">
-            <a:avLst/>
-          </a:prstGeom>
-          <a:noFill/>
-          <a:ln/>
-        </p:spPr>
-        <p:txBody>
-          <a:bodyPr wrap="square" lIns="0" tIns="0" rIns="0" bIns="0" rtlCol="0" anchor="ctr"/>
+              <a:t>Import semi-automatico dei CSV Lions</a:t>
+            </a:r>
+            <a:endParaRPr lang="en-US" sz="1200" dirty="0"/>
+          </a:p>
+        </p:txBody>
+      </p:sp>
+      <p:sp>
+        <p:nvSpPr>
+          <p:cNvPr id="13" name="Text 11"/>
+          <p:cNvSpPr/>
+          <p:nvPr/>
+        </p:nvSpPr>
+        <p:spPr>
+          <a:xfrm>
+            <a:off x="1417320" y="2340864"/>
+            <a:ext cx="7223760" cy="274320"/>
+          </a:xfrm>
+          <a:prstGeom prst="rect">
+            <a:avLst/>
+          </a:prstGeom>
+          <a:noFill/>
+          <a:ln/>
+        </p:spPr>
+        <p:txBody>
+          <a:bodyPr wrap="square" lIns="0" tIns="0" rIns="0" bIns="0" rtlCol="0" anchor="t"/>
           <a:lstStyle/>
           <a:p>
             <a:pPr indent="0" marL="0">
               <a:buNone/>
             </a:pPr>
             <a:r>
-              <a:rPr lang="en-US" sz="1200" b="1" dirty="0">
-                <a:solidFill>
-                  <a:srgbClr val="0F172A"/>
-                </a:solidFill>
-                <a:latin typeface="Trebuchet MS" pitchFamily="34" charset="0"/>
-                <a:ea typeface="Trebuchet MS" pitchFamily="34" charset="-122"/>
-                <a:cs typeface="Trebuchet MS" pitchFamily="34" charset="-120"/>
-              </a:rPr>
-              <a:t>Storico eventi sui club</a:t>
-            </a:r>
-            <a:endParaRPr lang="en-US" sz="1200" dirty="0"/>
-          </a:p>
-        </p:txBody>
-      </p:sp>
-      <p:sp>
-        <p:nvSpPr>
-          <p:cNvPr id="26" name="Text 24"/>
-          <p:cNvSpPr/>
-          <p:nvPr/>
-        </p:nvSpPr>
-        <p:spPr>
-          <a:xfrm>
-            <a:off x="5760720" y="3749040"/>
-            <a:ext cx="2743200" cy="274320"/>
-          </a:xfrm>
-          <a:prstGeom prst="rect">
-            <a:avLst/>
-          </a:prstGeom>
-          <a:noFill/>
-          <a:ln/>
-        </p:spPr>
-        <p:txBody>
-          <a:bodyPr wrap="square" lIns="0" tIns="0" rIns="0" bIns="0" rtlCol="0" anchor="ctr"/>
-          <a:lstStyle/>
-          <a:p>
-            <a:pPr algn="r" indent="0" marL="0">
-              <a:buNone/>
-            </a:pPr>
-            <a:r>
-              <a:rPr lang="en-US" sz="1000" b="1" i="1" dirty="0">
-                <a:solidFill>
-                  <a:srgbClr val="0055FF"/>
-                </a:solidFill>
-                <a:latin typeface="Consolas" pitchFamily="34" charset="0"/>
-                <a:ea typeface="Consolas" pitchFamily="34" charset="-122"/>
-                <a:cs typeface="Consolas" pitchFamily="34" charset="-120"/>
-              </a:rPr>
-              <a:t>club_history.csv</a:t>
-            </a:r>
-            <a:endParaRPr lang="en-US" sz="1000" dirty="0"/>
-          </a:p>
-        </p:txBody>
-      </p:sp>
-      <p:sp>
-        <p:nvSpPr>
-          <p:cNvPr id="27" name="Text 25"/>
-          <p:cNvSpPr/>
-          <p:nvPr/>
-        </p:nvSpPr>
-        <p:spPr>
-          <a:xfrm>
-            <a:off x="1143000" y="4050792"/>
-            <a:ext cx="1097280" cy="228600"/>
-          </a:xfrm>
-          <a:prstGeom prst="rect">
-            <a:avLst/>
-          </a:prstGeom>
-          <a:noFill/>
-          <a:ln/>
-        </p:spPr>
-        <p:txBody>
-          <a:bodyPr wrap="square" lIns="0" tIns="0" rIns="0" bIns="0" rtlCol="0" anchor="ctr"/>
-          <a:lstStyle/>
-          <a:p>
-            <a:pPr indent="0" marL="0">
-              <a:buNone/>
-            </a:pPr>
-            <a:r>
-              <a:rPr lang="en-US" sz="900" b="1" dirty="0">
-                <a:solidFill>
-                  <a:srgbClr val="64748B"/>
+              <a:rPr lang="en-US" sz="950" dirty="0">
+                <a:solidFill>
+                  <a:srgbClr val="334155"/>
                 </a:solidFill>
                 <a:latin typeface="Calibri" pitchFamily="34" charset="0"/>
                 <a:ea typeface="Calibri" pitchFamily="34" charset="-122"/>
                 <a:cs typeface="Calibri" pitchFamily="34" charset="-120"/>
               </a:rPr>
-              <a:t>Esempio riga: </a:t>
-            </a:r>
-            <a:endParaRPr lang="en-US" sz="900" dirty="0"/>
-          </a:p>
-        </p:txBody>
-      </p:sp>
-      <p:sp>
-        <p:nvSpPr>
-          <p:cNvPr id="28" name="Text 26"/>
-          <p:cNvSpPr/>
-          <p:nvPr/>
-        </p:nvSpPr>
-        <p:spPr>
-          <a:xfrm>
-            <a:off x="2194560" y="4050792"/>
-            <a:ext cx="6309360" cy="228600"/>
-          </a:xfrm>
-          <a:prstGeom prst="rect">
-            <a:avLst/>
-          </a:prstGeom>
-          <a:noFill/>
-          <a:ln/>
-        </p:spPr>
-        <p:txBody>
-          <a:bodyPr wrap="square" lIns="0" tIns="0" rIns="0" bIns="0" rtlCol="0" anchor="ctr"/>
-          <a:lstStyle/>
-          <a:p>
-            <a:pPr indent="0" marL="0">
-              <a:buNone/>
-            </a:pPr>
-            <a:r>
-              <a:rPr lang="en-US" sz="900" i="1" dirty="0">
-                <a:solidFill>
-                  <a:srgbClr val="334155"/>
-                </a:solidFill>
-                <a:latin typeface="Consolas" pitchFamily="34" charset="0"/>
-                <a:ea typeface="Consolas" pitchFamily="34" charset="-122"/>
-                <a:cs typeface="Consolas" pitchFamily="34" charset="-120"/>
-              </a:rPr>
-              <a:t>Lions Club Cortona-Nuovo · stato: Nuovo · data: 15/09/2025 · note: fondato</a:t>
-            </a:r>
-            <a:endParaRPr lang="en-US" sz="900" dirty="0"/>
-          </a:p>
-        </p:txBody>
-      </p:sp>
-      <p:sp>
-        <p:nvSpPr>
-          <p:cNvPr id="29" name="Text 27"/>
-          <p:cNvSpPr/>
-          <p:nvPr/>
-        </p:nvSpPr>
-        <p:spPr>
-          <a:xfrm>
-            <a:off x="1143000" y="4279392"/>
-            <a:ext cx="731520" cy="228600"/>
-          </a:xfrm>
-          <a:prstGeom prst="rect">
-            <a:avLst/>
-          </a:prstGeom>
-          <a:noFill/>
-          <a:ln/>
-        </p:spPr>
-        <p:txBody>
-          <a:bodyPr wrap="square" lIns="0" tIns="0" rIns="0" bIns="0" rtlCol="0" anchor="ctr"/>
-          <a:lstStyle/>
-          <a:p>
-            <a:pPr indent="0" marL="0">
-              <a:buNone/>
-            </a:pPr>
-            <a:r>
-              <a:rPr lang="en-US" sz="900" b="1" dirty="0">
-                <a:solidFill>
-                  <a:srgbClr val="64748B"/>
-                </a:solidFill>
-                <a:latin typeface="Calibri" pitchFamily="34" charset="0"/>
-                <a:ea typeface="Calibri" pitchFamily="34" charset="-122"/>
-                <a:cs typeface="Calibri" pitchFamily="34" charset="-120"/>
-              </a:rPr>
-              <a:t>Sblocca: </a:t>
-            </a:r>
-            <a:endParaRPr lang="en-US" sz="900" dirty="0"/>
-          </a:p>
-        </p:txBody>
-      </p:sp>
-      <p:sp>
-        <p:nvSpPr>
-          <p:cNvPr id="30" name="Text 28"/>
-          <p:cNvSpPr/>
-          <p:nvPr/>
-        </p:nvSpPr>
-        <p:spPr>
-          <a:xfrm>
-            <a:off x="1874520" y="4279392"/>
-            <a:ext cx="6675120" cy="228600"/>
-          </a:xfrm>
-          <a:prstGeom prst="rect">
-            <a:avLst/>
-          </a:prstGeom>
-          <a:noFill/>
-          <a:ln/>
-        </p:spPr>
-        <p:txBody>
-          <a:bodyPr wrap="square" lIns="0" tIns="0" rIns="0" bIns="0" rtlCol="0" anchor="ctr"/>
-          <a:lstStyle/>
-          <a:p>
-            <a:pPr indent="0" marL="0">
-              <a:buNone/>
-            </a:pPr>
-            <a:r>
-              <a:rPr lang="en-US" sz="950" b="1" dirty="0">
-                <a:solidFill>
-                  <a:srgbClr val="0055FF"/>
-                </a:solidFill>
-                <a:latin typeface="Calibri" pitchFamily="34" charset="0"/>
-                <a:ea typeface="Calibri" pitchFamily="34" charset="-122"/>
-                <a:cs typeface="Calibri" pitchFamily="34" charset="-120"/>
-              </a:rPr>
-              <a:t>Club nuovi · Riorganizzati · Chiusi · Sospeso nell'anno</a:t>
+              <a:t>Pulsante "Carica file" nell'app: il sistema applica lo script di conversione, mostra anteprima delle modifiche, conferma e applica. Niente più passaggio manuale via sviluppatore.</a:t>
             </a:r>
             <a:endParaRPr lang="en-US" sz="950" dirty="0"/>
           </a:p>
@@ -8669,18 +8054,18 @@
       </p:sp>
       <p:sp>
         <p:nvSpPr>
-          <p:cNvPr id="31" name="Shape 29"/>
-          <p:cNvSpPr/>
-          <p:nvPr/>
-        </p:nvSpPr>
-        <p:spPr>
-          <a:xfrm>
-            <a:off x="457200" y="4636008"/>
-            <a:ext cx="8229600" cy="274320"/>
+          <p:cNvPr id="14" name="Shape 12"/>
+          <p:cNvSpPr/>
+          <p:nvPr/>
+        </p:nvSpPr>
+        <p:spPr>
+          <a:xfrm>
+            <a:off x="457200" y="2679192"/>
+            <a:ext cx="8229600" cy="566928"/>
           </a:xfrm>
           <a:prstGeom prst="roundRect">
             <a:avLst>
-              <a:gd name="adj" fmla="val 33333"/>
+              <a:gd name="adj" fmla="val 16129"/>
             </a:avLst>
           </a:prstGeom>
           <a:solidFill>
@@ -8688,7 +8073,7 @@
           </a:solidFill>
           <a:ln w="12700">
             <a:solidFill>
-              <a:srgbClr val="FFE500"/>
+              <a:srgbClr val="E2E8F0"/>
             </a:solidFill>
             <a:prstDash val="solid"/>
           </a:ln>
@@ -8703,38 +8088,58 @@
       </p:sp>
       <p:sp>
         <p:nvSpPr>
-          <p:cNvPr id="32" name="Text 30"/>
-          <p:cNvSpPr/>
-          <p:nvPr/>
-        </p:nvSpPr>
-        <p:spPr>
-          <a:xfrm>
-            <a:off x="594360" y="4636008"/>
-            <a:ext cx="7955280" cy="274320"/>
-          </a:xfrm>
-          <a:prstGeom prst="rect">
-            <a:avLst/>
-          </a:prstGeom>
-          <a:noFill/>
-          <a:ln/>
-        </p:spPr>
-        <p:txBody>
-          <a:bodyPr wrap="square" lIns="0" tIns="0" rIns="0" bIns="0" rtlCol="0" anchor="ctr"/>
-          <a:lstStyle/>
-          <a:p>
-            <a:pPr indent="0" marL="0">
+          <p:cNvPr id="15" name="Shape 13"/>
+          <p:cNvSpPr/>
+          <p:nvPr/>
+        </p:nvSpPr>
+        <p:spPr>
+          <a:xfrm>
+            <a:off x="457200" y="2679192"/>
+            <a:ext cx="777240" cy="566928"/>
+          </a:xfrm>
+          <a:prstGeom prst="rect">
+            <a:avLst/>
+          </a:prstGeom>
+          <a:solidFill>
+            <a:srgbClr val="EA580C"/>
+          </a:solidFill>
+          <a:ln/>
+        </p:spPr>
+      </p:sp>
+      <p:sp>
+        <p:nvSpPr>
+          <p:cNvPr id="16" name="Text 14"/>
+          <p:cNvSpPr/>
+          <p:nvPr/>
+        </p:nvSpPr>
+        <p:spPr>
+          <a:xfrm>
+            <a:off x="457200" y="2679192"/>
+            <a:ext cx="777240" cy="566928"/>
+          </a:xfrm>
+          <a:prstGeom prst="rect">
+            <a:avLst/>
+          </a:prstGeom>
+          <a:noFill/>
+          <a:ln/>
+        </p:spPr>
+        <p:txBody>
+          <a:bodyPr wrap="square" lIns="0" tIns="0" rIns="0" bIns="0" rtlCol="0" anchor="ctr"/>
+          <a:lstStyle/>
+          <a:p>
+            <a:pPr algn="ctr" indent="0" marL="0">
               <a:buNone/>
             </a:pPr>
             <a:r>
               <a:rPr lang="en-US" sz="1000" b="1" dirty="0">
                 <a:solidFill>
-                  <a:srgbClr val="334155"/>
+                  <a:srgbClr val="FFFFFF"/>
                 </a:solidFill>
                 <a:latin typeface="Calibri" pitchFamily="34" charset="0"/>
                 <a:ea typeface="Calibri" pitchFamily="34" charset="-122"/>
                 <a:cs typeface="Calibri" pitchFamily="34" charset="-120"/>
               </a:rPr>
-              <a:t>📨  Azione proposta: lettera ufficiale dal Distretto al Multidistretto per richiedere questi due export</a:t>
+              <a:t>MEDIA</a:t>
             </a:r>
             <a:endParaRPr lang="en-US" sz="1000" dirty="0"/>
           </a:p>
@@ -8742,37 +8147,457 @@
       </p:sp>
       <p:sp>
         <p:nvSpPr>
-          <p:cNvPr id="33" name="Text 31"/>
-          <p:cNvSpPr/>
-          <p:nvPr/>
-        </p:nvSpPr>
-        <p:spPr>
-          <a:xfrm>
-            <a:off x="457200" y="4864608"/>
-            <a:ext cx="6400800" cy="201168"/>
-          </a:xfrm>
-          <a:prstGeom prst="rect">
-            <a:avLst/>
-          </a:prstGeom>
-          <a:noFill/>
-          <a:ln/>
-        </p:spPr>
-        <p:txBody>
-          <a:bodyPr wrap="square" rtlCol="0" anchor="ctr"/>
+          <p:cNvPr id="17" name="Text 15"/>
+          <p:cNvSpPr/>
+          <p:nvPr/>
+        </p:nvSpPr>
+        <p:spPr>
+          <a:xfrm>
+            <a:off x="1417320" y="2715768"/>
+            <a:ext cx="7223760" cy="274320"/>
+          </a:xfrm>
+          <a:prstGeom prst="rect">
+            <a:avLst/>
+          </a:prstGeom>
+          <a:noFill/>
+          <a:ln/>
+        </p:spPr>
+        <p:txBody>
+          <a:bodyPr wrap="square" lIns="0" tIns="0" rIns="0" bIns="0" rtlCol="0" anchor="ctr"/>
           <a:lstStyle/>
           <a:p>
             <a:pPr indent="0" marL="0">
               <a:buNone/>
             </a:pPr>
             <a:r>
-              <a:rPr lang="en-US" sz="900" i="1" dirty="0">
-                <a:solidFill>
-                  <a:srgbClr val="64748B"/>
+              <a:rPr lang="en-US" sz="1200" b="1" dirty="0">
+                <a:solidFill>
+                  <a:srgbClr val="0F172A"/>
+                </a:solidFill>
+                <a:latin typeface="Trebuchet MS" pitchFamily="34" charset="0"/>
+                <a:ea typeface="Trebuchet MS" pitchFamily="34" charset="-122"/>
+                <a:cs typeface="Trebuchet MS" pitchFamily="34" charset="-120"/>
+              </a:rPr>
+              <a:t>Inserimento attività online (form web)</a:t>
+            </a:r>
+            <a:endParaRPr lang="en-US" sz="1200" dirty="0"/>
+          </a:p>
+        </p:txBody>
+      </p:sp>
+      <p:sp>
+        <p:nvSpPr>
+          <p:cNvPr id="18" name="Text 16"/>
+          <p:cNvSpPr/>
+          <p:nvPr/>
+        </p:nvSpPr>
+        <p:spPr>
+          <a:xfrm>
+            <a:off x="1417320" y="2971800"/>
+            <a:ext cx="7223760" cy="274320"/>
+          </a:xfrm>
+          <a:prstGeom prst="rect">
+            <a:avLst/>
+          </a:prstGeom>
+          <a:noFill/>
+          <a:ln/>
+        </p:spPr>
+        <p:txBody>
+          <a:bodyPr wrap="square" lIns="0" tIns="0" rIns="0" bIns="0" rtlCol="0" anchor="t"/>
+          <a:lstStyle/>
+          <a:p>
+            <a:pPr indent="0" marL="0">
+              <a:buNone/>
+            </a:pPr>
+            <a:r>
+              <a:rPr lang="en-US" sz="950" dirty="0">
+                <a:solidFill>
+                  <a:srgbClr val="334155"/>
                 </a:solidFill>
                 <a:latin typeface="Calibri" pitchFamily="34" charset="0"/>
                 <a:ea typeface="Calibri" pitchFamily="34" charset="-122"/>
                 <a:cs typeface="Calibri" pitchFamily="34" charset="-120"/>
               </a:rPr>
+              <a:t>Inserire una nuova attività di servizio direttamente dall'app, senza dover ripassare da MyLion ad ogni evento.</a:t>
+            </a:r>
+            <a:endParaRPr lang="en-US" sz="950" dirty="0"/>
+          </a:p>
+        </p:txBody>
+      </p:sp>
+      <p:sp>
+        <p:nvSpPr>
+          <p:cNvPr id="19" name="Shape 17"/>
+          <p:cNvSpPr/>
+          <p:nvPr/>
+        </p:nvSpPr>
+        <p:spPr>
+          <a:xfrm>
+            <a:off x="457200" y="3310128"/>
+            <a:ext cx="8229600" cy="566928"/>
+          </a:xfrm>
+          <a:prstGeom prst="roundRect">
+            <a:avLst>
+              <a:gd name="adj" fmla="val 16129"/>
+            </a:avLst>
+          </a:prstGeom>
+          <a:solidFill>
+            <a:srgbClr val="FFFFFF"/>
+          </a:solidFill>
+          <a:ln w="12700">
+            <a:solidFill>
+              <a:srgbClr val="E2E8F0"/>
+            </a:solidFill>
+            <a:prstDash val="solid"/>
+          </a:ln>
+          <a:effectLst>
+            <a:outerShdw sx="100000" sy="100000" kx="0" ky="0" algn="bl" rotWithShape="0" blurRad="101600" dist="25400" dir="5400000">
+              <a:srgbClr val="000000">
+                <a:alpha val="8000"/>
+              </a:srgbClr>
+            </a:outerShdw>
+          </a:effectLst>
+        </p:spPr>
+      </p:sp>
+      <p:sp>
+        <p:nvSpPr>
+          <p:cNvPr id="20" name="Shape 18"/>
+          <p:cNvSpPr/>
+          <p:nvPr/>
+        </p:nvSpPr>
+        <p:spPr>
+          <a:xfrm>
+            <a:off x="457200" y="3310128"/>
+            <a:ext cx="777240" cy="566928"/>
+          </a:xfrm>
+          <a:prstGeom prst="rect">
+            <a:avLst/>
+          </a:prstGeom>
+          <a:solidFill>
+            <a:srgbClr val="EA580C"/>
+          </a:solidFill>
+          <a:ln/>
+        </p:spPr>
+      </p:sp>
+      <p:sp>
+        <p:nvSpPr>
+          <p:cNvPr id="21" name="Text 19"/>
+          <p:cNvSpPr/>
+          <p:nvPr/>
+        </p:nvSpPr>
+        <p:spPr>
+          <a:xfrm>
+            <a:off x="457200" y="3310128"/>
+            <a:ext cx="777240" cy="566928"/>
+          </a:xfrm>
+          <a:prstGeom prst="rect">
+            <a:avLst/>
+          </a:prstGeom>
+          <a:noFill/>
+          <a:ln/>
+        </p:spPr>
+        <p:txBody>
+          <a:bodyPr wrap="square" lIns="0" tIns="0" rIns="0" bIns="0" rtlCol="0" anchor="ctr"/>
+          <a:lstStyle/>
+          <a:p>
+            <a:pPr algn="ctr" indent="0" marL="0">
+              <a:buNone/>
+            </a:pPr>
+            <a:r>
+              <a:rPr lang="en-US" sz="1000" b="1" dirty="0">
+                <a:solidFill>
+                  <a:srgbClr val="FFFFFF"/>
+                </a:solidFill>
+                <a:latin typeface="Calibri" pitchFamily="34" charset="0"/>
+                <a:ea typeface="Calibri" pitchFamily="34" charset="-122"/>
+                <a:cs typeface="Calibri" pitchFamily="34" charset="-120"/>
+              </a:rPr>
+              <a:t>MEDIA</a:t>
+            </a:r>
+            <a:endParaRPr lang="en-US" sz="1000" dirty="0"/>
+          </a:p>
+        </p:txBody>
+      </p:sp>
+      <p:sp>
+        <p:nvSpPr>
+          <p:cNvPr id="22" name="Text 20"/>
+          <p:cNvSpPr/>
+          <p:nvPr/>
+        </p:nvSpPr>
+        <p:spPr>
+          <a:xfrm>
+            <a:off x="1417320" y="3346704"/>
+            <a:ext cx="7223760" cy="274320"/>
+          </a:xfrm>
+          <a:prstGeom prst="rect">
+            <a:avLst/>
+          </a:prstGeom>
+          <a:noFill/>
+          <a:ln/>
+        </p:spPr>
+        <p:txBody>
+          <a:bodyPr wrap="square" lIns="0" tIns="0" rIns="0" bIns="0" rtlCol="0" anchor="ctr"/>
+          <a:lstStyle/>
+          <a:p>
+            <a:pPr indent="0" marL="0">
+              <a:buNone/>
+            </a:pPr>
+            <a:r>
+              <a:rPr lang="en-US" sz="1200" b="1" dirty="0">
+                <a:solidFill>
+                  <a:srgbClr val="0F172A"/>
+                </a:solidFill>
+                <a:latin typeface="Trebuchet MS" pitchFamily="34" charset="0"/>
+                <a:ea typeface="Trebuchet MS" pitchFamily="34" charset="-122"/>
+                <a:cs typeface="Trebuchet MS" pitchFamily="34" charset="-120"/>
+              </a:rPr>
+              <a:t>Notifiche email automatiche</a:t>
+            </a:r>
+            <a:endParaRPr lang="en-US" sz="1200" dirty="0"/>
+          </a:p>
+        </p:txBody>
+      </p:sp>
+      <p:sp>
+        <p:nvSpPr>
+          <p:cNvPr id="23" name="Text 21"/>
+          <p:cNvSpPr/>
+          <p:nvPr/>
+        </p:nvSpPr>
+        <p:spPr>
+          <a:xfrm>
+            <a:off x="1417320" y="3602736"/>
+            <a:ext cx="7223760" cy="274320"/>
+          </a:xfrm>
+          <a:prstGeom prst="rect">
+            <a:avLst/>
+          </a:prstGeom>
+          <a:noFill/>
+          <a:ln/>
+        </p:spPr>
+        <p:txBody>
+          <a:bodyPr wrap="square" lIns="0" tIns="0" rIns="0" bIns="0" rtlCol="0" anchor="t"/>
+          <a:lstStyle/>
+          <a:p>
+            <a:pPr indent="0" marL="0">
+              <a:buNone/>
+            </a:pPr>
+            <a:r>
+              <a:rPr lang="en-US" sz="950" dirty="0">
+                <a:solidFill>
+                  <a:srgbClr val="334155"/>
+                </a:solidFill>
+                <a:latin typeface="Calibri" pitchFamily="34" charset="0"/>
+                <a:ea typeface="Calibri" pitchFamily="34" charset="-122"/>
+                <a:cs typeface="Calibri" pitchFamily="34" charset="-120"/>
+              </a:rPr>
+              <a:t>Promemoria rendicontazione · club che non comunicano da 90 giorni · anniversari soci · scadenze incarichi.</a:t>
+            </a:r>
+            <a:endParaRPr lang="en-US" sz="950" dirty="0"/>
+          </a:p>
+        </p:txBody>
+      </p:sp>
+      <p:sp>
+        <p:nvSpPr>
+          <p:cNvPr id="24" name="Shape 22"/>
+          <p:cNvSpPr/>
+          <p:nvPr/>
+        </p:nvSpPr>
+        <p:spPr>
+          <a:xfrm>
+            <a:off x="457200" y="3941064"/>
+            <a:ext cx="8229600" cy="566928"/>
+          </a:xfrm>
+          <a:prstGeom prst="roundRect">
+            <a:avLst>
+              <a:gd name="adj" fmla="val 16129"/>
+            </a:avLst>
+          </a:prstGeom>
+          <a:solidFill>
+            <a:srgbClr val="FFFFFF"/>
+          </a:solidFill>
+          <a:ln w="12700">
+            <a:solidFill>
+              <a:srgbClr val="E2E8F0"/>
+            </a:solidFill>
+            <a:prstDash val="solid"/>
+          </a:ln>
+          <a:effectLst>
+            <a:outerShdw sx="100000" sy="100000" kx="0" ky="0" algn="bl" rotWithShape="0" blurRad="101600" dist="25400" dir="5400000">
+              <a:srgbClr val="000000">
+                <a:alpha val="8000"/>
+              </a:srgbClr>
+            </a:outerShdw>
+          </a:effectLst>
+        </p:spPr>
+      </p:sp>
+      <p:sp>
+        <p:nvSpPr>
+          <p:cNvPr id="25" name="Shape 23"/>
+          <p:cNvSpPr/>
+          <p:nvPr/>
+        </p:nvSpPr>
+        <p:spPr>
+          <a:xfrm>
+            <a:off x="457200" y="3941064"/>
+            <a:ext cx="777240" cy="566928"/>
+          </a:xfrm>
+          <a:prstGeom prst="rect">
+            <a:avLst/>
+          </a:prstGeom>
+          <a:solidFill>
+            <a:srgbClr val="059669"/>
+          </a:solidFill>
+          <a:ln/>
+        </p:spPr>
+      </p:sp>
+      <p:sp>
+        <p:nvSpPr>
+          <p:cNvPr id="26" name="Text 24"/>
+          <p:cNvSpPr/>
+          <p:nvPr/>
+        </p:nvSpPr>
+        <p:spPr>
+          <a:xfrm>
+            <a:off x="457200" y="3941064"/>
+            <a:ext cx="777240" cy="566928"/>
+          </a:xfrm>
+          <a:prstGeom prst="rect">
+            <a:avLst/>
+          </a:prstGeom>
+          <a:noFill/>
+          <a:ln/>
+        </p:spPr>
+        <p:txBody>
+          <a:bodyPr wrap="square" lIns="0" tIns="0" rIns="0" bIns="0" rtlCol="0" anchor="ctr"/>
+          <a:lstStyle/>
+          <a:p>
+            <a:pPr algn="ctr" indent="0" marL="0">
+              <a:buNone/>
+            </a:pPr>
+            <a:r>
+              <a:rPr lang="en-US" sz="1000" b="1" dirty="0">
+                <a:solidFill>
+                  <a:srgbClr val="FFFFFF"/>
+                </a:solidFill>
+                <a:latin typeface="Calibri" pitchFamily="34" charset="0"/>
+                <a:ea typeface="Calibri" pitchFamily="34" charset="-122"/>
+                <a:cs typeface="Calibri" pitchFamily="34" charset="-120"/>
+              </a:rPr>
+              <a:t>BASSA</a:t>
+            </a:r>
+            <a:endParaRPr lang="en-US" sz="1000" dirty="0"/>
+          </a:p>
+        </p:txBody>
+      </p:sp>
+      <p:sp>
+        <p:nvSpPr>
+          <p:cNvPr id="27" name="Text 25"/>
+          <p:cNvSpPr/>
+          <p:nvPr/>
+        </p:nvSpPr>
+        <p:spPr>
+          <a:xfrm>
+            <a:off x="1417320" y="3977640"/>
+            <a:ext cx="7223760" cy="274320"/>
+          </a:xfrm>
+          <a:prstGeom prst="rect">
+            <a:avLst/>
+          </a:prstGeom>
+          <a:noFill/>
+          <a:ln/>
+        </p:spPr>
+        <p:txBody>
+          <a:bodyPr wrap="square" lIns="0" tIns="0" rIns="0" bIns="0" rtlCol="0" anchor="ctr"/>
+          <a:lstStyle/>
+          <a:p>
+            <a:pPr indent="0" marL="0">
+              <a:buNone/>
+            </a:pPr>
+            <a:r>
+              <a:rPr lang="en-US" sz="1200" b="1" dirty="0">
+                <a:solidFill>
+                  <a:srgbClr val="0F172A"/>
+                </a:solidFill>
+                <a:latin typeface="Trebuchet MS" pitchFamily="34" charset="0"/>
+                <a:ea typeface="Trebuchet MS" pitchFamily="34" charset="-122"/>
+                <a:cs typeface="Trebuchet MS" pitchFamily="34" charset="-120"/>
+              </a:rPr>
+              <a:t>Export Excel (.xlsx) dalle tabelle</a:t>
+            </a:r>
+            <a:endParaRPr lang="en-US" sz="1200" dirty="0"/>
+          </a:p>
+        </p:txBody>
+      </p:sp>
+      <p:sp>
+        <p:nvSpPr>
+          <p:cNvPr id="28" name="Text 26"/>
+          <p:cNvSpPr/>
+          <p:nvPr/>
+        </p:nvSpPr>
+        <p:spPr>
+          <a:xfrm>
+            <a:off x="1417320" y="4233672"/>
+            <a:ext cx="7223760" cy="274320"/>
+          </a:xfrm>
+          <a:prstGeom prst="rect">
+            <a:avLst/>
+          </a:prstGeom>
+          <a:noFill/>
+          <a:ln/>
+        </p:spPr>
+        <p:txBody>
+          <a:bodyPr wrap="square" lIns="0" tIns="0" rIns="0" bIns="0" rtlCol="0" anchor="t"/>
+          <a:lstStyle/>
+          <a:p>
+            <a:pPr indent="0" marL="0">
+              <a:buNone/>
+            </a:pPr>
+            <a:r>
+              <a:rPr lang="en-US" sz="950" dirty="0">
+                <a:solidFill>
+                  <a:srgbClr val="334155"/>
+                </a:solidFill>
+                <a:latin typeface="Calibri" pitchFamily="34" charset="0"/>
+                <a:ea typeface="Calibri" pitchFamily="34" charset="-122"/>
+                <a:cs typeface="Calibri" pitchFamily="34" charset="-120"/>
+              </a:rPr>
+              <a:t>Pulsante "Esporta" su ogni tabella per chi vuole continuare ad elaborare dati offline.</a:t>
+            </a:r>
+            <a:endParaRPr lang="en-US" sz="950" dirty="0"/>
+          </a:p>
+        </p:txBody>
+      </p:sp>
+      <p:sp>
+        <p:nvSpPr>
+          <p:cNvPr id="29" name="Text 27"/>
+          <p:cNvSpPr/>
+          <p:nvPr/>
+        </p:nvSpPr>
+        <p:spPr>
+          <a:xfrm>
+            <a:off x="457200" y="4864608"/>
+            <a:ext cx="6400800" cy="201168"/>
+          </a:xfrm>
+          <a:prstGeom prst="rect">
+            <a:avLst/>
+          </a:prstGeom>
+          <a:noFill/>
+          <a:ln/>
+        </p:spPr>
+        <p:txBody>
+          <a:bodyPr wrap="square" rtlCol="0" anchor="ctr"/>
+          <a:lstStyle/>
+          <a:p>
+            <a:pPr indent="0" marL="0">
+              <a:buNone/>
+            </a:pPr>
+            <a:r>
+              <a:rPr lang="en-US" sz="900" i="1" dirty="0">
+                <a:solidFill>
+                  <a:srgbClr val="64748B"/>
+                </a:solidFill>
+                <a:latin typeface="Calibri" pitchFamily="34" charset="0"/>
+                <a:ea typeface="Calibri" pitchFamily="34" charset="-122"/>
+                <a:cs typeface="Calibri" pitchFamily="34" charset="-120"/>
+              </a:rPr>
               <a:t>Digitalions · digitalions108la.it · Distretto Lions 108 LA</a:t>
             </a:r>
             <a:endParaRPr lang="en-US" sz="900" dirty="0"/>
@@ -8781,7 +8606,7 @@
       </p:sp>
       <p:sp>
         <p:nvSpPr>
-          <p:cNvPr id="34" name="Text 32"/>
+          <p:cNvPr id="30" name="Text 28"/>
           <p:cNvSpPr/>
           <p:nvPr/>
         </p:nvSpPr>
@@ -8877,13 +8702,13 @@
             <a:r>
               <a:rPr lang="en-US" sz="2600" b="1" dirty="0">
                 <a:solidFill>
-                  <a:srgbClr val="DC2626"/>
+                  <a:srgbClr val="F5B606"/>
                 </a:solidFill>
                 <a:latin typeface="Trebuchet MS" pitchFamily="34" charset="0"/>
                 <a:ea typeface="Trebuchet MS" pitchFamily="34" charset="-122"/>
                 <a:cs typeface="Trebuchet MS" pitchFamily="34" charset="-120"/>
               </a:rPr>
-              <a:t>3 · Decisioni che ci servono oggi</a:t>
+              <a:t>2 · Dati che servono da LCI / Multidistretto</a:t>
             </a:r>
             <a:endParaRPr lang="en-US" sz="2600" dirty="0"/>
           </a:p>
@@ -8922,7 +8747,7 @@
                 <a:ea typeface="Calibri" pitchFamily="34" charset="-122"/>
                 <a:cs typeface="Calibri" pitchFamily="34" charset="-120"/>
               </a:rPr>
-              <a:t>Tre scelte aperte. Le risposte cambiano l'ordine delle priorità di sviluppo.</a:t>
+              <a:t>Il CSV soci che riceviamo oggi non ha le "date di uscita". Risultato: vediamo chi c'è, non chi se ne è andato.</a:t>
             </a:r>
             <a:endParaRPr lang="en-US" sz="1300" dirty="0"/>
           </a:p>
@@ -8936,12 +8761,315 @@
         </p:nvSpPr>
         <p:spPr>
           <a:xfrm>
-            <a:off x="457200" y="1508760"/>
-            <a:ext cx="8229600" cy="868680"/>
+            <a:off x="457200" y="1417320"/>
+            <a:ext cx="4023360" cy="777240"/>
           </a:xfrm>
           <a:prstGeom prst="roundRect">
             <a:avLst>
-              <a:gd name="adj" fmla="val 10526"/>
+              <a:gd name="adj" fmla="val 11765"/>
+            </a:avLst>
+          </a:prstGeom>
+          <a:solidFill>
+            <a:srgbClr val="FFFFFF"/>
+          </a:solidFill>
+          <a:ln w="12700">
+            <a:solidFill>
+              <a:srgbClr val="059669"/>
+            </a:solidFill>
+            <a:prstDash val="solid"/>
+          </a:ln>
+          <a:effectLst>
+            <a:outerShdw sx="100000" sy="100000" kx="0" ky="0" algn="bl" rotWithShape="0" blurRad="101600" dist="25400" dir="5400000">
+              <a:srgbClr val="000000">
+                <a:alpha val="8000"/>
+              </a:srgbClr>
+            </a:outerShdw>
+          </a:effectLst>
+        </p:spPr>
+      </p:sp>
+      <p:sp>
+        <p:nvSpPr>
+          <p:cNvPr id="5" name="Shape 3"/>
+          <p:cNvSpPr/>
+          <p:nvPr/>
+        </p:nvSpPr>
+        <p:spPr>
+          <a:xfrm>
+            <a:off x="457200" y="1417320"/>
+            <a:ext cx="109728" cy="777240"/>
+          </a:xfrm>
+          <a:prstGeom prst="rect">
+            <a:avLst/>
+          </a:prstGeom>
+          <a:solidFill>
+            <a:srgbClr val="059669"/>
+          </a:solidFill>
+          <a:ln/>
+        </p:spPr>
+      </p:sp>
+      <p:sp>
+        <p:nvSpPr>
+          <p:cNvPr id="6" name="Text 4"/>
+          <p:cNvSpPr/>
+          <p:nvPr/>
+        </p:nvSpPr>
+        <p:spPr>
+          <a:xfrm>
+            <a:off x="685800" y="1463040"/>
+            <a:ext cx="3657600" cy="228600"/>
+          </a:xfrm>
+          <a:prstGeom prst="rect">
+            <a:avLst/>
+          </a:prstGeom>
+          <a:noFill/>
+          <a:ln/>
+        </p:spPr>
+        <p:txBody>
+          <a:bodyPr wrap="square" lIns="0" tIns="0" rIns="0" bIns="0" rtlCol="0" anchor="ctr"/>
+          <a:lstStyle/>
+          <a:p>
+            <a:pPr indent="0" marL="0">
+              <a:buNone/>
+            </a:pPr>
+            <a:r>
+              <a:rPr lang="en-US" sz="900" b="1" spc="150" kern="0" dirty="0">
+                <a:solidFill>
+                  <a:srgbClr val="059669"/>
+                </a:solidFill>
+                <a:latin typeface="Calibri" pitchFamily="34" charset="0"/>
+                <a:ea typeface="Calibri" pitchFamily="34" charset="-122"/>
+                <a:cs typeface="Calibri" pitchFamily="34" charset="-120"/>
+              </a:rPr>
+              <a:t>✓  COSA ABBIAMO</a:t>
+            </a:r>
+            <a:endParaRPr lang="en-US" sz="900" dirty="0"/>
+          </a:p>
+        </p:txBody>
+      </p:sp>
+      <p:sp>
+        <p:nvSpPr>
+          <p:cNvPr id="7" name="Text 5"/>
+          <p:cNvSpPr/>
+          <p:nvPr/>
+        </p:nvSpPr>
+        <p:spPr>
+          <a:xfrm>
+            <a:off x="685800" y="1691640"/>
+            <a:ext cx="3657600" cy="502920"/>
+          </a:xfrm>
+          <a:prstGeom prst="rect">
+            <a:avLst/>
+          </a:prstGeom>
+          <a:noFill/>
+          <a:ln/>
+        </p:spPr>
+        <p:txBody>
+          <a:bodyPr wrap="square" lIns="0" tIns="0" rIns="0" bIns="0" rtlCol="0" anchor="t"/>
+          <a:lstStyle/>
+          <a:p>
+            <a:pPr indent="0" marL="0">
+              <a:buNone/>
+            </a:pPr>
+            <a:r>
+              <a:rPr lang="en-US" sz="1000" dirty="0">
+                <a:solidFill>
+                  <a:srgbClr val="334155"/>
+                </a:solidFill>
+                <a:latin typeface="Calibri" pitchFamily="34" charset="0"/>
+                <a:ea typeface="Calibri" pitchFamily="34" charset="-122"/>
+                <a:cs typeface="Calibri" pitchFamily="34" charset="-120"/>
+              </a:rPr>
+              <a:t>Soci attualmente attivi (2.966) · data ingresso di ciascuno · 138 nuovi soci nell'anno calcolato</a:t>
+            </a:r>
+            <a:endParaRPr lang="en-US" sz="1000" dirty="0"/>
+          </a:p>
+        </p:txBody>
+      </p:sp>
+      <p:sp>
+        <p:nvSpPr>
+          <p:cNvPr id="8" name="Shape 6"/>
+          <p:cNvSpPr/>
+          <p:nvPr/>
+        </p:nvSpPr>
+        <p:spPr>
+          <a:xfrm>
+            <a:off x="4663440" y="1417320"/>
+            <a:ext cx="4023360" cy="777240"/>
+          </a:xfrm>
+          <a:prstGeom prst="roundRect">
+            <a:avLst>
+              <a:gd name="adj" fmla="val 11765"/>
+            </a:avLst>
+          </a:prstGeom>
+          <a:solidFill>
+            <a:srgbClr val="FFFFFF"/>
+          </a:solidFill>
+          <a:ln w="12700">
+            <a:solidFill>
+              <a:srgbClr val="DC2626"/>
+            </a:solidFill>
+            <a:prstDash val="solid"/>
+          </a:ln>
+          <a:effectLst>
+            <a:outerShdw sx="100000" sy="100000" kx="0" ky="0" algn="bl" rotWithShape="0" blurRad="101600" dist="25400" dir="5400000">
+              <a:srgbClr val="000000">
+                <a:alpha val="8000"/>
+              </a:srgbClr>
+            </a:outerShdw>
+          </a:effectLst>
+        </p:spPr>
+      </p:sp>
+      <p:sp>
+        <p:nvSpPr>
+          <p:cNvPr id="9" name="Shape 7"/>
+          <p:cNvSpPr/>
+          <p:nvPr/>
+        </p:nvSpPr>
+        <p:spPr>
+          <a:xfrm>
+            <a:off x="4663440" y="1417320"/>
+            <a:ext cx="109728" cy="777240"/>
+          </a:xfrm>
+          <a:prstGeom prst="rect">
+            <a:avLst/>
+          </a:prstGeom>
+          <a:solidFill>
+            <a:srgbClr val="DC2626"/>
+          </a:solidFill>
+          <a:ln/>
+        </p:spPr>
+      </p:sp>
+      <p:sp>
+        <p:nvSpPr>
+          <p:cNvPr id="10" name="Text 8"/>
+          <p:cNvSpPr/>
+          <p:nvPr/>
+        </p:nvSpPr>
+        <p:spPr>
+          <a:xfrm>
+            <a:off x="4892040" y="1463040"/>
+            <a:ext cx="3657600" cy="228600"/>
+          </a:xfrm>
+          <a:prstGeom prst="rect">
+            <a:avLst/>
+          </a:prstGeom>
+          <a:noFill/>
+          <a:ln/>
+        </p:spPr>
+        <p:txBody>
+          <a:bodyPr wrap="square" lIns="0" tIns="0" rIns="0" bIns="0" rtlCol="0" anchor="ctr"/>
+          <a:lstStyle/>
+          <a:p>
+            <a:pPr indent="0" marL="0">
+              <a:buNone/>
+            </a:pPr>
+            <a:r>
+              <a:rPr lang="en-US" sz="900" b="1" spc="150" kern="0" dirty="0">
+                <a:solidFill>
+                  <a:srgbClr val="DC2626"/>
+                </a:solidFill>
+                <a:latin typeface="Calibri" pitchFamily="34" charset="0"/>
+                <a:ea typeface="Calibri" pitchFamily="34" charset="-122"/>
+                <a:cs typeface="Calibri" pitchFamily="34" charset="-120"/>
+              </a:rPr>
+              <a:t>✗  COSA MANCA</a:t>
+            </a:r>
+            <a:endParaRPr lang="en-US" sz="900" dirty="0"/>
+          </a:p>
+        </p:txBody>
+      </p:sp>
+      <p:sp>
+        <p:nvSpPr>
+          <p:cNvPr id="11" name="Text 9"/>
+          <p:cNvSpPr/>
+          <p:nvPr/>
+        </p:nvSpPr>
+        <p:spPr>
+          <a:xfrm>
+            <a:off x="4892040" y="1691640"/>
+            <a:ext cx="3657600" cy="502920"/>
+          </a:xfrm>
+          <a:prstGeom prst="rect">
+            <a:avLst/>
+          </a:prstGeom>
+          <a:noFill/>
+          <a:ln/>
+        </p:spPr>
+        <p:txBody>
+          <a:bodyPr wrap="square" lIns="0" tIns="0" rIns="0" bIns="0" rtlCol="0" anchor="t"/>
+          <a:lstStyle/>
+          <a:p>
+            <a:pPr indent="0" marL="0">
+              <a:buNone/>
+            </a:pPr>
+            <a:r>
+              <a:rPr lang="en-US" sz="1000" dirty="0">
+                <a:solidFill>
+                  <a:srgbClr val="334155"/>
+                </a:solidFill>
+                <a:latin typeface="Calibri" pitchFamily="34" charset="0"/>
+                <a:ea typeface="Calibri" pitchFamily="34" charset="-122"/>
+                <a:cs typeface="Calibri" pitchFamily="34" charset="-120"/>
+              </a:rPr>
+              <a:t>Date di uscita dei soci · stato storico dei club (nuovi, chiusi, riorganizzati, sospesi)</a:t>
+            </a:r>
+            <a:endParaRPr lang="en-US" sz="1000" dirty="0"/>
+          </a:p>
+        </p:txBody>
+      </p:sp>
+      <p:sp>
+        <p:nvSpPr>
+          <p:cNvPr id="12" name="Text 10"/>
+          <p:cNvSpPr/>
+          <p:nvPr/>
+        </p:nvSpPr>
+        <p:spPr>
+          <a:xfrm>
+            <a:off x="457200" y="2331720"/>
+            <a:ext cx="8229600" cy="274320"/>
+          </a:xfrm>
+          <a:prstGeom prst="rect">
+            <a:avLst/>
+          </a:prstGeom>
+          <a:noFill/>
+          <a:ln/>
+        </p:spPr>
+        <p:txBody>
+          <a:bodyPr wrap="square" lIns="0" tIns="0" rIns="0" bIns="0" rtlCol="0" anchor="ctr"/>
+          <a:lstStyle/>
+          <a:p>
+            <a:pPr indent="0" marL="0">
+              <a:buNone/>
+            </a:pPr>
+            <a:r>
+              <a:rPr lang="en-US" sz="1300" b="1" dirty="0">
+                <a:solidFill>
+                  <a:srgbClr val="0F172A"/>
+                </a:solidFill>
+                <a:latin typeface="Trebuchet MS" pitchFamily="34" charset="0"/>
+                <a:ea typeface="Trebuchet MS" pitchFamily="34" charset="-122"/>
+                <a:cs typeface="Trebuchet MS" pitchFamily="34" charset="-120"/>
+              </a:rPr>
+              <a:t>Due richieste a LCI / Multidistretto · in ordine di priorità</a:t>
+            </a:r>
+            <a:endParaRPr lang="en-US" sz="1300" dirty="0"/>
+          </a:p>
+        </p:txBody>
+      </p:sp>
+      <p:sp>
+        <p:nvSpPr>
+          <p:cNvPr id="13" name="Shape 11"/>
+          <p:cNvSpPr/>
+          <p:nvPr/>
+        </p:nvSpPr>
+        <p:spPr>
+          <a:xfrm>
+            <a:off x="457200" y="2697480"/>
+            <a:ext cx="8229600" cy="914400"/>
+          </a:xfrm>
+          <a:prstGeom prst="roundRect">
+            <a:avLst>
+              <a:gd name="adj" fmla="val 10000"/>
             </a:avLst>
           </a:prstGeom>
           <a:solidFill>
@@ -8964,34 +9092,34 @@
       </p:sp>
       <p:sp>
         <p:nvSpPr>
-          <p:cNvPr id="5" name="Shape 3"/>
-          <p:cNvSpPr/>
-          <p:nvPr/>
-        </p:nvSpPr>
-        <p:spPr>
-          <a:xfrm>
-            <a:off x="594360" y="1755648"/>
-            <a:ext cx="384048" cy="384048"/>
+          <p:cNvPr id="14" name="Shape 12"/>
+          <p:cNvSpPr/>
+          <p:nvPr/>
+        </p:nvSpPr>
+        <p:spPr>
+          <a:xfrm>
+            <a:off x="594360" y="2971800"/>
+            <a:ext cx="365760" cy="365760"/>
           </a:xfrm>
           <a:prstGeom prst="ellipse">
             <a:avLst/>
           </a:prstGeom>
           <a:solidFill>
-            <a:srgbClr val="DC2626"/>
+            <a:srgbClr val="7C3AED"/>
           </a:solidFill>
           <a:ln/>
         </p:spPr>
       </p:sp>
       <p:sp>
         <p:nvSpPr>
-          <p:cNvPr id="6" name="Text 4"/>
-          <p:cNvSpPr/>
-          <p:nvPr/>
-        </p:nvSpPr>
-        <p:spPr>
-          <a:xfrm>
-            <a:off x="594360" y="1755648"/>
-            <a:ext cx="384048" cy="384048"/>
+          <p:cNvPr id="15" name="Text 13"/>
+          <p:cNvSpPr/>
+          <p:nvPr/>
+        </p:nvSpPr>
+        <p:spPr>
+          <a:xfrm>
+            <a:off x="594360" y="2971800"/>
+            <a:ext cx="365760" cy="365760"/>
           </a:xfrm>
           <a:prstGeom prst="rect">
             <a:avLst/>
@@ -9023,14 +9151,14 @@
       </p:sp>
       <p:sp>
         <p:nvSpPr>
-          <p:cNvPr id="7" name="Text 5"/>
-          <p:cNvSpPr/>
-          <p:nvPr/>
-        </p:nvSpPr>
-        <p:spPr>
-          <a:xfrm>
-            <a:off x="1188720" y="1645920"/>
-            <a:ext cx="7315200" cy="365760"/>
+          <p:cNvPr id="16" name="Text 14"/>
+          <p:cNvSpPr/>
+          <p:nvPr/>
+        </p:nvSpPr>
+        <p:spPr>
+          <a:xfrm>
+            <a:off x="1143000" y="2788920"/>
+            <a:ext cx="4572000" cy="274320"/>
           </a:xfrm>
           <a:prstGeom prst="rect">
             <a:avLst/>
@@ -9046,7 +9174,7 @@
               <a:buNone/>
             </a:pPr>
             <a:r>
-              <a:rPr lang="en-US" sz="1400" b="1" dirty="0">
+              <a:rPr lang="en-US" sz="1200" b="1" dirty="0">
                 <a:solidFill>
                   <a:srgbClr val="0F172A"/>
                 </a:solidFill>
@@ -9054,65 +9182,221 @@
                 <a:ea typeface="Trebuchet MS" pitchFamily="34" charset="-122"/>
                 <a:cs typeface="Trebuchet MS" pitchFamily="34" charset="-120"/>
               </a:rPr>
-              <a:t>Chi gestisce gli import CSV in produzione?</a:t>
-            </a:r>
-            <a:endParaRPr lang="en-US" sz="1400" dirty="0"/>
-          </a:p>
-        </p:txBody>
-      </p:sp>
-      <p:sp>
-        <p:nvSpPr>
-          <p:cNvPr id="8" name="Text 6"/>
-          <p:cNvSpPr/>
-          <p:nvPr/>
-        </p:nvSpPr>
-        <p:spPr>
-          <a:xfrm>
-            <a:off x="1188720" y="2011680"/>
-            <a:ext cx="7315200" cy="365760"/>
-          </a:xfrm>
-          <a:prstGeom prst="rect">
-            <a:avLst/>
-          </a:prstGeom>
-          <a:noFill/>
-          <a:ln/>
-        </p:spPr>
-        <p:txBody>
-          <a:bodyPr wrap="square" lIns="0" tIns="0" rIns="0" bIns="0" rtlCol="0" anchor="t"/>
+              <a:t>Elenco dei soci usciti nell'anno</a:t>
+            </a:r>
+            <a:endParaRPr lang="en-US" sz="1200" dirty="0"/>
+          </a:p>
+        </p:txBody>
+      </p:sp>
+      <p:sp>
+        <p:nvSpPr>
+          <p:cNvPr id="17" name="Text 15"/>
+          <p:cNvSpPr/>
+          <p:nvPr/>
+        </p:nvSpPr>
+        <p:spPr>
+          <a:xfrm>
+            <a:off x="5760720" y="2788920"/>
+            <a:ext cx="2743200" cy="274320"/>
+          </a:xfrm>
+          <a:prstGeom prst="rect">
+            <a:avLst/>
+          </a:prstGeom>
+          <a:noFill/>
+          <a:ln/>
+        </p:spPr>
+        <p:txBody>
+          <a:bodyPr wrap="square" lIns="0" tIns="0" rIns="0" bIns="0" rtlCol="0" anchor="ctr"/>
+          <a:lstStyle/>
+          <a:p>
+            <a:pPr algn="r" indent="0" marL="0">
+              <a:buNone/>
+            </a:pPr>
+            <a:r>
+              <a:rPr lang="en-US" sz="1000" b="1" i="1" dirty="0">
+                <a:solidFill>
+                  <a:srgbClr val="7C3AED"/>
+                </a:solidFill>
+                <a:latin typeface="Consolas" pitchFamily="34" charset="0"/>
+                <a:ea typeface="Consolas" pitchFamily="34" charset="-122"/>
+                <a:cs typeface="Consolas" pitchFamily="34" charset="-120"/>
+              </a:rPr>
+              <a:t>members_exits.csv</a:t>
+            </a:r>
+            <a:endParaRPr lang="en-US" sz="1000" dirty="0"/>
+          </a:p>
+        </p:txBody>
+      </p:sp>
+      <p:sp>
+        <p:nvSpPr>
+          <p:cNvPr id="18" name="Text 16"/>
+          <p:cNvSpPr/>
+          <p:nvPr/>
+        </p:nvSpPr>
+        <p:spPr>
+          <a:xfrm>
+            <a:off x="1143000" y="3090672"/>
+            <a:ext cx="1097280" cy="228600"/>
+          </a:xfrm>
+          <a:prstGeom prst="rect">
+            <a:avLst/>
+          </a:prstGeom>
+          <a:noFill/>
+          <a:ln/>
+        </p:spPr>
+        <p:txBody>
+          <a:bodyPr wrap="square" lIns="0" tIns="0" rIns="0" bIns="0" rtlCol="0" anchor="ctr"/>
           <a:lstStyle/>
           <a:p>
             <a:pPr indent="0" marL="0">
               <a:buNone/>
             </a:pPr>
             <a:r>
-              <a:rPr lang="en-US" sz="1100" i="1" dirty="0">
-                <a:solidFill>
-                  <a:srgbClr val="334155"/>
+              <a:rPr lang="en-US" sz="900" b="1" dirty="0">
+                <a:solidFill>
+                  <a:srgbClr val="64748B"/>
                 </a:solidFill>
                 <a:latin typeface="Calibri" pitchFamily="34" charset="0"/>
                 <a:ea typeface="Calibri" pitchFamily="34" charset="-122"/>
                 <a:cs typeface="Calibri" pitchFamily="34" charset="-120"/>
               </a:rPr>
-              <a:t>Segreteria distrettuale · Officer di Club · Solo amministratore tecnico esterno</a:t>
-            </a:r>
-            <a:endParaRPr lang="en-US" sz="1100" dirty="0"/>
-          </a:p>
-        </p:txBody>
-      </p:sp>
-      <p:sp>
-        <p:nvSpPr>
-          <p:cNvPr id="9" name="Shape 7"/>
-          <p:cNvSpPr/>
-          <p:nvPr/>
-        </p:nvSpPr>
-        <p:spPr>
-          <a:xfrm>
-            <a:off x="457200" y="2468880"/>
-            <a:ext cx="8229600" cy="868680"/>
+              <a:t>Esempio riga: </a:t>
+            </a:r>
+            <a:endParaRPr lang="en-US" sz="900" dirty="0"/>
+          </a:p>
+        </p:txBody>
+      </p:sp>
+      <p:sp>
+        <p:nvSpPr>
+          <p:cNvPr id="19" name="Text 17"/>
+          <p:cNvSpPr/>
+          <p:nvPr/>
+        </p:nvSpPr>
+        <p:spPr>
+          <a:xfrm>
+            <a:off x="2194560" y="3090672"/>
+            <a:ext cx="6309360" cy="228600"/>
+          </a:xfrm>
+          <a:prstGeom prst="rect">
+            <a:avLst/>
+          </a:prstGeom>
+          <a:noFill/>
+          <a:ln/>
+        </p:spPr>
+        <p:txBody>
+          <a:bodyPr wrap="square" lIns="0" tIns="0" rIns="0" bIns="0" rtlCol="0" anchor="ctr"/>
+          <a:lstStyle/>
+          <a:p>
+            <a:pPr indent="0" marL="0">
+              <a:buNone/>
+            </a:pPr>
+            <a:r>
+              <a:rPr lang="en-US" sz="900" i="1" dirty="0">
+                <a:solidFill>
+                  <a:srgbClr val="334155"/>
+                </a:solidFill>
+                <a:latin typeface="Consolas" pitchFamily="34" charset="0"/>
+                <a:ea typeface="Consolas" pitchFamily="34" charset="-122"/>
+                <a:cs typeface="Consolas" pitchFamily="34" charset="-120"/>
+              </a:rPr>
+              <a:t>Mario Rossi · matr. 401929 · uscito 12/03/2026 · motivo: Dimissioni</a:t>
+            </a:r>
+            <a:endParaRPr lang="en-US" sz="900" dirty="0"/>
+          </a:p>
+        </p:txBody>
+      </p:sp>
+      <p:sp>
+        <p:nvSpPr>
+          <p:cNvPr id="20" name="Text 18"/>
+          <p:cNvSpPr/>
+          <p:nvPr/>
+        </p:nvSpPr>
+        <p:spPr>
+          <a:xfrm>
+            <a:off x="1143000" y="3319272"/>
+            <a:ext cx="731520" cy="228600"/>
+          </a:xfrm>
+          <a:prstGeom prst="rect">
+            <a:avLst/>
+          </a:prstGeom>
+          <a:noFill/>
+          <a:ln/>
+        </p:spPr>
+        <p:txBody>
+          <a:bodyPr wrap="square" lIns="0" tIns="0" rIns="0" bIns="0" rtlCol="0" anchor="ctr"/>
+          <a:lstStyle/>
+          <a:p>
+            <a:pPr indent="0" marL="0">
+              <a:buNone/>
+            </a:pPr>
+            <a:r>
+              <a:rPr lang="en-US" sz="900" b="1" dirty="0">
+                <a:solidFill>
+                  <a:srgbClr val="64748B"/>
+                </a:solidFill>
+                <a:latin typeface="Calibri" pitchFamily="34" charset="0"/>
+                <a:ea typeface="Calibri" pitchFamily="34" charset="-122"/>
+                <a:cs typeface="Calibri" pitchFamily="34" charset="-120"/>
+              </a:rPr>
+              <a:t>Sblocca: </a:t>
+            </a:r>
+            <a:endParaRPr lang="en-US" sz="900" dirty="0"/>
+          </a:p>
+        </p:txBody>
+      </p:sp>
+      <p:sp>
+        <p:nvSpPr>
+          <p:cNvPr id="21" name="Text 19"/>
+          <p:cNvSpPr/>
+          <p:nvPr/>
+        </p:nvSpPr>
+        <p:spPr>
+          <a:xfrm>
+            <a:off x="1874520" y="3319272"/>
+            <a:ext cx="6675120" cy="228600"/>
+          </a:xfrm>
+          <a:prstGeom prst="rect">
+            <a:avLst/>
+          </a:prstGeom>
+          <a:noFill/>
+          <a:ln/>
+        </p:spPr>
+        <p:txBody>
+          <a:bodyPr wrap="square" lIns="0" tIns="0" rIns="0" bIns="0" rtlCol="0" anchor="ctr"/>
+          <a:lstStyle/>
+          <a:p>
+            <a:pPr indent="0" marL="0">
+              <a:buNone/>
+            </a:pPr>
+            <a:r>
+              <a:rPr lang="en-US" sz="950" b="1" dirty="0">
+                <a:solidFill>
+                  <a:srgbClr val="7C3AED"/>
+                </a:solidFill>
+                <a:latin typeface="Calibri" pitchFamily="34" charset="0"/>
+                <a:ea typeface="Calibri" pitchFamily="34" charset="-122"/>
+                <a:cs typeface="Calibri" pitchFamily="34" charset="-120"/>
+              </a:rPr>
+              <a:t>Soci usciti · Crescita netta · Crescita % (cioè il bilancio annuale soci)</a:t>
+            </a:r>
+            <a:endParaRPr lang="en-US" sz="950" dirty="0"/>
+          </a:p>
+        </p:txBody>
+      </p:sp>
+      <p:sp>
+        <p:nvSpPr>
+          <p:cNvPr id="22" name="Shape 20"/>
+          <p:cNvSpPr/>
+          <p:nvPr/>
+        </p:nvSpPr>
+        <p:spPr>
+          <a:xfrm>
+            <a:off x="457200" y="3657600"/>
+            <a:ext cx="8229600" cy="914400"/>
           </a:xfrm>
           <a:prstGeom prst="roundRect">
             <a:avLst>
-              <a:gd name="adj" fmla="val 10526"/>
+              <a:gd name="adj" fmla="val 10000"/>
             </a:avLst>
           </a:prstGeom>
           <a:solidFill>
@@ -9135,34 +9419,34 @@
       </p:sp>
       <p:sp>
         <p:nvSpPr>
-          <p:cNvPr id="10" name="Shape 8"/>
-          <p:cNvSpPr/>
-          <p:nvPr/>
-        </p:nvSpPr>
-        <p:spPr>
-          <a:xfrm>
-            <a:off x="594360" y="2715768"/>
-            <a:ext cx="384048" cy="384048"/>
+          <p:cNvPr id="23" name="Shape 21"/>
+          <p:cNvSpPr/>
+          <p:nvPr/>
+        </p:nvSpPr>
+        <p:spPr>
+          <a:xfrm>
+            <a:off x="594360" y="3931920"/>
+            <a:ext cx="365760" cy="365760"/>
           </a:xfrm>
           <a:prstGeom prst="ellipse">
             <a:avLst/>
           </a:prstGeom>
           <a:solidFill>
-            <a:srgbClr val="DC2626"/>
+            <a:srgbClr val="0055FF"/>
           </a:solidFill>
           <a:ln/>
         </p:spPr>
       </p:sp>
       <p:sp>
         <p:nvSpPr>
-          <p:cNvPr id="11" name="Text 9"/>
-          <p:cNvSpPr/>
-          <p:nvPr/>
-        </p:nvSpPr>
-        <p:spPr>
-          <a:xfrm>
-            <a:off x="594360" y="2715768"/>
-            <a:ext cx="384048" cy="384048"/>
+          <p:cNvPr id="24" name="Text 22"/>
+          <p:cNvSpPr/>
+          <p:nvPr/>
+        </p:nvSpPr>
+        <p:spPr>
+          <a:xfrm>
+            <a:off x="594360" y="3931920"/>
+            <a:ext cx="365760" cy="365760"/>
           </a:xfrm>
           <a:prstGeom prst="rect">
             <a:avLst/>
@@ -9194,14 +9478,14 @@
       </p:sp>
       <p:sp>
         <p:nvSpPr>
-          <p:cNvPr id="12" name="Text 10"/>
-          <p:cNvSpPr/>
-          <p:nvPr/>
-        </p:nvSpPr>
-        <p:spPr>
-          <a:xfrm>
-            <a:off x="1188720" y="2606040"/>
-            <a:ext cx="7315200" cy="365760"/>
+          <p:cNvPr id="25" name="Text 23"/>
+          <p:cNvSpPr/>
+          <p:nvPr/>
+        </p:nvSpPr>
+        <p:spPr>
+          <a:xfrm>
+            <a:off x="1143000" y="3749040"/>
+            <a:ext cx="4572000" cy="274320"/>
           </a:xfrm>
           <a:prstGeom prst="rect">
             <a:avLst/>
@@ -9217,7 +9501,7 @@
               <a:buNone/>
             </a:pPr>
             <a:r>
-              <a:rPr lang="en-US" sz="1400" b="1" dirty="0">
+              <a:rPr lang="en-US" sz="1200" b="1" dirty="0">
                 <a:solidFill>
                   <a:srgbClr val="0F172A"/>
                 </a:solidFill>
@@ -9225,65 +9509,221 @@
                 <a:ea typeface="Trebuchet MS" pitchFamily="34" charset="-122"/>
                 <a:cs typeface="Trebuchet MS" pitchFamily="34" charset="-120"/>
               </a:rPr>
-              <a:t>L'accesso all'app è pubblico o riservato ai Lions?</a:t>
-            </a:r>
-            <a:endParaRPr lang="en-US" sz="1400" dirty="0"/>
-          </a:p>
-        </p:txBody>
-      </p:sp>
-      <p:sp>
-        <p:nvSpPr>
-          <p:cNvPr id="13" name="Text 11"/>
-          <p:cNvSpPr/>
-          <p:nvPr/>
-        </p:nvSpPr>
-        <p:spPr>
-          <a:xfrm>
-            <a:off x="1188720" y="2971800"/>
-            <a:ext cx="7315200" cy="365760"/>
-          </a:xfrm>
-          <a:prstGeom prst="rect">
-            <a:avLst/>
-          </a:prstGeom>
-          <a:noFill/>
-          <a:ln/>
-        </p:spPr>
-        <p:txBody>
-          <a:bodyPr wrap="square" lIns="0" tIns="0" rIns="0" bIns="0" rtlCol="0" anchor="t"/>
+              <a:t>Storico eventi sui club</a:t>
+            </a:r>
+            <a:endParaRPr lang="en-US" sz="1200" dirty="0"/>
+          </a:p>
+        </p:txBody>
+      </p:sp>
+      <p:sp>
+        <p:nvSpPr>
+          <p:cNvPr id="26" name="Text 24"/>
+          <p:cNvSpPr/>
+          <p:nvPr/>
+        </p:nvSpPr>
+        <p:spPr>
+          <a:xfrm>
+            <a:off x="5760720" y="3749040"/>
+            <a:ext cx="2743200" cy="274320"/>
+          </a:xfrm>
+          <a:prstGeom prst="rect">
+            <a:avLst/>
+          </a:prstGeom>
+          <a:noFill/>
+          <a:ln/>
+        </p:spPr>
+        <p:txBody>
+          <a:bodyPr wrap="square" lIns="0" tIns="0" rIns="0" bIns="0" rtlCol="0" anchor="ctr"/>
+          <a:lstStyle/>
+          <a:p>
+            <a:pPr algn="r" indent="0" marL="0">
+              <a:buNone/>
+            </a:pPr>
+            <a:r>
+              <a:rPr lang="en-US" sz="1000" b="1" i="1" dirty="0">
+                <a:solidFill>
+                  <a:srgbClr val="0055FF"/>
+                </a:solidFill>
+                <a:latin typeface="Consolas" pitchFamily="34" charset="0"/>
+                <a:ea typeface="Consolas" pitchFamily="34" charset="-122"/>
+                <a:cs typeface="Consolas" pitchFamily="34" charset="-120"/>
+              </a:rPr>
+              <a:t>club_history.csv</a:t>
+            </a:r>
+            <a:endParaRPr lang="en-US" sz="1000" dirty="0"/>
+          </a:p>
+        </p:txBody>
+      </p:sp>
+      <p:sp>
+        <p:nvSpPr>
+          <p:cNvPr id="27" name="Text 25"/>
+          <p:cNvSpPr/>
+          <p:nvPr/>
+        </p:nvSpPr>
+        <p:spPr>
+          <a:xfrm>
+            <a:off x="1143000" y="4050792"/>
+            <a:ext cx="1097280" cy="228600"/>
+          </a:xfrm>
+          <a:prstGeom prst="rect">
+            <a:avLst/>
+          </a:prstGeom>
+          <a:noFill/>
+          <a:ln/>
+        </p:spPr>
+        <p:txBody>
+          <a:bodyPr wrap="square" lIns="0" tIns="0" rIns="0" bIns="0" rtlCol="0" anchor="ctr"/>
           <a:lstStyle/>
           <a:p>
             <a:pPr indent="0" marL="0">
               <a:buNone/>
             </a:pPr>
             <a:r>
-              <a:rPr lang="en-US" sz="1100" i="1" dirty="0">
-                <a:solidFill>
-                  <a:srgbClr val="334155"/>
+              <a:rPr lang="en-US" sz="900" b="1" dirty="0">
+                <a:solidFill>
+                  <a:srgbClr val="64748B"/>
                 </a:solidFill>
                 <a:latin typeface="Calibri" pitchFamily="34" charset="0"/>
                 <a:ea typeface="Calibri" pitchFamily="34" charset="-122"/>
                 <a:cs typeface="Calibri" pitchFamily="34" charset="-120"/>
               </a:rPr>
-              <a:t>Oggi è pubblico. Vogliamo nascondere matricole, email e telefono ai non loggati? Implica la feature "Login con ruoli" (slide 4).</a:t>
-            </a:r>
-            <a:endParaRPr lang="en-US" sz="1100" dirty="0"/>
-          </a:p>
-        </p:txBody>
-      </p:sp>
-      <p:sp>
-        <p:nvSpPr>
-          <p:cNvPr id="14" name="Shape 12"/>
-          <p:cNvSpPr/>
-          <p:nvPr/>
-        </p:nvSpPr>
-        <p:spPr>
-          <a:xfrm>
-            <a:off x="457200" y="3429000"/>
-            <a:ext cx="8229600" cy="868680"/>
+              <a:t>Esempio riga: </a:t>
+            </a:r>
+            <a:endParaRPr lang="en-US" sz="900" dirty="0"/>
+          </a:p>
+        </p:txBody>
+      </p:sp>
+      <p:sp>
+        <p:nvSpPr>
+          <p:cNvPr id="28" name="Text 26"/>
+          <p:cNvSpPr/>
+          <p:nvPr/>
+        </p:nvSpPr>
+        <p:spPr>
+          <a:xfrm>
+            <a:off x="2194560" y="4050792"/>
+            <a:ext cx="6309360" cy="228600"/>
+          </a:xfrm>
+          <a:prstGeom prst="rect">
+            <a:avLst/>
+          </a:prstGeom>
+          <a:noFill/>
+          <a:ln/>
+        </p:spPr>
+        <p:txBody>
+          <a:bodyPr wrap="square" lIns="0" tIns="0" rIns="0" bIns="0" rtlCol="0" anchor="ctr"/>
+          <a:lstStyle/>
+          <a:p>
+            <a:pPr indent="0" marL="0">
+              <a:buNone/>
+            </a:pPr>
+            <a:r>
+              <a:rPr lang="en-US" sz="900" i="1" dirty="0">
+                <a:solidFill>
+                  <a:srgbClr val="334155"/>
+                </a:solidFill>
+                <a:latin typeface="Consolas" pitchFamily="34" charset="0"/>
+                <a:ea typeface="Consolas" pitchFamily="34" charset="-122"/>
+                <a:cs typeface="Consolas" pitchFamily="34" charset="-120"/>
+              </a:rPr>
+              <a:t>Lions Club Cortona-Nuovo · stato: Nuovo · data: 15/09/2025 · note: fondato</a:t>
+            </a:r>
+            <a:endParaRPr lang="en-US" sz="900" dirty="0"/>
+          </a:p>
+        </p:txBody>
+      </p:sp>
+      <p:sp>
+        <p:nvSpPr>
+          <p:cNvPr id="29" name="Text 27"/>
+          <p:cNvSpPr/>
+          <p:nvPr/>
+        </p:nvSpPr>
+        <p:spPr>
+          <a:xfrm>
+            <a:off x="1143000" y="4279392"/>
+            <a:ext cx="731520" cy="228600"/>
+          </a:xfrm>
+          <a:prstGeom prst="rect">
+            <a:avLst/>
+          </a:prstGeom>
+          <a:noFill/>
+          <a:ln/>
+        </p:spPr>
+        <p:txBody>
+          <a:bodyPr wrap="square" lIns="0" tIns="0" rIns="0" bIns="0" rtlCol="0" anchor="ctr"/>
+          <a:lstStyle/>
+          <a:p>
+            <a:pPr indent="0" marL="0">
+              <a:buNone/>
+            </a:pPr>
+            <a:r>
+              <a:rPr lang="en-US" sz="900" b="1" dirty="0">
+                <a:solidFill>
+                  <a:srgbClr val="64748B"/>
+                </a:solidFill>
+                <a:latin typeface="Calibri" pitchFamily="34" charset="0"/>
+                <a:ea typeface="Calibri" pitchFamily="34" charset="-122"/>
+                <a:cs typeface="Calibri" pitchFamily="34" charset="-120"/>
+              </a:rPr>
+              <a:t>Sblocca: </a:t>
+            </a:r>
+            <a:endParaRPr lang="en-US" sz="900" dirty="0"/>
+          </a:p>
+        </p:txBody>
+      </p:sp>
+      <p:sp>
+        <p:nvSpPr>
+          <p:cNvPr id="30" name="Text 28"/>
+          <p:cNvSpPr/>
+          <p:nvPr/>
+        </p:nvSpPr>
+        <p:spPr>
+          <a:xfrm>
+            <a:off x="1874520" y="4279392"/>
+            <a:ext cx="6675120" cy="228600"/>
+          </a:xfrm>
+          <a:prstGeom prst="rect">
+            <a:avLst/>
+          </a:prstGeom>
+          <a:noFill/>
+          <a:ln/>
+        </p:spPr>
+        <p:txBody>
+          <a:bodyPr wrap="square" lIns="0" tIns="0" rIns="0" bIns="0" rtlCol="0" anchor="ctr"/>
+          <a:lstStyle/>
+          <a:p>
+            <a:pPr indent="0" marL="0">
+              <a:buNone/>
+            </a:pPr>
+            <a:r>
+              <a:rPr lang="en-US" sz="950" b="1" dirty="0">
+                <a:solidFill>
+                  <a:srgbClr val="0055FF"/>
+                </a:solidFill>
+                <a:latin typeface="Calibri" pitchFamily="34" charset="0"/>
+                <a:ea typeface="Calibri" pitchFamily="34" charset="-122"/>
+                <a:cs typeface="Calibri" pitchFamily="34" charset="-120"/>
+              </a:rPr>
+              <a:t>Club nuovi · Riorganizzati · Chiusi · Sospeso nell'anno</a:t>
+            </a:r>
+            <a:endParaRPr lang="en-US" sz="950" dirty="0"/>
+          </a:p>
+        </p:txBody>
+      </p:sp>
+      <p:sp>
+        <p:nvSpPr>
+          <p:cNvPr id="31" name="Shape 29"/>
+          <p:cNvSpPr/>
+          <p:nvPr/>
+        </p:nvSpPr>
+        <p:spPr>
+          <a:xfrm>
+            <a:off x="457200" y="4636008"/>
+            <a:ext cx="8229600" cy="274320"/>
           </a:xfrm>
           <a:prstGeom prst="roundRect">
             <a:avLst>
-              <a:gd name="adj" fmla="val 10526"/>
+              <a:gd name="adj" fmla="val 33333"/>
             </a:avLst>
           </a:prstGeom>
           <a:solidFill>
@@ -9291,7 +9731,7 @@
           </a:solidFill>
           <a:ln w="12700">
             <a:solidFill>
-              <a:srgbClr val="E2E8F0"/>
+              <a:srgbClr val="FFE500"/>
             </a:solidFill>
             <a:prstDash val="solid"/>
           </a:ln>
@@ -9306,73 +9746,14 @@
       </p:sp>
       <p:sp>
         <p:nvSpPr>
-          <p:cNvPr id="15" name="Shape 13"/>
-          <p:cNvSpPr/>
-          <p:nvPr/>
-        </p:nvSpPr>
-        <p:spPr>
-          <a:xfrm>
-            <a:off x="594360" y="3675888"/>
-            <a:ext cx="384048" cy="384048"/>
-          </a:xfrm>
-          <a:prstGeom prst="ellipse">
-            <a:avLst/>
-          </a:prstGeom>
-          <a:solidFill>
-            <a:srgbClr val="DC2626"/>
-          </a:solidFill>
-          <a:ln/>
-        </p:spPr>
-      </p:sp>
-      <p:sp>
-        <p:nvSpPr>
-          <p:cNvPr id="16" name="Text 14"/>
-          <p:cNvSpPr/>
-          <p:nvPr/>
-        </p:nvSpPr>
-        <p:spPr>
-          <a:xfrm>
-            <a:off x="594360" y="3675888"/>
-            <a:ext cx="384048" cy="384048"/>
-          </a:xfrm>
-          <a:prstGeom prst="rect">
-            <a:avLst/>
-          </a:prstGeom>
-          <a:noFill/>
-          <a:ln/>
-        </p:spPr>
-        <p:txBody>
-          <a:bodyPr wrap="square" lIns="0" tIns="0" rIns="0" bIns="0" rtlCol="0" anchor="ctr"/>
-          <a:lstStyle/>
-          <a:p>
-            <a:pPr algn="ctr" indent="0" marL="0">
-              <a:buNone/>
-            </a:pPr>
-            <a:r>
-              <a:rPr lang="en-US" sz="1800" b="1" dirty="0">
-                <a:solidFill>
-                  <a:srgbClr val="FFFFFF"/>
-                </a:solidFill>
-                <a:latin typeface="Trebuchet MS" pitchFamily="34" charset="0"/>
-                <a:ea typeface="Trebuchet MS" pitchFamily="34" charset="-122"/>
-                <a:cs typeface="Trebuchet MS" pitchFamily="34" charset="-120"/>
-              </a:rPr>
-              <a:t>3</a:t>
-            </a:r>
-            <a:endParaRPr lang="en-US" sz="1800" dirty="0"/>
-          </a:p>
-        </p:txBody>
-      </p:sp>
-      <p:sp>
-        <p:nvSpPr>
-          <p:cNvPr id="17" name="Text 15"/>
-          <p:cNvSpPr/>
-          <p:nvPr/>
-        </p:nvSpPr>
-        <p:spPr>
-          <a:xfrm>
-            <a:off x="1188720" y="3566160"/>
-            <a:ext cx="7315200" cy="365760"/>
+          <p:cNvPr id="32" name="Text 30"/>
+          <p:cNvSpPr/>
+          <p:nvPr/>
+        </p:nvSpPr>
+        <p:spPr>
+          <a:xfrm>
+            <a:off x="594360" y="4636008"/>
+            <a:ext cx="7955280" cy="274320"/>
           </a:xfrm>
           <a:prstGeom prst="rect">
             <a:avLst/>
@@ -9388,46 +9769,7 @@
               <a:buNone/>
             </a:pPr>
             <a:r>
-              <a:rPr lang="en-US" sz="1400" b="1" dirty="0">
-                <a:solidFill>
-                  <a:srgbClr val="0F172A"/>
-                </a:solidFill>
-                <a:latin typeface="Trebuchet MS" pitchFamily="34" charset="0"/>
-                <a:ea typeface="Trebuchet MS" pitchFamily="34" charset="-122"/>
-                <a:cs typeface="Trebuchet MS" pitchFamily="34" charset="-120"/>
-              </a:rPr>
-              <a:t>Quale priorità preferite vedere prima nei prossimi 3 mesi?</a:t>
-            </a:r>
-            <a:endParaRPr lang="en-US" sz="1400" dirty="0"/>
-          </a:p>
-        </p:txBody>
-      </p:sp>
-      <p:sp>
-        <p:nvSpPr>
-          <p:cNvPr id="18" name="Text 16"/>
-          <p:cNvSpPr/>
-          <p:nvPr/>
-        </p:nvSpPr>
-        <p:spPr>
-          <a:xfrm>
-            <a:off x="1188720" y="3931920"/>
-            <a:ext cx="7315200" cy="365760"/>
-          </a:xfrm>
-          <a:prstGeom prst="rect">
-            <a:avLst/>
-          </a:prstGeom>
-          <a:noFill/>
-          <a:ln/>
-        </p:spPr>
-        <p:txBody>
-          <a:bodyPr wrap="square" lIns="0" tIns="0" rIns="0" bIns="0" rtlCol="0" anchor="t"/>
-          <a:lstStyle/>
-          <a:p>
-            <a:pPr indent="0" marL="0">
-              <a:buNone/>
-            </a:pPr>
-            <a:r>
-              <a:rPr lang="en-US" sz="1100" i="1" dirty="0">
+              <a:rPr lang="en-US" sz="1000" b="1" dirty="0">
                 <a:solidFill>
                   <a:srgbClr val="334155"/>
                 </a:solidFill>
@@ -9435,15 +9777,15 @@
                 <a:ea typeface="Calibri" pitchFamily="34" charset="-122"/>
                 <a:cs typeface="Calibri" pitchFamily="34" charset="-120"/>
               </a:rPr>
-              <a:t>Tra le 5 feature di slide 4. Indicate 1ª scelta e 2ª scelta.</a:t>
-            </a:r>
-            <a:endParaRPr lang="en-US" sz="1100" dirty="0"/>
-          </a:p>
-        </p:txBody>
-      </p:sp>
-      <p:sp>
-        <p:nvSpPr>
-          <p:cNvPr id="19" name="Text 17"/>
+              <a:t>📨  Azione proposta: lettera ufficiale dal Distretto al Multidistretto per richiedere questi due export</a:t>
+            </a:r>
+            <a:endParaRPr lang="en-US" sz="1000" dirty="0"/>
+          </a:p>
+        </p:txBody>
+      </p:sp>
+      <p:sp>
+        <p:nvSpPr>
+          <p:cNvPr id="33" name="Text 31"/>
           <p:cNvSpPr/>
           <p:nvPr/>
         </p:nvSpPr>
@@ -9482,7 +9824,7 @@
       </p:sp>
       <p:sp>
         <p:nvSpPr>
-          <p:cNvPr id="20" name="Text 18"/>
+          <p:cNvPr id="34" name="Text 32"/>
           <p:cNvSpPr/>
           <p:nvPr/>
         </p:nvSpPr>
@@ -9578,13 +9920,13 @@
             <a:r>
               <a:rPr lang="en-US" sz="2600" b="1" dirty="0">
                 <a:solidFill>
-                  <a:srgbClr val="0F172A"/>
+                  <a:srgbClr val="DC2626"/>
                 </a:solidFill>
                 <a:latin typeface="Trebuchet MS" pitchFamily="34" charset="0"/>
                 <a:ea typeface="Trebuchet MS" pitchFamily="34" charset="-122"/>
                 <a:cs typeface="Trebuchet MS" pitchFamily="34" charset="-120"/>
               </a:rPr>
-              <a:t>Roadmap proposta</a:t>
+              <a:t>3 · Decisioni che ci servono oggi</a:t>
             </a:r>
             <a:endParaRPr lang="en-US" sz="2600" dirty="0"/>
           </a:p>
@@ -9623,7 +9965,7 @@
                 <a:ea typeface="Calibri" pitchFamily="34" charset="-122"/>
                 <a:cs typeface="Calibri" pitchFamily="34" charset="-120"/>
               </a:rPr>
-              <a:t>Sequenza temporale dipendente dalle decisioni di oggi</a:t>
+              <a:t>Tre scelte aperte. Le risposte cambiano l'ordine delle priorità di sviluppo.</a:t>
             </a:r>
             <a:endParaRPr lang="en-US" sz="1300" dirty="0"/>
           </a:p>
@@ -9637,12 +9979,12 @@
         </p:nvSpPr>
         <p:spPr>
           <a:xfrm>
-            <a:off x="457200" y="1417320"/>
-            <a:ext cx="2651760" cy="3200400"/>
+            <a:off x="457200" y="1508760"/>
+            <a:ext cx="8229600" cy="868680"/>
           </a:xfrm>
           <a:prstGeom prst="roundRect">
             <a:avLst>
-              <a:gd name="adj" fmla="val 3448"/>
+              <a:gd name="adj" fmla="val 10526"/>
             </a:avLst>
           </a:prstGeom>
           <a:solidFill>
@@ -9671,14 +10013,14 @@
         </p:nvSpPr>
         <p:spPr>
           <a:xfrm>
-            <a:off x="457200" y="1417320"/>
-            <a:ext cx="2651760" cy="502920"/>
-          </a:xfrm>
-          <a:prstGeom prst="rect">
+            <a:off x="594360" y="1755648"/>
+            <a:ext cx="384048" cy="384048"/>
+          </a:xfrm>
+          <a:prstGeom prst="ellipse">
             <a:avLst/>
           </a:prstGeom>
           <a:solidFill>
-            <a:srgbClr val="0055FF"/>
+            <a:srgbClr val="DC2626"/>
           </a:solidFill>
           <a:ln/>
         </p:spPr>
@@ -9691,24 +10033,24 @@
         </p:nvSpPr>
         <p:spPr>
           <a:xfrm>
-            <a:off x="594360" y="1463040"/>
-            <a:ext cx="2377440" cy="256032"/>
-          </a:xfrm>
-          <a:prstGeom prst="rect">
-            <a:avLst/>
-          </a:prstGeom>
-          <a:noFill/>
-          <a:ln/>
-        </p:spPr>
-        <p:txBody>
-          <a:bodyPr wrap="square" lIns="0" tIns="0" rIns="0" bIns="0" rtlCol="0" anchor="ctr"/>
-          <a:lstStyle/>
-          <a:p>
-            <a:pPr indent="0" marL="0">
-              <a:buNone/>
-            </a:pPr>
-            <a:r>
-              <a:rPr lang="en-US" sz="1100" b="1" dirty="0">
+            <a:off x="594360" y="1755648"/>
+            <a:ext cx="384048" cy="384048"/>
+          </a:xfrm>
+          <a:prstGeom prst="rect">
+            <a:avLst/>
+          </a:prstGeom>
+          <a:noFill/>
+          <a:ln/>
+        </p:spPr>
+        <p:txBody>
+          <a:bodyPr wrap="square" lIns="0" tIns="0" rIns="0" bIns="0" rtlCol="0" anchor="ctr"/>
+          <a:lstStyle/>
+          <a:p>
+            <a:pPr algn="ctr" indent="0" marL="0">
+              <a:buNone/>
+            </a:pPr>
+            <a:r>
+              <a:rPr lang="en-US" sz="1800" b="1" dirty="0">
                 <a:solidFill>
                   <a:srgbClr val="FFFFFF"/>
                 </a:solidFill>
@@ -9716,9 +10058,9 @@
                 <a:ea typeface="Trebuchet MS" pitchFamily="34" charset="-122"/>
                 <a:cs typeface="Trebuchet MS" pitchFamily="34" charset="-120"/>
               </a:rPr>
-              <a:t>Giugno–Settembre 2026</a:t>
-            </a:r>
-            <a:endParaRPr lang="en-US" sz="1100" dirty="0"/>
+              <a:t>1</a:t>
+            </a:r>
+            <a:endParaRPr lang="en-US" sz="1800" dirty="0"/>
           </a:p>
         </p:txBody>
       </p:sp>
@@ -9730,8 +10072,8 @@
         </p:nvSpPr>
         <p:spPr>
           <a:xfrm>
-            <a:off x="594360" y="1691640"/>
-            <a:ext cx="2377440" cy="201168"/>
+            <a:off x="1188720" y="1645920"/>
+            <a:ext cx="7315200" cy="365760"/>
           </a:xfrm>
           <a:prstGeom prst="rect">
             <a:avLst/>
@@ -9747,102 +10089,56 @@
               <a:buNone/>
             </a:pPr>
             <a:r>
-              <a:rPr lang="en-US" sz="900" i="1" dirty="0">
-                <a:solidFill>
-                  <a:srgbClr val="FFFFFF"/>
+              <a:rPr lang="en-US" sz="1400" b="1" dirty="0">
+                <a:solidFill>
+                  <a:srgbClr val="0F172A"/>
+                </a:solidFill>
+                <a:latin typeface="Trebuchet MS" pitchFamily="34" charset="0"/>
+                <a:ea typeface="Trebuchet MS" pitchFamily="34" charset="-122"/>
+                <a:cs typeface="Trebuchet MS" pitchFamily="34" charset="-120"/>
+              </a:rPr>
+              <a:t>Chi gestisce gli import CSV in produzione?</a:t>
+            </a:r>
+            <a:endParaRPr lang="en-US" sz="1400" dirty="0"/>
+          </a:p>
+        </p:txBody>
+      </p:sp>
+      <p:sp>
+        <p:nvSpPr>
+          <p:cNvPr id="8" name="Text 6"/>
+          <p:cNvSpPr/>
+          <p:nvPr/>
+        </p:nvSpPr>
+        <p:spPr>
+          <a:xfrm>
+            <a:off x="1188720" y="2011680"/>
+            <a:ext cx="7315200" cy="365760"/>
+          </a:xfrm>
+          <a:prstGeom prst="rect">
+            <a:avLst/>
+          </a:prstGeom>
+          <a:noFill/>
+          <a:ln/>
+        </p:spPr>
+        <p:txBody>
+          <a:bodyPr wrap="square" lIns="0" tIns="0" rIns="0" bIns="0" rtlCol="0" anchor="t"/>
+          <a:lstStyle/>
+          <a:p>
+            <a:pPr indent="0" marL="0">
+              <a:buNone/>
+            </a:pPr>
+            <a:r>
+              <a:rPr lang="en-US" sz="1100" i="1" dirty="0">
+                <a:solidFill>
+                  <a:srgbClr val="334155"/>
                 </a:solidFill>
                 <a:latin typeface="Calibri" pitchFamily="34" charset="0"/>
                 <a:ea typeface="Calibri" pitchFamily="34" charset="-122"/>
                 <a:cs typeface="Calibri" pitchFamily="34" charset="-120"/>
               </a:rPr>
-              <a:t>FY 2026/27 · prima parte</a:t>
-            </a:r>
-            <a:endParaRPr lang="en-US" sz="900" dirty="0"/>
-          </a:p>
-        </p:txBody>
-      </p:sp>
-      <p:sp>
-        <p:nvSpPr>
-          <p:cNvPr id="8" name="Text 6"/>
-          <p:cNvSpPr/>
-          <p:nvPr/>
-        </p:nvSpPr>
-        <p:spPr>
-          <a:xfrm>
-            <a:off x="640080" y="2057400"/>
-            <a:ext cx="2331720" cy="2468880"/>
-          </a:xfrm>
-          <a:prstGeom prst="rect">
-            <a:avLst/>
-          </a:prstGeom>
-          <a:noFill/>
-          <a:ln/>
-        </p:spPr>
-        <p:txBody>
-          <a:bodyPr wrap="square" rtlCol="0" anchor="ctr"/>
-          <a:lstStyle/>
-          <a:p>
-            <a:pPr marL="342900" indent="-342900">
-              <a:spcAft>
-                <a:spcPts val="400"/>
-              </a:spcAft>
-              <a:buSzPct val="100000"/>
-              <a:buChar char="•"/>
-            </a:pPr>
-            <a:r>
-              <a:rPr lang="en-US" sz="1050" dirty="0">
-                <a:solidFill>
-                  <a:srgbClr val="334155"/>
-                </a:solidFill>
-                <a:latin typeface="Calibri" pitchFamily="34" charset="0"/>
-                <a:ea typeface="Calibri" pitchFamily="34" charset="-122"/>
-                <a:cs typeface="Calibri" pitchFamily="34" charset="-120"/>
-              </a:rPr>
-              <a:t>Login con ruoli (Socio / Officer di Club / Officer di Distretto)</a:t>
-            </a:r>
-            <a:endParaRPr lang="en-US" sz="1050" dirty="0"/>
-          </a:p>
-          <a:p>
-            <a:pPr marL="342900" indent="-342900">
-              <a:spcAft>
-                <a:spcPts val="400"/>
-              </a:spcAft>
-              <a:buSzPct val="100000"/>
-              <a:buChar char="•"/>
-            </a:pPr>
-            <a:r>
-              <a:rPr lang="en-US" sz="1050" dirty="0">
-                <a:solidFill>
-                  <a:srgbClr val="334155"/>
-                </a:solidFill>
-                <a:latin typeface="Calibri" pitchFamily="34" charset="0"/>
-                <a:ea typeface="Calibri" pitchFamily="34" charset="-122"/>
-                <a:cs typeface="Calibri" pitchFamily="34" charset="-120"/>
-              </a:rPr>
-              <a:t>Import semi-automatico CSV (autonomia Segreteria)</a:t>
-            </a:r>
-            <a:endParaRPr lang="en-US" sz="1050" dirty="0"/>
-          </a:p>
-          <a:p>
-            <a:pPr marL="342900" indent="-342900">
-              <a:spcAft>
-                <a:spcPts val="400"/>
-              </a:spcAft>
-              <a:buSzPct val="100000"/>
-              <a:buChar char="•"/>
-            </a:pPr>
-            <a:r>
-              <a:rPr lang="en-US" sz="1050" dirty="0">
-                <a:solidFill>
-                  <a:srgbClr val="334155"/>
-                </a:solidFill>
-                <a:latin typeface="Calibri" pitchFamily="34" charset="0"/>
-                <a:ea typeface="Calibri" pitchFamily="34" charset="-122"/>
-                <a:cs typeface="Calibri" pitchFamily="34" charset="-120"/>
-              </a:rPr>
-              <a:t>Inserimento attività online (form web)</a:t>
-            </a:r>
-            <a:endParaRPr lang="en-US" sz="1050" dirty="0"/>
+              <a:t>Segreteria distrettuale · Officer di Club · Solo amministratore tecnico esterno</a:t>
+            </a:r>
+            <a:endParaRPr lang="en-US" sz="1100" dirty="0"/>
           </a:p>
         </p:txBody>
       </p:sp>
@@ -9854,12 +10150,12 @@
         </p:nvSpPr>
         <p:spPr>
           <a:xfrm>
-            <a:off x="3246120" y="1417320"/>
-            <a:ext cx="2651760" cy="3200400"/>
+            <a:off x="457200" y="2468880"/>
+            <a:ext cx="8229600" cy="868680"/>
           </a:xfrm>
           <a:prstGeom prst="roundRect">
             <a:avLst>
-              <a:gd name="adj" fmla="val 3448"/>
+              <a:gd name="adj" fmla="val 10526"/>
             </a:avLst>
           </a:prstGeom>
           <a:solidFill>
@@ -9888,14 +10184,14 @@
         </p:nvSpPr>
         <p:spPr>
           <a:xfrm>
-            <a:off x="3246120" y="1417320"/>
-            <a:ext cx="2651760" cy="502920"/>
-          </a:xfrm>
-          <a:prstGeom prst="rect">
+            <a:off x="594360" y="2715768"/>
+            <a:ext cx="384048" cy="384048"/>
+          </a:xfrm>
+          <a:prstGeom prst="ellipse">
             <a:avLst/>
           </a:prstGeom>
           <a:solidFill>
-            <a:srgbClr val="7C3AED"/>
+            <a:srgbClr val="DC2626"/>
           </a:solidFill>
           <a:ln/>
         </p:spPr>
@@ -9908,24 +10204,24 @@
         </p:nvSpPr>
         <p:spPr>
           <a:xfrm>
-            <a:off x="3383280" y="1463040"/>
-            <a:ext cx="2377440" cy="256032"/>
-          </a:xfrm>
-          <a:prstGeom prst="rect">
-            <a:avLst/>
-          </a:prstGeom>
-          <a:noFill/>
-          <a:ln/>
-        </p:spPr>
-        <p:txBody>
-          <a:bodyPr wrap="square" lIns="0" tIns="0" rIns="0" bIns="0" rtlCol="0" anchor="ctr"/>
-          <a:lstStyle/>
-          <a:p>
-            <a:pPr indent="0" marL="0">
-              <a:buNone/>
-            </a:pPr>
-            <a:r>
-              <a:rPr lang="en-US" sz="1100" b="1" dirty="0">
+            <a:off x="594360" y="2715768"/>
+            <a:ext cx="384048" cy="384048"/>
+          </a:xfrm>
+          <a:prstGeom prst="rect">
+            <a:avLst/>
+          </a:prstGeom>
+          <a:noFill/>
+          <a:ln/>
+        </p:spPr>
+        <p:txBody>
+          <a:bodyPr wrap="square" lIns="0" tIns="0" rIns="0" bIns="0" rtlCol="0" anchor="ctr"/>
+          <a:lstStyle/>
+          <a:p>
+            <a:pPr algn="ctr" indent="0" marL="0">
+              <a:buNone/>
+            </a:pPr>
+            <a:r>
+              <a:rPr lang="en-US" sz="1800" b="1" dirty="0">
                 <a:solidFill>
                   <a:srgbClr val="FFFFFF"/>
                 </a:solidFill>
@@ -9933,9 +10229,9 @@
                 <a:ea typeface="Trebuchet MS" pitchFamily="34" charset="-122"/>
                 <a:cs typeface="Trebuchet MS" pitchFamily="34" charset="-120"/>
               </a:rPr>
-              <a:t>Ottobre 2026 – Marzo 2027</a:t>
-            </a:r>
-            <a:endParaRPr lang="en-US" sz="1100" dirty="0"/>
+              <a:t>2</a:t>
+            </a:r>
+            <a:endParaRPr lang="en-US" sz="1800" dirty="0"/>
           </a:p>
         </p:txBody>
       </p:sp>
@@ -9947,8 +10243,8 @@
         </p:nvSpPr>
         <p:spPr>
           <a:xfrm>
-            <a:off x="3383280" y="1691640"/>
-            <a:ext cx="2377440" cy="201168"/>
+            <a:off x="1188720" y="2606040"/>
+            <a:ext cx="7315200" cy="365760"/>
           </a:xfrm>
           <a:prstGeom prst="rect">
             <a:avLst/>
@@ -9964,123 +10260,56 @@
               <a:buNone/>
             </a:pPr>
             <a:r>
-              <a:rPr lang="en-US" sz="900" i="1" dirty="0">
-                <a:solidFill>
-                  <a:srgbClr val="FFFFFF"/>
+              <a:rPr lang="en-US" sz="1400" b="1" dirty="0">
+                <a:solidFill>
+                  <a:srgbClr val="0F172A"/>
+                </a:solidFill>
+                <a:latin typeface="Trebuchet MS" pitchFamily="34" charset="0"/>
+                <a:ea typeface="Trebuchet MS" pitchFamily="34" charset="-122"/>
+                <a:cs typeface="Trebuchet MS" pitchFamily="34" charset="-120"/>
+              </a:rPr>
+              <a:t>L'accesso all'app è pubblico o riservato ai Lions?</a:t>
+            </a:r>
+            <a:endParaRPr lang="en-US" sz="1400" dirty="0"/>
+          </a:p>
+        </p:txBody>
+      </p:sp>
+      <p:sp>
+        <p:nvSpPr>
+          <p:cNvPr id="13" name="Text 11"/>
+          <p:cNvSpPr/>
+          <p:nvPr/>
+        </p:nvSpPr>
+        <p:spPr>
+          <a:xfrm>
+            <a:off x="1188720" y="2971800"/>
+            <a:ext cx="7315200" cy="365760"/>
+          </a:xfrm>
+          <a:prstGeom prst="rect">
+            <a:avLst/>
+          </a:prstGeom>
+          <a:noFill/>
+          <a:ln/>
+        </p:spPr>
+        <p:txBody>
+          <a:bodyPr wrap="square" lIns="0" tIns="0" rIns="0" bIns="0" rtlCol="0" anchor="t"/>
+          <a:lstStyle/>
+          <a:p>
+            <a:pPr indent="0" marL="0">
+              <a:buNone/>
+            </a:pPr>
+            <a:r>
+              <a:rPr lang="en-US" sz="1100" i="1" dirty="0">
+                <a:solidFill>
+                  <a:srgbClr val="334155"/>
                 </a:solidFill>
                 <a:latin typeface="Calibri" pitchFamily="34" charset="0"/>
                 <a:ea typeface="Calibri" pitchFamily="34" charset="-122"/>
                 <a:cs typeface="Calibri" pitchFamily="34" charset="-120"/>
               </a:rPr>
-              <a:t>FY 2026/27 · seconda parte</a:t>
-            </a:r>
-            <a:endParaRPr lang="en-US" sz="900" dirty="0"/>
-          </a:p>
-        </p:txBody>
-      </p:sp>
-      <p:sp>
-        <p:nvSpPr>
-          <p:cNvPr id="13" name="Text 11"/>
-          <p:cNvSpPr/>
-          <p:nvPr/>
-        </p:nvSpPr>
-        <p:spPr>
-          <a:xfrm>
-            <a:off x="3429000" y="2057400"/>
-            <a:ext cx="2331720" cy="2468880"/>
-          </a:xfrm>
-          <a:prstGeom prst="rect">
-            <a:avLst/>
-          </a:prstGeom>
-          <a:noFill/>
-          <a:ln/>
-        </p:spPr>
-        <p:txBody>
-          <a:bodyPr wrap="square" rtlCol="0" anchor="ctr"/>
-          <a:lstStyle/>
-          <a:p>
-            <a:pPr marL="342900" indent="-342900">
-              <a:spcAft>
-                <a:spcPts val="400"/>
-              </a:spcAft>
-              <a:buSzPct val="100000"/>
-              <a:buChar char="•"/>
-            </a:pPr>
-            <a:r>
-              <a:rPr lang="en-US" sz="1050" dirty="0">
-                <a:solidFill>
-                  <a:srgbClr val="334155"/>
-                </a:solidFill>
-                <a:latin typeface="Calibri" pitchFamily="34" charset="0"/>
-                <a:ea typeface="Calibri" pitchFamily="34" charset="-122"/>
-                <a:cs typeface="Calibri" pitchFamily="34" charset="-120"/>
-              </a:rPr>
-              <a:t>Notifiche email automatiche (reminder, anniversari)</a:t>
-            </a:r>
-            <a:endParaRPr lang="en-US" sz="1050" dirty="0"/>
-          </a:p>
-          <a:p>
-            <a:pPr marL="342900" indent="-342900">
-              <a:spcAft>
-                <a:spcPts val="400"/>
-              </a:spcAft>
-              <a:buSzPct val="100000"/>
-              <a:buChar char="•"/>
-            </a:pPr>
-            <a:r>
-              <a:rPr lang="en-US" sz="1050" dirty="0">
-                <a:solidFill>
-                  <a:srgbClr val="334155"/>
-                </a:solidFill>
-                <a:latin typeface="Calibri" pitchFamily="34" charset="0"/>
-                <a:ea typeface="Calibri" pitchFamily="34" charset="-122"/>
-                <a:cs typeface="Calibri" pitchFamily="34" charset="-120"/>
-              </a:rPr>
-              <a:t>Export Excel da tutte le tabelle</a:t>
-            </a:r>
-            <a:endParaRPr lang="en-US" sz="1050" dirty="0"/>
-          </a:p>
-          <a:p>
-            <a:pPr marL="342900" indent="-342900">
-              <a:spcAft>
-                <a:spcPts val="400"/>
-              </a:spcAft>
-              <a:buSzPct val="100000"/>
-              <a:buChar char="•"/>
-            </a:pPr>
-            <a:r>
-              <a:rPr lang="en-US" sz="1050" dirty="0">
-                <a:solidFill>
-                  <a:srgbClr val="334155"/>
-                </a:solidFill>
-                <a:latin typeface="Calibri" pitchFamily="34" charset="0"/>
-                <a:ea typeface="Calibri" pitchFamily="34" charset="-122"/>
-                <a:cs typeface="Calibri" pitchFamily="34" charset="-120"/>
-              </a:rPr>
-              <a:t>Gestione verbali e atti del Direttivo</a:t>
-            </a:r>
-            <a:endParaRPr lang="en-US" sz="1050" dirty="0"/>
-          </a:p>
-          <a:p>
-            <a:pPr marL="342900" indent="-342900">
-              <a:spcAft>
-                <a:spcPts val="400"/>
-              </a:spcAft>
-              <a:buSzPct val="100000"/>
-              <a:buChar char="•"/>
-            </a:pPr>
-            <a:r>
-              <a:rPr lang="en-US" sz="1050" dirty="0">
-                <a:solidFill>
-                  <a:srgbClr val="334155"/>
-                </a:solidFill>
-                <a:latin typeface="Calibri" pitchFamily="34" charset="0"/>
-                <a:ea typeface="Calibri" pitchFamily="34" charset="-122"/>
-                <a:cs typeface="Calibri" pitchFamily="34" charset="-120"/>
-              </a:rPr>
-              <a:t>Quadri storici (se arrivano i dati da LCI)</a:t>
-            </a:r>
-            <a:endParaRPr lang="en-US" sz="1050" dirty="0"/>
+              <a:t>Oggi è pubblico. Vogliamo nascondere matricole, email e telefono ai non loggati? Implica la feature "Login con ruoli" (slide 4).</a:t>
+            </a:r>
+            <a:endParaRPr lang="en-US" sz="1100" dirty="0"/>
           </a:p>
         </p:txBody>
       </p:sp>
@@ -10092,12 +10321,12 @@
         </p:nvSpPr>
         <p:spPr>
           <a:xfrm>
-            <a:off x="6035040" y="1417320"/>
-            <a:ext cx="2651760" cy="3200400"/>
+            <a:off x="457200" y="3429000"/>
+            <a:ext cx="8229600" cy="868680"/>
           </a:xfrm>
           <a:prstGeom prst="roundRect">
             <a:avLst>
-              <a:gd name="adj" fmla="val 3448"/>
+              <a:gd name="adj" fmla="val 10526"/>
             </a:avLst>
           </a:prstGeom>
           <a:solidFill>
@@ -10126,14 +10355,14 @@
         </p:nvSpPr>
         <p:spPr>
           <a:xfrm>
-            <a:off x="6035040" y="1417320"/>
-            <a:ext cx="2651760" cy="502920"/>
-          </a:xfrm>
-          <a:prstGeom prst="rect">
+            <a:off x="594360" y="3675888"/>
+            <a:ext cx="384048" cy="384048"/>
+          </a:xfrm>
+          <a:prstGeom prst="ellipse">
             <a:avLst/>
           </a:prstGeom>
           <a:solidFill>
-            <a:srgbClr val="059669"/>
+            <a:srgbClr val="DC2626"/>
           </a:solidFill>
           <a:ln/>
         </p:spPr>
@@ -10146,24 +10375,24 @@
         </p:nvSpPr>
         <p:spPr>
           <a:xfrm>
-            <a:off x="6172200" y="1463040"/>
-            <a:ext cx="2377440" cy="256032"/>
-          </a:xfrm>
-          <a:prstGeom prst="rect">
-            <a:avLst/>
-          </a:prstGeom>
-          <a:noFill/>
-          <a:ln/>
-        </p:spPr>
-        <p:txBody>
-          <a:bodyPr wrap="square" lIns="0" tIns="0" rIns="0" bIns="0" rtlCol="0" anchor="ctr"/>
-          <a:lstStyle/>
-          <a:p>
-            <a:pPr indent="0" marL="0">
-              <a:buNone/>
-            </a:pPr>
-            <a:r>
-              <a:rPr lang="en-US" sz="1100" b="1" dirty="0">
+            <a:off x="594360" y="3675888"/>
+            <a:ext cx="384048" cy="384048"/>
+          </a:xfrm>
+          <a:prstGeom prst="rect">
+            <a:avLst/>
+          </a:prstGeom>
+          <a:noFill/>
+          <a:ln/>
+        </p:spPr>
+        <p:txBody>
+          <a:bodyPr wrap="square" lIns="0" tIns="0" rIns="0" bIns="0" rtlCol="0" anchor="ctr"/>
+          <a:lstStyle/>
+          <a:p>
+            <a:pPr algn="ctr" indent="0" marL="0">
+              <a:buNone/>
+            </a:pPr>
+            <a:r>
+              <a:rPr lang="en-US" sz="1800" b="1" dirty="0">
                 <a:solidFill>
                   <a:srgbClr val="FFFFFF"/>
                 </a:solidFill>
@@ -10171,9 +10400,9 @@
                 <a:ea typeface="Trebuchet MS" pitchFamily="34" charset="-122"/>
                 <a:cs typeface="Trebuchet MS" pitchFamily="34" charset="-120"/>
               </a:rPr>
-              <a:t>Aprile 2027 e oltre</a:t>
-            </a:r>
-            <a:endParaRPr lang="en-US" sz="1100" dirty="0"/>
+              <a:t>3</a:t>
+            </a:r>
+            <a:endParaRPr lang="en-US" sz="1800" dirty="0"/>
           </a:p>
         </p:txBody>
       </p:sp>
@@ -10185,8 +10414,8 @@
         </p:nvSpPr>
         <p:spPr>
           <a:xfrm>
-            <a:off x="6172200" y="1691640"/>
-            <a:ext cx="2377440" cy="201168"/>
+            <a:off x="1188720" y="3566160"/>
+            <a:ext cx="7315200" cy="365760"/>
           </a:xfrm>
           <a:prstGeom prst="rect">
             <a:avLst/>
@@ -10202,123 +10431,56 @@
               <a:buNone/>
             </a:pPr>
             <a:r>
-              <a:rPr lang="en-US" sz="900" i="1" dirty="0">
-                <a:solidFill>
-                  <a:srgbClr val="FFFFFF"/>
+              <a:rPr lang="en-US" sz="1400" b="1" dirty="0">
+                <a:solidFill>
+                  <a:srgbClr val="0F172A"/>
+                </a:solidFill>
+                <a:latin typeface="Trebuchet MS" pitchFamily="34" charset="0"/>
+                <a:ea typeface="Trebuchet MS" pitchFamily="34" charset="-122"/>
+                <a:cs typeface="Trebuchet MS" pitchFamily="34" charset="-120"/>
+              </a:rPr>
+              <a:t>Quale priorità preferite vedere prima nei prossimi 3 mesi?</a:t>
+            </a:r>
+            <a:endParaRPr lang="en-US" sz="1400" dirty="0"/>
+          </a:p>
+        </p:txBody>
+      </p:sp>
+      <p:sp>
+        <p:nvSpPr>
+          <p:cNvPr id="18" name="Text 16"/>
+          <p:cNvSpPr/>
+          <p:nvPr/>
+        </p:nvSpPr>
+        <p:spPr>
+          <a:xfrm>
+            <a:off x="1188720" y="3931920"/>
+            <a:ext cx="7315200" cy="365760"/>
+          </a:xfrm>
+          <a:prstGeom prst="rect">
+            <a:avLst/>
+          </a:prstGeom>
+          <a:noFill/>
+          <a:ln/>
+        </p:spPr>
+        <p:txBody>
+          <a:bodyPr wrap="square" lIns="0" tIns="0" rIns="0" bIns="0" rtlCol="0" anchor="t"/>
+          <a:lstStyle/>
+          <a:p>
+            <a:pPr indent="0" marL="0">
+              <a:buNone/>
+            </a:pPr>
+            <a:r>
+              <a:rPr lang="en-US" sz="1100" i="1" dirty="0">
+                <a:solidFill>
+                  <a:srgbClr val="334155"/>
                 </a:solidFill>
                 <a:latin typeface="Calibri" pitchFamily="34" charset="0"/>
                 <a:ea typeface="Calibri" pitchFamily="34" charset="-122"/>
                 <a:cs typeface="Calibri" pitchFamily="34" charset="-120"/>
               </a:rPr>
-              <a:t>FY 2027/28</a:t>
-            </a:r>
-            <a:endParaRPr lang="en-US" sz="900" dirty="0"/>
-          </a:p>
-        </p:txBody>
-      </p:sp>
-      <p:sp>
-        <p:nvSpPr>
-          <p:cNvPr id="18" name="Text 16"/>
-          <p:cNvSpPr/>
-          <p:nvPr/>
-        </p:nvSpPr>
-        <p:spPr>
-          <a:xfrm>
-            <a:off x="6217920" y="2057400"/>
-            <a:ext cx="2331720" cy="2468880"/>
-          </a:xfrm>
-          <a:prstGeom prst="rect">
-            <a:avLst/>
-          </a:prstGeom>
-          <a:noFill/>
-          <a:ln/>
-        </p:spPr>
-        <p:txBody>
-          <a:bodyPr wrap="square" rtlCol="0" anchor="ctr"/>
-          <a:lstStyle/>
-          <a:p>
-            <a:pPr marL="342900" indent="-342900">
-              <a:spcAft>
-                <a:spcPts val="400"/>
-              </a:spcAft>
-              <a:buSzPct val="100000"/>
-              <a:buChar char="•"/>
-            </a:pPr>
-            <a:r>
-              <a:rPr lang="en-US" sz="1050" dirty="0">
-                <a:solidFill>
-                  <a:srgbClr val="334155"/>
-                </a:solidFill>
-                <a:latin typeface="Calibri" pitchFamily="34" charset="0"/>
-                <a:ea typeface="Calibri" pitchFamily="34" charset="-122"/>
-                <a:cs typeface="Calibri" pitchFamily="34" charset="-120"/>
-              </a:rPr>
-              <a:t>App mobile nativa (iOS · Android)</a:t>
-            </a:r>
-            <a:endParaRPr lang="en-US" sz="1050" dirty="0"/>
-          </a:p>
-          <a:p>
-            <a:pPr marL="342900" indent="-342900">
-              <a:spcAft>
-                <a:spcPts val="400"/>
-              </a:spcAft>
-              <a:buSzPct val="100000"/>
-              <a:buChar char="•"/>
-            </a:pPr>
-            <a:r>
-              <a:rPr lang="en-US" sz="1050" dirty="0">
-                <a:solidFill>
-                  <a:srgbClr val="334155"/>
-                </a:solidFill>
-                <a:latin typeface="Calibri" pitchFamily="34" charset="0"/>
-                <a:ea typeface="Calibri" pitchFamily="34" charset="-122"/>
-                <a:cs typeface="Calibri" pitchFamily="34" charset="-120"/>
-              </a:rPr>
-              <a:t>Assistente AI per i Presidenti</a:t>
-            </a:r>
-            <a:endParaRPr lang="en-US" sz="1050" dirty="0"/>
-          </a:p>
-          <a:p>
-            <a:pPr marL="342900" indent="-342900">
-              <a:spcAft>
-                <a:spcPts val="400"/>
-              </a:spcAft>
-              <a:buSzPct val="100000"/>
-              <a:buChar char="•"/>
-            </a:pPr>
-            <a:r>
-              <a:rPr lang="en-US" sz="1050" dirty="0">
-                <a:solidFill>
-                  <a:srgbClr val="334155"/>
-                </a:solidFill>
-                <a:latin typeface="Calibri" pitchFamily="34" charset="0"/>
-                <a:ea typeface="Calibri" pitchFamily="34" charset="-122"/>
-                <a:cs typeface="Calibri" pitchFamily="34" charset="-120"/>
-              </a:rPr>
-              <a:t>Apertura ad altri Distretti italiani</a:t>
-            </a:r>
-            <a:endParaRPr lang="en-US" sz="1050" dirty="0"/>
-          </a:p>
-          <a:p>
-            <a:pPr marL="342900" indent="-342900">
-              <a:spcAft>
-                <a:spcPts val="400"/>
-              </a:spcAft>
-              <a:buSzPct val="100000"/>
-              <a:buChar char="•"/>
-            </a:pPr>
-            <a:r>
-              <a:rPr lang="en-US" sz="1050" dirty="0">
-                <a:solidFill>
-                  <a:srgbClr val="334155"/>
-                </a:solidFill>
-                <a:latin typeface="Calibri" pitchFamily="34" charset="0"/>
-                <a:ea typeface="Calibri" pitchFamily="34" charset="-122"/>
-                <a:cs typeface="Calibri" pitchFamily="34" charset="-120"/>
-              </a:rPr>
-              <a:t>Integrazione MyLion / Lions Portal (se API disponibile)</a:t>
-            </a:r>
-            <a:endParaRPr lang="en-US" sz="1050" dirty="0"/>
+              <a:t>Tra le 5 feature di slide 4. Indicate 1ª scelta e 2ª scelta.</a:t>
+            </a:r>
+            <a:endParaRPr lang="en-US" sz="1100" dirty="0"/>
           </a:p>
         </p:txBody>
       </p:sp>
@@ -10465,7 +10627,7 @@
                 <a:ea typeface="Trebuchet MS" pitchFamily="34" charset="-122"/>
                 <a:cs typeface="Trebuchet MS" pitchFamily="34" charset="-120"/>
               </a:rPr>
-              <a:t>Costi di infrastruttura</a:t>
+              <a:t>Roadmap proposta</a:t>
             </a:r>
             <a:endParaRPr lang="en-US" sz="2600" dirty="0"/>
           </a:p>
@@ -10504,7 +10666,7 @@
                 <a:ea typeface="Calibri" pitchFamily="34" charset="-122"/>
                 <a:cs typeface="Calibri" pitchFamily="34" charset="-120"/>
               </a:rPr>
-              <a:t>Trasparenza totale · lo sviluppo (manutenzione, nuove feature) è separato e a forfait</a:t>
+              <a:t>Sequenza temporale dipendente dalle decisioni di oggi</a:t>
             </a:r>
             <a:endParaRPr lang="en-US" sz="1300" dirty="0"/>
           </a:p>
@@ -10519,11 +10681,11 @@
         <p:spPr>
           <a:xfrm>
             <a:off x="457200" y="1417320"/>
-            <a:ext cx="2651760" cy="2468880"/>
+            <a:ext cx="2651760" cy="3200400"/>
           </a:xfrm>
           <a:prstGeom prst="roundRect">
             <a:avLst>
-              <a:gd name="adj" fmla="val 3704"/>
+              <a:gd name="adj" fmla="val 3448"/>
             </a:avLst>
           </a:prstGeom>
           <a:solidFill>
@@ -10531,7 +10693,7 @@
           </a:solidFill>
           <a:ln w="12700">
             <a:solidFill>
-              <a:srgbClr val="059669"/>
+              <a:srgbClr val="E2E8F0"/>
             </a:solidFill>
             <a:prstDash val="solid"/>
           </a:ln>
@@ -10553,13 +10715,13 @@
         <p:spPr>
           <a:xfrm>
             <a:off x="457200" y="1417320"/>
-            <a:ext cx="2651760" cy="411480"/>
+            <a:ext cx="2651760" cy="502920"/>
           </a:xfrm>
           <a:prstGeom prst="rect">
             <a:avLst/>
           </a:prstGeom>
           <a:solidFill>
-            <a:srgbClr val="059669"/>
+            <a:srgbClr val="0055FF"/>
           </a:solidFill>
           <a:ln/>
         </p:spPr>
@@ -10572,8 +10734,8 @@
         </p:nvSpPr>
         <p:spPr>
           <a:xfrm>
-            <a:off x="594360" y="1472184"/>
-            <a:ext cx="2377440" cy="301752"/>
+            <a:off x="594360" y="1463040"/>
+            <a:ext cx="2377440" cy="256032"/>
           </a:xfrm>
           <a:prstGeom prst="rect">
             <a:avLst/>
@@ -10589,7 +10751,7 @@
               <a:buNone/>
             </a:pPr>
             <a:r>
-              <a:rPr lang="en-US" sz="1200" b="1" dirty="0">
+              <a:rPr lang="en-US" sz="1100" b="1" dirty="0">
                 <a:solidFill>
                   <a:srgbClr val="FFFFFF"/>
                 </a:solidFill>
@@ -10597,9 +10759,9 @@
                 <a:ea typeface="Trebuchet MS" pitchFamily="34" charset="-122"/>
                 <a:cs typeface="Trebuchet MS" pitchFamily="34" charset="-120"/>
               </a:rPr>
-              <a:t>Oggi · Free Tier</a:t>
-            </a:r>
-            <a:endParaRPr lang="en-US" sz="1200" dirty="0"/>
+              <a:t>Giugno–Settembre 2026</a:t>
+            </a:r>
+            <a:endParaRPr lang="en-US" sz="1100" dirty="0"/>
           </a:p>
         </p:txBody>
       </p:sp>
@@ -10611,73 +10773,119 @@
         </p:nvSpPr>
         <p:spPr>
           <a:xfrm>
-            <a:off x="594360" y="1965960"/>
-            <a:ext cx="2377440" cy="731520"/>
-          </a:xfrm>
-          <a:prstGeom prst="rect">
-            <a:avLst/>
-          </a:prstGeom>
-          <a:noFill/>
-          <a:ln/>
-        </p:spPr>
-        <p:txBody>
-          <a:bodyPr wrap="square" lIns="0" tIns="0" rIns="0" bIns="0" rtlCol="0" anchor="ctr"/>
-          <a:lstStyle/>
-          <a:p>
-            <a:pPr algn="ctr" indent="0" marL="0">
-              <a:buNone/>
-            </a:pPr>
-            <a:r>
-              <a:rPr lang="en-US" sz="2800" b="1" dirty="0">
-                <a:solidFill>
-                  <a:srgbClr val="059669"/>
-                </a:solidFill>
-                <a:latin typeface="Trebuchet MS" pitchFamily="34" charset="0"/>
-                <a:ea typeface="Trebuchet MS" pitchFamily="34" charset="-122"/>
-                <a:cs typeface="Trebuchet MS" pitchFamily="34" charset="-120"/>
-              </a:rPr>
-              <a:t>€ 0</a:t>
-            </a:r>
-            <a:endParaRPr lang="en-US" sz="2800" dirty="0"/>
-          </a:p>
-        </p:txBody>
-      </p:sp>
-      <p:sp>
-        <p:nvSpPr>
-          <p:cNvPr id="8" name="Text 6"/>
-          <p:cNvSpPr/>
-          <p:nvPr/>
-        </p:nvSpPr>
-        <p:spPr>
-          <a:xfrm>
-            <a:off x="594360" y="2788920"/>
-            <a:ext cx="2377440" cy="1051560"/>
-          </a:xfrm>
-          <a:prstGeom prst="rect">
-            <a:avLst/>
-          </a:prstGeom>
-          <a:noFill/>
-          <a:ln/>
-        </p:spPr>
-        <p:txBody>
-          <a:bodyPr wrap="square" lIns="0" tIns="0" rIns="0" bIns="0" rtlCol="0" anchor="t"/>
+            <a:off x="594360" y="1691640"/>
+            <a:ext cx="2377440" cy="201168"/>
+          </a:xfrm>
+          <a:prstGeom prst="rect">
+            <a:avLst/>
+          </a:prstGeom>
+          <a:noFill/>
+          <a:ln/>
+        </p:spPr>
+        <p:txBody>
+          <a:bodyPr wrap="square" lIns="0" tIns="0" rIns="0" bIns="0" rtlCol="0" anchor="ctr"/>
           <a:lstStyle/>
           <a:p>
             <a:pPr indent="0" marL="0">
               <a:buNone/>
             </a:pPr>
             <a:r>
-              <a:rPr lang="en-US" sz="1000" dirty="0">
-                <a:solidFill>
-                  <a:srgbClr val="334155"/>
+              <a:rPr lang="en-US" sz="900" i="1" dirty="0">
+                <a:solidFill>
+                  <a:srgbClr val="FFFFFF"/>
                 </a:solidFill>
                 <a:latin typeface="Calibri" pitchFamily="34" charset="0"/>
                 <a:ea typeface="Calibri" pitchFamily="34" charset="-122"/>
                 <a:cs typeface="Calibri" pitchFamily="34" charset="-120"/>
               </a:rPr>
-              <a:t>Vercel Free + Supabase Free + GitHub Free. Fino a ~50 utenti attivi/giorno, 500MB DB.</a:t>
-            </a:r>
-            <a:endParaRPr lang="en-US" sz="1000" dirty="0"/>
+              <a:t>FY 2026/27 · prima parte</a:t>
+            </a:r>
+            <a:endParaRPr lang="en-US" sz="900" dirty="0"/>
+          </a:p>
+        </p:txBody>
+      </p:sp>
+      <p:sp>
+        <p:nvSpPr>
+          <p:cNvPr id="8" name="Text 6"/>
+          <p:cNvSpPr/>
+          <p:nvPr/>
+        </p:nvSpPr>
+        <p:spPr>
+          <a:xfrm>
+            <a:off x="640080" y="2057400"/>
+            <a:ext cx="2331720" cy="2468880"/>
+          </a:xfrm>
+          <a:prstGeom prst="rect">
+            <a:avLst/>
+          </a:prstGeom>
+          <a:noFill/>
+          <a:ln/>
+        </p:spPr>
+        <p:txBody>
+          <a:bodyPr wrap="square" rtlCol="0" anchor="ctr"/>
+          <a:lstStyle/>
+          <a:p>
+            <a:pPr marL="342900" indent="-342900">
+              <a:spcAft>
+                <a:spcPts val="400"/>
+              </a:spcAft>
+              <a:buSzPct val="100000"/>
+              <a:buChar char="•"/>
+            </a:pPr>
+            <a:r>
+              <a:rPr lang="en-US" sz="1050" dirty="0">
+                <a:solidFill>
+                  <a:srgbClr val="334155"/>
+                </a:solidFill>
+                <a:latin typeface="Calibri" pitchFamily="34" charset="0"/>
+                <a:ea typeface="Calibri" pitchFamily="34" charset="-122"/>
+                <a:cs typeface="Calibri" pitchFamily="34" charset="-120"/>
+              </a:rPr>
+              <a:t>Login con ruoli (Socio / Officer di Club / Officer di Distretto)</a:t>
+            </a:r>
+            <a:endParaRPr lang="en-US" sz="1050" dirty="0"/>
+          </a:p>
+          <a:p>
+            <a:pPr marL="342900" indent="-342900">
+              <a:spcAft>
+                <a:spcPts val="400"/>
+              </a:spcAft>
+              <a:buSzPct val="100000"/>
+              <a:buChar char="•"/>
+            </a:pPr>
+            <a:r>
+              <a:rPr lang="en-US" sz="1050" dirty="0">
+                <a:solidFill>
+                  <a:srgbClr val="334155"/>
+                </a:solidFill>
+                <a:latin typeface="Calibri" pitchFamily="34" charset="0"/>
+                <a:ea typeface="Calibri" pitchFamily="34" charset="-122"/>
+                <a:cs typeface="Calibri" pitchFamily="34" charset="-120"/>
+              </a:rPr>
+              <a:t>Import semi-automatico CSV (autonomia Segreteria)</a:t>
+            </a:r>
+            <a:endParaRPr lang="en-US" sz="1050" dirty="0"/>
+          </a:p>
+          <a:p>
+            <a:pPr marL="342900" indent="-342900">
+              <a:spcAft>
+                <a:spcPts val="400"/>
+              </a:spcAft>
+              <a:buSzPct val="100000"/>
+              <a:buChar char="•"/>
+            </a:pPr>
+            <a:r>
+              <a:rPr lang="en-US" sz="1050" dirty="0">
+                <a:solidFill>
+                  <a:srgbClr val="334155"/>
+                </a:solidFill>
+                <a:latin typeface="Calibri" pitchFamily="34" charset="0"/>
+                <a:ea typeface="Calibri" pitchFamily="34" charset="-122"/>
+                <a:cs typeface="Calibri" pitchFamily="34" charset="-120"/>
+              </a:rPr>
+              <a:t>Inserimento attività online (form web)</a:t>
+            </a:r>
+            <a:endParaRPr lang="en-US" sz="1050" dirty="0"/>
           </a:p>
         </p:txBody>
       </p:sp>
@@ -10690,11 +10898,11 @@
         <p:spPr>
           <a:xfrm>
             <a:off x="3246120" y="1417320"/>
-            <a:ext cx="2651760" cy="2468880"/>
+            <a:ext cx="2651760" cy="3200400"/>
           </a:xfrm>
           <a:prstGeom prst="roundRect">
             <a:avLst>
-              <a:gd name="adj" fmla="val 3704"/>
+              <a:gd name="adj" fmla="val 3448"/>
             </a:avLst>
           </a:prstGeom>
           <a:solidFill>
@@ -10702,7 +10910,7 @@
           </a:solidFill>
           <a:ln w="12700">
             <a:solidFill>
-              <a:srgbClr val="0055FF"/>
+              <a:srgbClr val="E2E8F0"/>
             </a:solidFill>
             <a:prstDash val="solid"/>
           </a:ln>
@@ -10724,13 +10932,13 @@
         <p:spPr>
           <a:xfrm>
             <a:off x="3246120" y="1417320"/>
-            <a:ext cx="2651760" cy="411480"/>
+            <a:ext cx="2651760" cy="502920"/>
           </a:xfrm>
           <a:prstGeom prst="rect">
             <a:avLst/>
           </a:prstGeom>
           <a:solidFill>
-            <a:srgbClr val="0055FF"/>
+            <a:srgbClr val="7C3AED"/>
           </a:solidFill>
           <a:ln/>
         </p:spPr>
@@ -10743,8 +10951,8 @@
         </p:nvSpPr>
         <p:spPr>
           <a:xfrm>
-            <a:off x="3383280" y="1472184"/>
-            <a:ext cx="2377440" cy="301752"/>
+            <a:off x="3383280" y="1463040"/>
+            <a:ext cx="2377440" cy="256032"/>
           </a:xfrm>
           <a:prstGeom prst="rect">
             <a:avLst/>
@@ -10760,7 +10968,7 @@
               <a:buNone/>
             </a:pPr>
             <a:r>
-              <a:rPr lang="en-US" sz="1200" b="1" dirty="0">
+              <a:rPr lang="en-US" sz="1100" b="1" dirty="0">
                 <a:solidFill>
                   <a:srgbClr val="FFFFFF"/>
                 </a:solidFill>
@@ -10768,9 +10976,9 @@
                 <a:ea typeface="Trebuchet MS" pitchFamily="34" charset="-122"/>
                 <a:cs typeface="Trebuchet MS" pitchFamily="34" charset="-120"/>
               </a:rPr>
-              <a:t>Pro · uso da Direttivo</a:t>
-            </a:r>
-            <a:endParaRPr lang="en-US" sz="1200" dirty="0"/>
+              <a:t>Ottobre 2026 – Marzo 2027</a:t>
+            </a:r>
+            <a:endParaRPr lang="en-US" sz="1100" dirty="0"/>
           </a:p>
         </p:txBody>
       </p:sp>
@@ -10782,73 +10990,140 @@
         </p:nvSpPr>
         <p:spPr>
           <a:xfrm>
-            <a:off x="3383280" y="1965960"/>
-            <a:ext cx="2377440" cy="731520"/>
-          </a:xfrm>
-          <a:prstGeom prst="rect">
-            <a:avLst/>
-          </a:prstGeom>
-          <a:noFill/>
-          <a:ln/>
-        </p:spPr>
-        <p:txBody>
-          <a:bodyPr wrap="square" lIns="0" tIns="0" rIns="0" bIns="0" rtlCol="0" anchor="ctr"/>
-          <a:lstStyle/>
-          <a:p>
-            <a:pPr algn="ctr" indent="0" marL="0">
-              <a:buNone/>
-            </a:pPr>
-            <a:r>
-              <a:rPr lang="en-US" sz="2800" b="1" dirty="0">
-                <a:solidFill>
-                  <a:srgbClr val="0055FF"/>
-                </a:solidFill>
-                <a:latin typeface="Trebuchet MS" pitchFamily="34" charset="0"/>
-                <a:ea typeface="Trebuchet MS" pitchFamily="34" charset="-122"/>
-                <a:cs typeface="Trebuchet MS" pitchFamily="34" charset="-120"/>
-              </a:rPr>
-              <a:t>≈ € 25 / mese</a:t>
-            </a:r>
-            <a:endParaRPr lang="en-US" sz="2800" dirty="0"/>
-          </a:p>
-        </p:txBody>
-      </p:sp>
-      <p:sp>
-        <p:nvSpPr>
-          <p:cNvPr id="13" name="Text 11"/>
-          <p:cNvSpPr/>
-          <p:nvPr/>
-        </p:nvSpPr>
-        <p:spPr>
-          <a:xfrm>
-            <a:off x="3383280" y="2788920"/>
-            <a:ext cx="2377440" cy="1051560"/>
-          </a:xfrm>
-          <a:prstGeom prst="rect">
-            <a:avLst/>
-          </a:prstGeom>
-          <a:noFill/>
-          <a:ln/>
-        </p:spPr>
-        <p:txBody>
-          <a:bodyPr wrap="square" lIns="0" tIns="0" rIns="0" bIns="0" rtlCol="0" anchor="t"/>
+            <a:off x="3383280" y="1691640"/>
+            <a:ext cx="2377440" cy="201168"/>
+          </a:xfrm>
+          <a:prstGeom prst="rect">
+            <a:avLst/>
+          </a:prstGeom>
+          <a:noFill/>
+          <a:ln/>
+        </p:spPr>
+        <p:txBody>
+          <a:bodyPr wrap="square" lIns="0" tIns="0" rIns="0" bIns="0" rtlCol="0" anchor="ctr"/>
           <a:lstStyle/>
           <a:p>
             <a:pPr indent="0" marL="0">
               <a:buNone/>
             </a:pPr>
             <a:r>
-              <a:rPr lang="en-US" sz="1000" dirty="0">
-                <a:solidFill>
-                  <a:srgbClr val="334155"/>
+              <a:rPr lang="en-US" sz="900" i="1" dirty="0">
+                <a:solidFill>
+                  <a:srgbClr val="FFFFFF"/>
                 </a:solidFill>
                 <a:latin typeface="Calibri" pitchFamily="34" charset="0"/>
                 <a:ea typeface="Calibri" pitchFamily="34" charset="-122"/>
                 <a:cs typeface="Calibri" pitchFamily="34" charset="-120"/>
               </a:rPr>
-              <a:t>Supabase Pro (8GB DB, backup giornalieri, no pausa automatica). Dominio già attivo.</a:t>
-            </a:r>
-            <a:endParaRPr lang="en-US" sz="1000" dirty="0"/>
+              <a:t>FY 2026/27 · seconda parte</a:t>
+            </a:r>
+            <a:endParaRPr lang="en-US" sz="900" dirty="0"/>
+          </a:p>
+        </p:txBody>
+      </p:sp>
+      <p:sp>
+        <p:nvSpPr>
+          <p:cNvPr id="13" name="Text 11"/>
+          <p:cNvSpPr/>
+          <p:nvPr/>
+        </p:nvSpPr>
+        <p:spPr>
+          <a:xfrm>
+            <a:off x="3429000" y="2057400"/>
+            <a:ext cx="2331720" cy="2468880"/>
+          </a:xfrm>
+          <a:prstGeom prst="rect">
+            <a:avLst/>
+          </a:prstGeom>
+          <a:noFill/>
+          <a:ln/>
+        </p:spPr>
+        <p:txBody>
+          <a:bodyPr wrap="square" rtlCol="0" anchor="ctr"/>
+          <a:lstStyle/>
+          <a:p>
+            <a:pPr marL="342900" indent="-342900">
+              <a:spcAft>
+                <a:spcPts val="400"/>
+              </a:spcAft>
+              <a:buSzPct val="100000"/>
+              <a:buChar char="•"/>
+            </a:pPr>
+            <a:r>
+              <a:rPr lang="en-US" sz="1050" dirty="0">
+                <a:solidFill>
+                  <a:srgbClr val="334155"/>
+                </a:solidFill>
+                <a:latin typeface="Calibri" pitchFamily="34" charset="0"/>
+                <a:ea typeface="Calibri" pitchFamily="34" charset="-122"/>
+                <a:cs typeface="Calibri" pitchFamily="34" charset="-120"/>
+              </a:rPr>
+              <a:t>Notifiche email automatiche (reminder, anniversari)</a:t>
+            </a:r>
+            <a:endParaRPr lang="en-US" sz="1050" dirty="0"/>
+          </a:p>
+          <a:p>
+            <a:pPr marL="342900" indent="-342900">
+              <a:spcAft>
+                <a:spcPts val="400"/>
+              </a:spcAft>
+              <a:buSzPct val="100000"/>
+              <a:buChar char="•"/>
+            </a:pPr>
+            <a:r>
+              <a:rPr lang="en-US" sz="1050" dirty="0">
+                <a:solidFill>
+                  <a:srgbClr val="334155"/>
+                </a:solidFill>
+                <a:latin typeface="Calibri" pitchFamily="34" charset="0"/>
+                <a:ea typeface="Calibri" pitchFamily="34" charset="-122"/>
+                <a:cs typeface="Calibri" pitchFamily="34" charset="-120"/>
+              </a:rPr>
+              <a:t>Export Excel da tutte le tabelle</a:t>
+            </a:r>
+            <a:endParaRPr lang="en-US" sz="1050" dirty="0"/>
+          </a:p>
+          <a:p>
+            <a:pPr marL="342900" indent="-342900">
+              <a:spcAft>
+                <a:spcPts val="400"/>
+              </a:spcAft>
+              <a:buSzPct val="100000"/>
+              <a:buChar char="•"/>
+            </a:pPr>
+            <a:r>
+              <a:rPr lang="en-US" sz="1050" dirty="0">
+                <a:solidFill>
+                  <a:srgbClr val="334155"/>
+                </a:solidFill>
+                <a:latin typeface="Calibri" pitchFamily="34" charset="0"/>
+                <a:ea typeface="Calibri" pitchFamily="34" charset="-122"/>
+                <a:cs typeface="Calibri" pitchFamily="34" charset="-120"/>
+              </a:rPr>
+              <a:t>Gestione verbali e atti del Direttivo</a:t>
+            </a:r>
+            <a:endParaRPr lang="en-US" sz="1050" dirty="0"/>
+          </a:p>
+          <a:p>
+            <a:pPr marL="342900" indent="-342900">
+              <a:spcAft>
+                <a:spcPts val="400"/>
+              </a:spcAft>
+              <a:buSzPct val="100000"/>
+              <a:buChar char="•"/>
+            </a:pPr>
+            <a:r>
+              <a:rPr lang="en-US" sz="1050" dirty="0">
+                <a:solidFill>
+                  <a:srgbClr val="334155"/>
+                </a:solidFill>
+                <a:latin typeface="Calibri" pitchFamily="34" charset="0"/>
+                <a:ea typeface="Calibri" pitchFamily="34" charset="-122"/>
+                <a:cs typeface="Calibri" pitchFamily="34" charset="-120"/>
+              </a:rPr>
+              <a:t>Quadri storici (se arrivano i dati da LCI)</a:t>
+            </a:r>
+            <a:endParaRPr lang="en-US" sz="1050" dirty="0"/>
           </a:p>
         </p:txBody>
       </p:sp>
@@ -10861,11 +11136,11 @@
         <p:spPr>
           <a:xfrm>
             <a:off x="6035040" y="1417320"/>
-            <a:ext cx="2651760" cy="2468880"/>
+            <a:ext cx="2651760" cy="3200400"/>
           </a:xfrm>
           <a:prstGeom prst="roundRect">
             <a:avLst>
-              <a:gd name="adj" fmla="val 3704"/>
+              <a:gd name="adj" fmla="val 3448"/>
             </a:avLst>
           </a:prstGeom>
           <a:solidFill>
@@ -10873,7 +11148,7 @@
           </a:solidFill>
           <a:ln w="12700">
             <a:solidFill>
-              <a:srgbClr val="7C3AED"/>
+              <a:srgbClr val="E2E8F0"/>
             </a:solidFill>
             <a:prstDash val="solid"/>
           </a:ln>
@@ -10895,13 +11170,13 @@
         <p:spPr>
           <a:xfrm>
             <a:off x="6035040" y="1417320"/>
-            <a:ext cx="2651760" cy="411480"/>
+            <a:ext cx="2651760" cy="502920"/>
           </a:xfrm>
           <a:prstGeom prst="rect">
             <a:avLst/>
           </a:prstGeom>
           <a:solidFill>
-            <a:srgbClr val="7C3AED"/>
+            <a:srgbClr val="059669"/>
           </a:solidFill>
           <a:ln/>
         </p:spPr>
@@ -10914,8 +11189,8 @@
         </p:nvSpPr>
         <p:spPr>
           <a:xfrm>
-            <a:off x="6172200" y="1472184"/>
-            <a:ext cx="2377440" cy="301752"/>
+            <a:off x="6172200" y="1463040"/>
+            <a:ext cx="2377440" cy="256032"/>
           </a:xfrm>
           <a:prstGeom prst="rect">
             <a:avLst/>
@@ -10931,7 +11206,7 @@
               <a:buNone/>
             </a:pPr>
             <a:r>
-              <a:rPr lang="en-US" sz="1200" b="1" dirty="0">
+              <a:rPr lang="en-US" sz="1100" b="1" dirty="0">
                 <a:solidFill>
                   <a:srgbClr val="FFFFFF"/>
                 </a:solidFill>
@@ -10939,9 +11214,9 @@
                 <a:ea typeface="Trebuchet MS" pitchFamily="34" charset="-122"/>
                 <a:cs typeface="Trebuchet MS" pitchFamily="34" charset="-120"/>
               </a:rPr>
-              <a:t>Multi-Distretto</a:t>
-            </a:r>
-            <a:endParaRPr lang="en-US" sz="1200" dirty="0"/>
+              <a:t>Aprile 2027 e oltre</a:t>
+            </a:r>
+            <a:endParaRPr lang="en-US" sz="1100" dirty="0"/>
           </a:p>
         </p:txBody>
       </p:sp>
@@ -10953,136 +11228,67 @@
         </p:nvSpPr>
         <p:spPr>
           <a:xfrm>
-            <a:off x="6172200" y="1965960"/>
-            <a:ext cx="2377440" cy="731520"/>
-          </a:xfrm>
-          <a:prstGeom prst="rect">
-            <a:avLst/>
-          </a:prstGeom>
-          <a:noFill/>
-          <a:ln/>
-        </p:spPr>
-        <p:txBody>
-          <a:bodyPr wrap="square" lIns="0" tIns="0" rIns="0" bIns="0" rtlCol="0" anchor="ctr"/>
-          <a:lstStyle/>
-          <a:p>
-            <a:pPr algn="ctr" indent="0" marL="0">
-              <a:buNone/>
-            </a:pPr>
-            <a:r>
-              <a:rPr lang="en-US" sz="2800" b="1" dirty="0">
-                <a:solidFill>
-                  <a:srgbClr val="7C3AED"/>
-                </a:solidFill>
-                <a:latin typeface="Trebuchet MS" pitchFamily="34" charset="0"/>
-                <a:ea typeface="Trebuchet MS" pitchFamily="34" charset="-122"/>
-                <a:cs typeface="Trebuchet MS" pitchFamily="34" charset="-120"/>
-              </a:rPr>
-              <a:t>≈ € 80 / mese</a:t>
-            </a:r>
-            <a:endParaRPr lang="en-US" sz="2800" dirty="0"/>
-          </a:p>
-        </p:txBody>
-      </p:sp>
-      <p:sp>
-        <p:nvSpPr>
-          <p:cNvPr id="18" name="Text 16"/>
-          <p:cNvSpPr/>
-          <p:nvPr/>
-        </p:nvSpPr>
-        <p:spPr>
-          <a:xfrm>
-            <a:off x="6172200" y="2788920"/>
-            <a:ext cx="2377440" cy="1051560"/>
-          </a:xfrm>
-          <a:prstGeom prst="rect">
-            <a:avLst/>
-          </a:prstGeom>
-          <a:noFill/>
-          <a:ln/>
-        </p:spPr>
-        <p:txBody>
-          <a:bodyPr wrap="square" lIns="0" tIns="0" rIns="0" bIns="0" rtlCol="0" anchor="t"/>
+            <a:off x="6172200" y="1691640"/>
+            <a:ext cx="2377440" cy="201168"/>
+          </a:xfrm>
+          <a:prstGeom prst="rect">
+            <a:avLst/>
+          </a:prstGeom>
+          <a:noFill/>
+          <a:ln/>
+        </p:spPr>
+        <p:txBody>
+          <a:bodyPr wrap="square" lIns="0" tIns="0" rIns="0" bIns="0" rtlCol="0" anchor="ctr"/>
           <a:lstStyle/>
           <a:p>
             <a:pPr indent="0" marL="0">
               <a:buNone/>
             </a:pPr>
             <a:r>
-              <a:rPr lang="en-US" sz="1000" dirty="0">
-                <a:solidFill>
-                  <a:srgbClr val="334155"/>
+              <a:rPr lang="en-US" sz="900" i="1" dirty="0">
+                <a:solidFill>
+                  <a:srgbClr val="FFFFFF"/>
                 </a:solidFill>
                 <a:latin typeface="Calibri" pitchFamily="34" charset="0"/>
                 <a:ea typeface="Calibri" pitchFamily="34" charset="-122"/>
                 <a:cs typeface="Calibri" pitchFamily="34" charset="-120"/>
               </a:rPr>
-              <a:t>Vercel Pro + Supabase Pro + monitoring. ~500 utenti, 8GB DB con replica, backup 7gg.</a:t>
-            </a:r>
-            <a:endParaRPr lang="en-US" sz="1000" dirty="0"/>
-          </a:p>
-        </p:txBody>
-      </p:sp>
-      <p:sp>
-        <p:nvSpPr>
-          <p:cNvPr id="19" name="Shape 17"/>
-          <p:cNvSpPr/>
-          <p:nvPr/>
-        </p:nvSpPr>
-        <p:spPr>
-          <a:xfrm>
-            <a:off x="457200" y="4114800"/>
-            <a:ext cx="8229600" cy="502920"/>
-          </a:xfrm>
-          <a:prstGeom prst="roundRect">
-            <a:avLst>
-              <a:gd name="adj" fmla="val 18182"/>
-            </a:avLst>
-          </a:prstGeom>
-          <a:solidFill>
-            <a:srgbClr val="FFFFFF"/>
-          </a:solidFill>
-          <a:ln w="12700">
-            <a:solidFill>
-              <a:srgbClr val="FFE500"/>
-            </a:solidFill>
-            <a:prstDash val="solid"/>
-          </a:ln>
-          <a:effectLst>
-            <a:outerShdw sx="100000" sy="100000" kx="0" ky="0" algn="bl" rotWithShape="0" blurRad="101600" dist="25400" dir="5400000">
-              <a:srgbClr val="000000">
-                <a:alpha val="8000"/>
-              </a:srgbClr>
-            </a:outerShdw>
-          </a:effectLst>
-        </p:spPr>
-      </p:sp>
-      <p:sp>
-        <p:nvSpPr>
-          <p:cNvPr id="20" name="Text 18"/>
-          <p:cNvSpPr/>
-          <p:nvPr/>
-        </p:nvSpPr>
-        <p:spPr>
-          <a:xfrm>
-            <a:off x="640080" y="4114800"/>
-            <a:ext cx="7955280" cy="502920"/>
-          </a:xfrm>
-          <a:prstGeom prst="rect">
-            <a:avLst/>
-          </a:prstGeom>
-          <a:noFill/>
-          <a:ln/>
-        </p:spPr>
-        <p:txBody>
-          <a:bodyPr wrap="square" lIns="0" tIns="0" rIns="0" bIns="0" rtlCol="0" anchor="ctr"/>
-          <a:lstStyle/>
-          <a:p>
-            <a:pPr indent="0" marL="0">
-              <a:buNone/>
-            </a:pPr>
-            <a:r>
-              <a:rPr lang="en-US" sz="1050" i="1" dirty="0">
+              <a:t>FY 2027/28</a:t>
+            </a:r>
+            <a:endParaRPr lang="en-US" sz="900" dirty="0"/>
+          </a:p>
+        </p:txBody>
+      </p:sp>
+      <p:sp>
+        <p:nvSpPr>
+          <p:cNvPr id="18" name="Text 16"/>
+          <p:cNvSpPr/>
+          <p:nvPr/>
+        </p:nvSpPr>
+        <p:spPr>
+          <a:xfrm>
+            <a:off x="6217920" y="2057400"/>
+            <a:ext cx="2331720" cy="2468880"/>
+          </a:xfrm>
+          <a:prstGeom prst="rect">
+            <a:avLst/>
+          </a:prstGeom>
+          <a:noFill/>
+          <a:ln/>
+        </p:spPr>
+        <p:txBody>
+          <a:bodyPr wrap="square" rtlCol="0" anchor="ctr"/>
+          <a:lstStyle/>
+          <a:p>
+            <a:pPr marL="342900" indent="-342900">
+              <a:spcAft>
+                <a:spcPts val="400"/>
+              </a:spcAft>
+              <a:buSzPct val="100000"/>
+              <a:buChar char="•"/>
+            </a:pPr>
+            <a:r>
+              <a:rPr lang="en-US" sz="1050" dirty="0">
                 <a:solidFill>
                   <a:srgbClr val="334155"/>
                 </a:solidFill>
@@ -11090,45 +11296,108 @@
                 <a:ea typeface="Calibri" pitchFamily="34" charset="-122"/>
                 <a:cs typeface="Calibri" pitchFamily="34" charset="-120"/>
               </a:rPr>
-              <a:t>💡  Lo sviluppo (manutenzione evolutiva, fix, nuove feature) è oggetto di contratto a parte con 01Informatica · proposta scritta dopo le decisioni di oggi</a:t>
+              <a:t>App mobile nativa (iOS · Android)</a:t>
             </a:r>
             <a:endParaRPr lang="en-US" sz="1050" dirty="0"/>
           </a:p>
-        </p:txBody>
-      </p:sp>
-      <p:sp>
-        <p:nvSpPr>
-          <p:cNvPr id="21" name="Text 19"/>
-          <p:cNvSpPr/>
-          <p:nvPr/>
-        </p:nvSpPr>
-        <p:spPr>
-          <a:xfrm>
-            <a:off x="457200" y="4864608"/>
-            <a:ext cx="6400800" cy="201168"/>
-          </a:xfrm>
-          <a:prstGeom prst="rect">
-            <a:avLst/>
-          </a:prstGeom>
-          <a:noFill/>
-          <a:ln/>
-        </p:spPr>
-        <p:txBody>
-          <a:bodyPr wrap="square" rtlCol="0" anchor="ctr"/>
-          <a:lstStyle/>
-          <a:p>
-            <a:pPr indent="0" marL="0">
-              <a:buNone/>
-            </a:pPr>
-            <a:r>
-              <a:rPr lang="en-US" sz="900" i="1" dirty="0">
-                <a:solidFill>
-                  <a:srgbClr val="64748B"/>
+          <a:p>
+            <a:pPr marL="342900" indent="-342900">
+              <a:spcAft>
+                <a:spcPts val="400"/>
+              </a:spcAft>
+              <a:buSzPct val="100000"/>
+              <a:buChar char="•"/>
+            </a:pPr>
+            <a:r>
+              <a:rPr lang="en-US" sz="1050" dirty="0">
+                <a:solidFill>
+                  <a:srgbClr val="334155"/>
                 </a:solidFill>
                 <a:latin typeface="Calibri" pitchFamily="34" charset="0"/>
                 <a:ea typeface="Calibri" pitchFamily="34" charset="-122"/>
                 <a:cs typeface="Calibri" pitchFamily="34" charset="-120"/>
               </a:rPr>
+              <a:t>Assistente AI per i Presidenti</a:t>
+            </a:r>
+            <a:endParaRPr lang="en-US" sz="1050" dirty="0"/>
+          </a:p>
+          <a:p>
+            <a:pPr marL="342900" indent="-342900">
+              <a:spcAft>
+                <a:spcPts val="400"/>
+              </a:spcAft>
+              <a:buSzPct val="100000"/>
+              <a:buChar char="•"/>
+            </a:pPr>
+            <a:r>
+              <a:rPr lang="en-US" sz="1050" dirty="0">
+                <a:solidFill>
+                  <a:srgbClr val="334155"/>
+                </a:solidFill>
+                <a:latin typeface="Calibri" pitchFamily="34" charset="0"/>
+                <a:ea typeface="Calibri" pitchFamily="34" charset="-122"/>
+                <a:cs typeface="Calibri" pitchFamily="34" charset="-120"/>
+              </a:rPr>
+              <a:t>Apertura ad altri Distretti italiani</a:t>
+            </a:r>
+            <a:endParaRPr lang="en-US" sz="1050" dirty="0"/>
+          </a:p>
+          <a:p>
+            <a:pPr marL="342900" indent="-342900">
+              <a:spcAft>
+                <a:spcPts val="400"/>
+              </a:spcAft>
+              <a:buSzPct val="100000"/>
+              <a:buChar char="•"/>
+            </a:pPr>
+            <a:r>
+              <a:rPr lang="en-US" sz="1050" dirty="0">
+                <a:solidFill>
+                  <a:srgbClr val="334155"/>
+                </a:solidFill>
+                <a:latin typeface="Calibri" pitchFamily="34" charset="0"/>
+                <a:ea typeface="Calibri" pitchFamily="34" charset="-122"/>
+                <a:cs typeface="Calibri" pitchFamily="34" charset="-120"/>
+              </a:rPr>
+              <a:t>Integrazione MyLion / Lions Portal (se API disponibile)</a:t>
+            </a:r>
+            <a:endParaRPr lang="en-US" sz="1050" dirty="0"/>
+          </a:p>
+        </p:txBody>
+      </p:sp>
+      <p:sp>
+        <p:nvSpPr>
+          <p:cNvPr id="19" name="Text 17"/>
+          <p:cNvSpPr/>
+          <p:nvPr/>
+        </p:nvSpPr>
+        <p:spPr>
+          <a:xfrm>
+            <a:off x="457200" y="4864608"/>
+            <a:ext cx="6400800" cy="201168"/>
+          </a:xfrm>
+          <a:prstGeom prst="rect">
+            <a:avLst/>
+          </a:prstGeom>
+          <a:noFill/>
+          <a:ln/>
+        </p:spPr>
+        <p:txBody>
+          <a:bodyPr wrap="square" rtlCol="0" anchor="ctr"/>
+          <a:lstStyle/>
+          <a:p>
+            <a:pPr indent="0" marL="0">
+              <a:buNone/>
+            </a:pPr>
+            <a:r>
+              <a:rPr lang="en-US" sz="900" i="1" dirty="0">
+                <a:solidFill>
+                  <a:srgbClr val="64748B"/>
+                </a:solidFill>
+                <a:latin typeface="Calibri" pitchFamily="34" charset="0"/>
+                <a:ea typeface="Calibri" pitchFamily="34" charset="-122"/>
+                <a:cs typeface="Calibri" pitchFamily="34" charset="-120"/>
+              </a:rPr>
               <a:t>Digitalions · digitalions108la.it · Distretto Lions 108 LA</a:t>
             </a:r>
             <a:endParaRPr lang="en-US" sz="900" dirty="0"/>
@@ -11137,7 +11406,7 @@
       </p:sp>
       <p:sp>
         <p:nvSpPr>
-          <p:cNvPr id="22" name="Text 20"/>
+          <p:cNvPr id="20" name="Text 18"/>
           <p:cNvSpPr/>
           <p:nvPr/>
         </p:nvSpPr>
